--- a/PrisePulse_Presentation.pptx
+++ b/PrisePulse_Presentation.pptx
@@ -4,6 +4,9 @@
   <p:sldMasterIdLst>
     <p:sldMasterId id="2147483648" r:id="rId1"/>
   </p:sldMasterIdLst>
+  <p:notesMasterIdLst>
+    <p:notesMasterId r:id="rId13"/>
+  </p:notesMasterIdLst>
   <p:sldIdLst>
     <p:sldId id="256" r:id="rId2"/>
     <p:sldId id="257" r:id="rId3"/>
@@ -17,10 +20,7 @@
     <p:sldId id="265" r:id="rId11"/>
     <p:sldId id="266" r:id="rId12"/>
   </p:sldIdLst>
-  <p:notesMasterIdLst>
-    <p:notesMasterId r:id="rId13"/>
-  </p:notesMasterIdLst>
-  <p:sldSz cx="9144000" cy="5143500"/>
+  <p:sldSz cx="9144000" cy="5143500" type="screen16x9"/>
   <p:notesSz cx="5143500" cy="9144000"/>
   <p:defaultTextStyle>
     <a:lvl1pPr marL="0" algn="l" defTabSz="914400" rtl="0" eaLnBrk="1" latinLnBrk="0" hangingPunct="1">
@@ -114,6 +114,11 @@
       </a:defRPr>
     </a:lvl9pPr>
   </p:defaultTextStyle>
+  <p:extLst>
+    <p:ext uri="{EFAFB233-063F-42B5-8137-9DF3F51BA10A}">
+      <p15:sldGuideLst xmlns:p15="http://schemas.microsoft.com/office/powerpoint/2012/main"/>
+    </p:ext>
+  </p:extLst>
 </p:presentation>
 </file>
 
@@ -139,234 +144,10 @@
           <a:chExt cx="0" cy="0"/>
         </a:xfrm>
       </p:grpSpPr>
-      <p:sp>
-        <p:nvSpPr>
-          <p:cNvPr id="2" name="Header Placeholder 1"/>
-          <p:cNvSpPr>
-            <a:spLocks noGrp="1"/>
-          </p:cNvSpPr>
-          <p:nvPr>
-            <p:ph type="hdr" sz="quarter"/>
-          </p:nvPr>
-        </p:nvSpPr>
-        <p:spPr>
-          <a:xfrm>
-            <a:off x="0" y="0"/>
-            <a:ext cx="2971800" cy="458788"/>
-          </a:xfrm>
-          <a:prstGeom prst="rect">
-            <a:avLst/>
-          </a:prstGeom>
-        </p:spPr>
-        <p:txBody>
-          <a:bodyPr vert="horz" lIns="91440" tIns="45720" rIns="91440" bIns="45720" rtlCol="0"/>
-          <a:lstStyle>
-            <a:lvl1pPr algn="l">
-              <a:defRPr sz="1200"/>
-            </a:lvl1pPr>
-          </a:lstStyle>
-          <a:p>
-            <a:endParaRPr lang="en-US"/>
-          </a:p>
-        </p:txBody>
-      </p:sp>
-      <p:sp>
-        <p:nvSpPr>
-          <p:cNvPr id="3" name="Date Placeholder 2"/>
-          <p:cNvSpPr>
-            <a:spLocks noGrp="1"/>
-          </p:cNvSpPr>
-          <p:nvPr>
-            <p:ph type="dt" idx="1"/>
-          </p:nvPr>
-        </p:nvSpPr>
-        <p:spPr>
-          <a:xfrm>
-            <a:off x="3884613" y="0"/>
-            <a:ext cx="2971800" cy="458788"/>
-          </a:xfrm>
-          <a:prstGeom prst="rect">
-            <a:avLst/>
-          </a:prstGeom>
-        </p:spPr>
-        <p:txBody>
-          <a:bodyPr vert="horz" lIns="91440" tIns="45720" rIns="91440" bIns="45720" rtlCol="0"/>
-          <a:lstStyle>
-            <a:lvl1pPr algn="r">
-              <a:defRPr sz="1200"/>
-            </a:lvl1pPr>
-          </a:lstStyle>
-          <a:p>
-            <a:fld id="{5282F153-3F37-0F45-9E97-73ACFA13230C}" type="datetimeFigureOut">
-              <a:rPr lang="en-US"/>
-              <a:t>7/23/19</a:t>
-            </a:fld>
-            <a:endParaRPr lang="en-US"/>
-          </a:p>
-        </p:txBody>
-      </p:sp>
-      <p:sp>
-        <p:nvSpPr>
-          <p:cNvPr id="4" name="Slide Image Placeholder 3"/>
-          <p:cNvSpPr>
-            <a:spLocks noGrp="1" noRot="1" noChangeAspect="1"/>
-          </p:cNvSpPr>
-          <p:nvPr>
-            <p:ph type="sldImg" idx="2"/>
-          </p:nvPr>
-        </p:nvSpPr>
-        <p:spPr>
-          <a:xfrm>
-            <a:off x="685800" y="1143000"/>
-            <a:ext cx="5486400" cy="3086100"/>
-          </a:xfrm>
-          <a:prstGeom prst="rect">
-            <a:avLst/>
-          </a:prstGeom>
-          <a:noFill/>
-          <a:ln w="12700">
-            <a:solidFill>
-              <a:prstClr val="black"/>
-            </a:solidFill>
-          </a:ln>
-        </p:spPr>
-        <p:txBody>
-          <a:bodyPr vert="horz" lIns="91440" tIns="45720" rIns="91440" bIns="45720" rtlCol="0" anchor="ctr"/>
-          <a:lstStyle/>
-          <a:p>
-            <a:endParaRPr lang="en-US"/>
-          </a:p>
-        </p:txBody>
-      </p:sp>
-      <p:sp>
-        <p:nvSpPr>
-          <p:cNvPr id="5" name="Notes Placeholder 4"/>
-          <p:cNvSpPr>
-            <a:spLocks noGrp="1"/>
-          </p:cNvSpPr>
-          <p:nvPr>
-            <p:ph type="body" sz="quarter" idx="3"/>
-          </p:nvPr>
-        </p:nvSpPr>
-        <p:spPr>
-          <a:xfrm>
-            <a:off x="685800" y="4400550"/>
-            <a:ext cx="5486400" cy="3600450"/>
-          </a:xfrm>
-          <a:prstGeom prst="rect">
-            <a:avLst/>
-          </a:prstGeom>
-        </p:spPr>
-        <p:txBody>
-          <a:bodyPr vert="horz" lIns="91440" tIns="45720" rIns="91440" bIns="45720" rtlCol="0"/>
-          <a:lstStyle/>
-          <a:p>
-            <a:pPr lvl="0"/>
-            <a:r>
-              <a:rPr lang="en-US"/>
-              <a:t>Click to edit Master text styles</a:t>
-            </a:r>
-          </a:p>
-          <a:p>
-            <a:pPr lvl="1"/>
-            <a:r>
-              <a:rPr lang="en-US"/>
-              <a:t>Second level</a:t>
-            </a:r>
-          </a:p>
-          <a:p>
-            <a:pPr lvl="2"/>
-            <a:r>
-              <a:rPr lang="en-US"/>
-              <a:t>Third level</a:t>
-            </a:r>
-          </a:p>
-          <a:p>
-            <a:pPr lvl="3"/>
-            <a:r>
-              <a:rPr lang="en-US"/>
-              <a:t>Fourth level</a:t>
-            </a:r>
-          </a:p>
-          <a:p>
-            <a:pPr lvl="4"/>
-            <a:r>
-              <a:rPr lang="en-US"/>
-              <a:t>Fifth level</a:t>
-            </a:r>
-          </a:p>
-        </p:txBody>
-      </p:sp>
-      <p:sp>
-        <p:nvSpPr>
-          <p:cNvPr id="6" name="Footer Placeholder 5"/>
-          <p:cNvSpPr>
-            <a:spLocks noGrp="1"/>
-          </p:cNvSpPr>
-          <p:nvPr>
-            <p:ph type="ftr" sz="quarter" idx="4"/>
-          </p:nvPr>
-        </p:nvSpPr>
-        <p:spPr>
-          <a:xfrm>
-            <a:off x="0" y="8685213"/>
-            <a:ext cx="2971800" cy="458787"/>
-          </a:xfrm>
-          <a:prstGeom prst="rect">
-            <a:avLst/>
-          </a:prstGeom>
-        </p:spPr>
-        <p:txBody>
-          <a:bodyPr vert="horz" lIns="91440" tIns="45720" rIns="91440" bIns="45720" rtlCol="0" anchor="b"/>
-          <a:lstStyle>
-            <a:lvl1pPr algn="l">
-              <a:defRPr sz="1200"/>
-            </a:lvl1pPr>
-          </a:lstStyle>
-          <a:p>
-            <a:endParaRPr lang="en-US"/>
-          </a:p>
-        </p:txBody>
-      </p:sp>
-      <p:sp>
-        <p:nvSpPr>
-          <p:cNvPr id="7" name="Slide Number Placeholder 6"/>
-          <p:cNvSpPr>
-            <a:spLocks noGrp="1"/>
-          </p:cNvSpPr>
-          <p:nvPr>
-            <p:ph type="sldNum" sz="quarter" idx="5"/>
-          </p:nvPr>
-        </p:nvSpPr>
-        <p:spPr>
-          <a:xfrm>
-            <a:off x="3884613" y="8685213"/>
-            <a:ext cx="2971800" cy="458787"/>
-          </a:xfrm>
-          <a:prstGeom prst="rect">
-            <a:avLst/>
-          </a:prstGeom>
-        </p:spPr>
-        <p:txBody>
-          <a:bodyPr vert="horz" lIns="91440" tIns="45720" rIns="91440" bIns="45720" rtlCol="0" anchor="b"/>
-          <a:lstStyle>
-            <a:lvl1pPr algn="r">
-              <a:defRPr sz="1200"/>
-            </a:lvl1pPr>
-          </a:lstStyle>
-          <a:p>
-            <a:fld id="{CE5E9CC1-C706-0F49-92D6-E571CC5EEA8F}" type="slidenum">
-              <a:rPr lang="en-US"/>
-              <a:t>‹#›</a:t>
-            </a:fld>
-            <a:endParaRPr lang="en-US"/>
-          </a:p>
-        </p:txBody>
-      </p:sp>
     </p:spTree>
     <p:extLst>
       <p:ext uri="{BB962C8B-B14F-4D97-AF65-F5344CB8AC3E}">
-        <p14:creationId xmlns:p14="http://schemas.microsoft.com/office/powerpoint/2010/main" val="1024086991"/>
+        <p14:creationId xmlns:p14="http://schemas.microsoft.com/office/powerpoint/2010/main" val="1284434056"/>
       </p:ext>
     </p:extLst>
   </p:cSld>
@@ -510,10 +291,6 @@
           <a:bodyPr/>
           <a:lstStyle/>
           <a:p>
-            <a:r>
-              <a:rPr lang="en-US" dirty="0"/>
-              <a:t/>
-            </a:r>
             <a:endParaRPr lang="en-US" dirty="0"/>
           </a:p>
         </p:txBody>
@@ -598,10 +375,6 @@
           <a:bodyPr/>
           <a:lstStyle/>
           <a:p>
-            <a:r>
-              <a:rPr lang="en-US" dirty="0"/>
-              <a:t/>
-            </a:r>
             <a:endParaRPr lang="en-US" dirty="0"/>
           </a:p>
         </p:txBody>
@@ -686,10 +459,6 @@
           <a:bodyPr/>
           <a:lstStyle/>
           <a:p>
-            <a:r>
-              <a:rPr lang="en-US" dirty="0"/>
-              <a:t/>
-            </a:r>
             <a:endParaRPr lang="en-US" dirty="0"/>
           </a:p>
         </p:txBody>
@@ -774,10 +543,6 @@
           <a:bodyPr/>
           <a:lstStyle/>
           <a:p>
-            <a:r>
-              <a:rPr lang="en-US" dirty="0"/>
-              <a:t/>
-            </a:r>
             <a:endParaRPr lang="en-US" dirty="0"/>
           </a:p>
         </p:txBody>
@@ -862,10 +627,6 @@
           <a:bodyPr/>
           <a:lstStyle/>
           <a:p>
-            <a:r>
-              <a:rPr lang="en-US" dirty="0"/>
-              <a:t/>
-            </a:r>
             <a:endParaRPr lang="en-US" dirty="0"/>
           </a:p>
         </p:txBody>
@@ -950,10 +711,6 @@
           <a:bodyPr/>
           <a:lstStyle/>
           <a:p>
-            <a:r>
-              <a:rPr lang="en-US" dirty="0"/>
-              <a:t/>
-            </a:r>
             <a:endParaRPr lang="en-US" dirty="0"/>
           </a:p>
         </p:txBody>
@@ -1038,10 +795,6 @@
           <a:bodyPr/>
           <a:lstStyle/>
           <a:p>
-            <a:r>
-              <a:rPr lang="en-US" dirty="0"/>
-              <a:t/>
-            </a:r>
             <a:endParaRPr lang="en-US" dirty="0"/>
           </a:p>
         </p:txBody>
@@ -1126,10 +879,6 @@
           <a:bodyPr/>
           <a:lstStyle/>
           <a:p>
-            <a:r>
-              <a:rPr lang="en-US" dirty="0"/>
-              <a:t/>
-            </a:r>
             <a:endParaRPr lang="en-US" dirty="0"/>
           </a:p>
         </p:txBody>
@@ -1214,10 +963,6 @@
           <a:bodyPr/>
           <a:lstStyle/>
           <a:p>
-            <a:r>
-              <a:rPr lang="en-US" dirty="0"/>
-              <a:t/>
-            </a:r>
             <a:endParaRPr lang="en-US" dirty="0"/>
           </a:p>
         </p:txBody>
@@ -1302,10 +1047,6 @@
           <a:bodyPr/>
           <a:lstStyle/>
           <a:p>
-            <a:r>
-              <a:rPr lang="en-US" dirty="0"/>
-              <a:t/>
-            </a:r>
             <a:endParaRPr lang="en-US" dirty="0"/>
           </a:p>
         </p:txBody>
@@ -1390,10 +1131,6 @@
           <a:bodyPr/>
           <a:lstStyle/>
           <a:p>
-            <a:r>
-              <a:rPr lang="en-US" dirty="0"/>
-              <a:t/>
-            </a:r>
             <a:endParaRPr lang="en-US" dirty="0"/>
           </a:p>
         </p:txBody>
@@ -1467,6 +1204,11 @@
 <file path=ppt/slideMasters/slideMaster1.xml><?xml version="1.0" encoding="utf-8"?>
 <p:sldMaster xmlns:a="http://schemas.openxmlformats.org/drawingml/2006/main" xmlns:r="http://schemas.openxmlformats.org/officeDocument/2006/relationships" xmlns:p="http://schemas.openxmlformats.org/presentationml/2006/main">
   <p:cSld>
+    <p:bg>
+      <p:bgRef idx="1001">
+        <a:schemeClr val="bg1"/>
+      </p:bgRef>
+    </p:bg>
     <p:spTree>
       <p:nvGrpSpPr>
         <p:cNvPr id="1" name=""/>
@@ -1749,6 +1491,7 @@
         <a:solidFill>
           <a:srgbClr val="0A0E1A"/>
         </a:solidFill>
+        <a:effectLst/>
       </p:bgPr>
     </p:bg>
     <p:spTree>
@@ -1836,7 +1579,7 @@
           <a:bodyPr wrap="square" lIns="0" tIns="0" rIns="0" bIns="0" rtlCol="0" anchor="ctr"/>
           <a:lstStyle/>
           <a:p>
-            <a:pPr indent="0" marL="0">
+            <a:pPr marL="0" indent="0">
               <a:buNone/>
             </a:pPr>
             <a:r>
@@ -1875,7 +1618,7 @@
           <a:bodyPr wrap="square" lIns="0" tIns="0" rIns="0" bIns="0" rtlCol="0" anchor="ctr"/>
           <a:lstStyle/>
           <a:p>
-            <a:pPr indent="0" marL="0">
+            <a:pPr marL="0" indent="0">
               <a:buNone/>
             </a:pPr>
             <a:r>
@@ -1939,7 +1682,7 @@
           <a:bodyPr wrap="square" lIns="0" tIns="0" rIns="0" bIns="0" rtlCol="0" anchor="t"/>
           <a:lstStyle/>
           <a:p>
-            <a:pPr algn="l" indent="0" marL="0">
+            <a:pPr marL="0" indent="0" algn="l">
               <a:buNone/>
             </a:pPr>
             <a:r>
@@ -1978,7 +1721,7 @@
           <a:bodyPr wrap="square" lIns="0" tIns="0" rIns="0" bIns="0" rtlCol="0" anchor="t"/>
           <a:lstStyle/>
           <a:p>
-            <a:pPr algn="l" indent="0" marL="0">
+            <a:pPr marL="0" indent="0" algn="l">
               <a:buNone/>
             </a:pPr>
             <a:r>
@@ -2020,7 +1763,7 @@
             <a:prstDash val="solid"/>
           </a:ln>
           <a:effectLst>
-            <a:outerShdw sx="100000" sy="100000" kx="0" ky="0" algn="bl" rotWithShape="0" blurRad="101600" dist="38100" dir="8100000">
+            <a:outerShdw blurRad="101600" dist="38100" dir="8100000" algn="bl" rotWithShape="0">
               <a:srgbClr val="000000">
                 <a:alpha val="25000"/>
               </a:srgbClr>
@@ -2049,7 +1792,7 @@
           <a:bodyPr wrap="square" lIns="0" tIns="0" rIns="0" bIns="0" rtlCol="0" anchor="ctr"/>
           <a:lstStyle/>
           <a:p>
-            <a:pPr algn="ctr" indent="0" marL="0">
+            <a:pPr marL="0" indent="0" algn="ctr">
               <a:buNone/>
             </a:pPr>
             <a:r>
@@ -2088,7 +1831,7 @@
           <a:bodyPr wrap="square" lIns="0" tIns="0" rIns="0" bIns="0" rtlCol="0" anchor="ctr"/>
           <a:lstStyle/>
           <a:p>
-            <a:pPr algn="ctr" indent="0" marL="0">
+            <a:pPr marL="0" indent="0" algn="ctr">
               <a:buNone/>
             </a:pPr>
             <a:r>
@@ -2130,7 +1873,7 @@
             <a:prstDash val="solid"/>
           </a:ln>
           <a:effectLst>
-            <a:outerShdw sx="100000" sy="100000" kx="0" ky="0" algn="bl" rotWithShape="0" blurRad="101600" dist="38100" dir="8100000">
+            <a:outerShdw blurRad="101600" dist="38100" dir="8100000" algn="bl" rotWithShape="0">
               <a:srgbClr val="000000">
                 <a:alpha val="25000"/>
               </a:srgbClr>
@@ -2159,7 +1902,7 @@
           <a:bodyPr wrap="square" lIns="0" tIns="0" rIns="0" bIns="0" rtlCol="0" anchor="ctr"/>
           <a:lstStyle/>
           <a:p>
-            <a:pPr algn="ctr" indent="0" marL="0">
+            <a:pPr marL="0" indent="0" algn="ctr">
               <a:buNone/>
             </a:pPr>
             <a:r>
@@ -2198,7 +1941,7 @@
           <a:bodyPr wrap="square" lIns="0" tIns="0" rIns="0" bIns="0" rtlCol="0" anchor="ctr"/>
           <a:lstStyle/>
           <a:p>
-            <a:pPr algn="ctr" indent="0" marL="0">
+            <a:pPr marL="0" indent="0" algn="ctr">
               <a:buNone/>
             </a:pPr>
             <a:r>
@@ -2240,7 +1983,7 @@
             <a:prstDash val="solid"/>
           </a:ln>
           <a:effectLst>
-            <a:outerShdw sx="100000" sy="100000" kx="0" ky="0" algn="bl" rotWithShape="0" blurRad="101600" dist="38100" dir="8100000">
+            <a:outerShdw blurRad="101600" dist="38100" dir="8100000" algn="bl" rotWithShape="0">
               <a:srgbClr val="000000">
                 <a:alpha val="25000"/>
               </a:srgbClr>
@@ -2269,7 +2012,7 @@
           <a:bodyPr wrap="square" lIns="0" tIns="0" rIns="0" bIns="0" rtlCol="0" anchor="ctr"/>
           <a:lstStyle/>
           <a:p>
-            <a:pPr algn="ctr" indent="0" marL="0">
+            <a:pPr marL="0" indent="0" algn="ctr">
               <a:buNone/>
             </a:pPr>
             <a:r>
@@ -2308,7 +2051,7 @@
           <a:bodyPr wrap="square" lIns="0" tIns="0" rIns="0" bIns="0" rtlCol="0" anchor="ctr"/>
           <a:lstStyle/>
           <a:p>
-            <a:pPr algn="ctr" indent="0" marL="0">
+            <a:pPr marL="0" indent="0" algn="ctr">
               <a:buNone/>
             </a:pPr>
             <a:r>
@@ -2328,14 +2071,14 @@
       </p:sp>
       <p:pic>
         <p:nvPicPr>
-          <p:cNvPr id="18" name="Image 0" descr="preencoded.png">    </p:cNvPr>
+          <p:cNvPr id="18" name="Image 0" descr="preencoded.png"/>
           <p:cNvPicPr>
             <a:picLocks noChangeAspect="1"/>
           </p:cNvPicPr>
           <p:nvPr/>
         </p:nvPicPr>
         <p:blipFill>
-          <a:blip r:embed="rId1">
+          <a:blip r:embed="rId3">
             <a:alphaModFix amt="85000"/>
           </a:blip>
           <a:stretch>
@@ -2373,7 +2116,7 @@
           <a:bodyPr wrap="square" lIns="0" tIns="0" rIns="0" bIns="0" rtlCol="0" anchor="t"/>
           <a:lstStyle/>
           <a:p>
-            <a:pPr algn="ctr" indent="0" marL="0">
+            <a:pPr marL="0" indent="0" algn="ctr">
               <a:buNone/>
             </a:pPr>
             <a:r>
@@ -2412,7 +2155,7 @@
           <a:bodyPr wrap="square" lIns="0" tIns="0" rIns="0" bIns="0" rtlCol="0" anchor="t"/>
           <a:lstStyle/>
           <a:p>
-            <a:pPr algn="ctr" indent="0" marL="0">
+            <a:pPr marL="0" indent="0" algn="ctr">
               <a:buNone/>
             </a:pPr>
             <a:r>
@@ -2451,7 +2194,7 @@
           <a:bodyPr wrap="square" lIns="0" tIns="0" rIns="0" bIns="0" rtlCol="0" anchor="t"/>
           <a:lstStyle/>
           <a:p>
-            <a:pPr algn="r" indent="0" marL="0">
+            <a:pPr marL="0" indent="0" algn="r">
               <a:buNone/>
             </a:pPr>
             <a:r>
@@ -2485,6 +2228,7 @@
         <a:solidFill>
           <a:srgbClr val="0A0E1A"/>
         </a:solidFill>
+        <a:effectLst/>
       </p:bgPr>
     </p:bg>
     <p:spTree>
@@ -2574,7 +2318,7 @@
           <a:bodyPr wrap="square" lIns="0" tIns="0" rIns="0" bIns="0" rtlCol="0" anchor="ctr"/>
           <a:lstStyle/>
           <a:p>
-            <a:pPr algn="ctr" indent="0" marL="0">
+            <a:pPr marL="0" indent="0" algn="ctr">
               <a:buNone/>
             </a:pPr>
             <a:r>
@@ -2613,7 +2357,7 @@
           <a:bodyPr wrap="square" lIns="0" tIns="0" rIns="0" bIns="0" rtlCol="0" anchor="ctr"/>
           <a:lstStyle/>
           <a:p>
-            <a:pPr algn="l" indent="0" marL="0">
+            <a:pPr marL="0" indent="0" algn="l">
               <a:buNone/>
             </a:pPr>
             <a:r>
@@ -2655,7 +2399,7 @@
             <a:prstDash val="solid"/>
           </a:ln>
           <a:effectLst>
-            <a:outerShdw sx="100000" sy="100000" kx="0" ky="0" algn="bl" rotWithShape="0" blurRad="101600" dist="38100" dir="8100000">
+            <a:outerShdw blurRad="101600" dist="38100" dir="8100000" algn="bl" rotWithShape="0">
               <a:srgbClr val="000000">
                 <a:alpha val="25000"/>
               </a:srgbClr>
@@ -2690,325 +2434,7 @@
       </p:sp>
       <p:pic>
         <p:nvPicPr>
-          <p:cNvPr id="8" name="Image 0" descr="preencoded.png">    </p:cNvPr>
-          <p:cNvPicPr>
-            <a:picLocks noChangeAspect="1"/>
-          </p:cNvPicPr>
-          <p:nvPr/>
-        </p:nvPicPr>
-        <p:blipFill>
-          <a:blip r:embed="rId1"/>
-          <a:stretch>
-            <a:fillRect/>
-          </a:stretch>
-        </p:blipFill>
-        <p:spPr>
-          <a:xfrm>
-            <a:off x="457200" y="1444752"/>
-            <a:ext cx="347472" cy="347472"/>
-          </a:xfrm>
-          <a:prstGeom prst="rect">
-            <a:avLst/>
-          </a:prstGeom>
-        </p:spPr>
-      </p:pic>
-      <p:sp>
-        <p:nvSpPr>
-          <p:cNvPr id="9" name="Text 6"/>
-          <p:cNvSpPr/>
-          <p:nvPr/>
-        </p:nvSpPr>
-        <p:spPr>
-          <a:xfrm>
-            <a:off x="868680" y="1417320"/>
-            <a:ext cx="2011680" cy="384048"/>
-          </a:xfrm>
-          <a:prstGeom prst="rect">
-            <a:avLst/>
-          </a:prstGeom>
-          <a:noFill/>
-          <a:ln/>
-        </p:spPr>
-        <p:txBody>
-          <a:bodyPr wrap="square" lIns="0" tIns="0" rIns="0" bIns="0" rtlCol="0" anchor="ctr"/>
-          <a:lstStyle/>
-          <a:p>
-            <a:pPr algn="l" indent="0" marL="0">
-              <a:buNone/>
-            </a:pPr>
-            <a:r>
-              <a:rPr lang="en-US" sz="1300" b="1" dirty="0">
-                <a:solidFill>
-                  <a:srgbClr val="FFFFFF"/>
-                </a:solidFill>
-                <a:latin typeface="Trebuchet MS" pitchFamily="34" charset="0"/>
-                <a:ea typeface="Trebuchet MS" pitchFamily="34" charset="-122"/>
-                <a:cs typeface="Trebuchet MS" pitchFamily="34" charset="-120"/>
-              </a:rPr>
-              <a:t>WebSocket Protocol</a:t>
-            </a:r>
-            <a:endParaRPr lang="en-US" sz="1300" dirty="0"/>
-          </a:p>
-        </p:txBody>
-      </p:sp>
-      <p:sp>
-        <p:nvSpPr>
-          <p:cNvPr id="10" name="Text 7"/>
-          <p:cNvSpPr/>
-          <p:nvPr/>
-        </p:nvSpPr>
-        <p:spPr>
-          <a:xfrm>
-            <a:off x="457200" y="1920240"/>
-            <a:ext cx="2377440" cy="822960"/>
-          </a:xfrm>
-          <a:prstGeom prst="rect">
-            <a:avLst/>
-          </a:prstGeom>
-          <a:noFill/>
-          <a:ln/>
-        </p:spPr>
-        <p:txBody>
-          <a:bodyPr wrap="square" lIns="0" tIns="0" rIns="0" bIns="0" rtlCol="0" anchor="t"/>
-          <a:lstStyle/>
-          <a:p>
-            <a:pPr algn="l" indent="0" marL="0">
-              <a:buNone/>
-            </a:pPr>
-            <a:r>
-              <a:rPr lang="en-US" sz="1000" dirty="0">
-                <a:solidFill>
-                  <a:srgbClr val="9CA3AF"/>
-                </a:solidFill>
-                <a:latin typeface="Calibri" pitchFamily="34" charset="0"/>
-                <a:ea typeface="Calibri" pitchFamily="34" charset="-122"/>
-                <a:cs typeface="Calibri" pitchFamily="34" charset="-120"/>
-              </a:rPr>
-              <a:t>How real-time two-way communication works between browser and server — the backbone of every trading platform.</a:t>
-            </a:r>
-            <a:endParaRPr lang="en-US" sz="1000" dirty="0"/>
-          </a:p>
-        </p:txBody>
-      </p:sp>
-      <p:sp>
-        <p:nvSpPr>
-          <p:cNvPr id="11" name="Shape 8"/>
-          <p:cNvSpPr/>
-          <p:nvPr/>
-        </p:nvSpPr>
-        <p:spPr>
-          <a:xfrm>
-            <a:off x="3200400" y="1280160"/>
-            <a:ext cx="2651760" cy="1554480"/>
-          </a:xfrm>
-          <a:prstGeom prst="rect">
-            <a:avLst/>
-          </a:prstGeom>
-          <a:solidFill>
-            <a:srgbClr val="0D1626"/>
-          </a:solidFill>
-          <a:ln w="12700">
-            <a:solidFill>
-              <a:srgbClr val="1F2937"/>
-            </a:solidFill>
-            <a:prstDash val="solid"/>
-          </a:ln>
-          <a:effectLst>
-            <a:outerShdw sx="100000" sy="100000" kx="0" ky="0" algn="bl" rotWithShape="0" blurRad="101600" dist="38100" dir="8100000">
-              <a:srgbClr val="000000">
-                <a:alpha val="25000"/>
-              </a:srgbClr>
-            </a:outerShdw>
-          </a:effectLst>
-        </p:spPr>
-      </p:sp>
-      <p:sp>
-        <p:nvSpPr>
-          <p:cNvPr id="12" name="Shape 9"/>
-          <p:cNvSpPr/>
-          <p:nvPr/>
-        </p:nvSpPr>
-        <p:spPr>
-          <a:xfrm>
-            <a:off x="3200400" y="1280160"/>
-            <a:ext cx="2651760" cy="54864"/>
-          </a:xfrm>
-          <a:prstGeom prst="rect">
-            <a:avLst/>
-          </a:prstGeom>
-          <a:solidFill>
-            <a:srgbClr val="00BCD4"/>
-          </a:solidFill>
-          <a:ln w="12700">
-            <a:solidFill>
-              <a:srgbClr val="333333"/>
-            </a:solidFill>
-            <a:prstDash val="solid"/>
-          </a:ln>
-        </p:spPr>
-      </p:sp>
-      <p:pic>
-        <p:nvPicPr>
-          <p:cNvPr id="13" name="Image 1" descr="preencoded.png">    </p:cNvPr>
-          <p:cNvPicPr>
-            <a:picLocks noChangeAspect="1"/>
-          </p:cNvPicPr>
-          <p:nvPr/>
-        </p:nvPicPr>
-        <p:blipFill>
-          <a:blip r:embed="rId2"/>
-          <a:stretch>
-            <a:fillRect/>
-          </a:stretch>
-        </p:blipFill>
-        <p:spPr>
-          <a:xfrm>
-            <a:off x="3337560" y="1444752"/>
-            <a:ext cx="347472" cy="347472"/>
-          </a:xfrm>
-          <a:prstGeom prst="rect">
-            <a:avLst/>
-          </a:prstGeom>
-        </p:spPr>
-      </p:pic>
-      <p:sp>
-        <p:nvSpPr>
-          <p:cNvPr id="14" name="Text 10"/>
-          <p:cNvSpPr/>
-          <p:nvPr/>
-        </p:nvSpPr>
-        <p:spPr>
-          <a:xfrm>
-            <a:off x="3749040" y="1417320"/>
-            <a:ext cx="2011680" cy="384048"/>
-          </a:xfrm>
-          <a:prstGeom prst="rect">
-            <a:avLst/>
-          </a:prstGeom>
-          <a:noFill/>
-          <a:ln/>
-        </p:spPr>
-        <p:txBody>
-          <a:bodyPr wrap="square" lIns="0" tIns="0" rIns="0" bIns="0" rtlCol="0" anchor="ctr"/>
-          <a:lstStyle/>
-          <a:p>
-            <a:pPr algn="l" indent="0" marL="0">
-              <a:buNone/>
-            </a:pPr>
-            <a:r>
-              <a:rPr lang="en-US" sz="1300" b="1" dirty="0">
-                <a:solidFill>
-                  <a:srgbClr val="FFFFFF"/>
-                </a:solidFill>
-                <a:latin typeface="Trebuchet MS" pitchFamily="34" charset="0"/>
-                <a:ea typeface="Trebuchet MS" pitchFamily="34" charset="-122"/>
-                <a:cs typeface="Trebuchet MS" pitchFamily="34" charset="-120"/>
-              </a:rPr>
-              <a:t>Authentication Flow</a:t>
-            </a:r>
-            <a:endParaRPr lang="en-US" sz="1300" dirty="0"/>
-          </a:p>
-        </p:txBody>
-      </p:sp>
-      <p:sp>
-        <p:nvSpPr>
-          <p:cNvPr id="15" name="Text 11"/>
-          <p:cNvSpPr/>
-          <p:nvPr/>
-        </p:nvSpPr>
-        <p:spPr>
-          <a:xfrm>
-            <a:off x="3337560" y="1920240"/>
-            <a:ext cx="2377440" cy="822960"/>
-          </a:xfrm>
-          <a:prstGeom prst="rect">
-            <a:avLst/>
-          </a:prstGeom>
-          <a:noFill/>
-          <a:ln/>
-        </p:spPr>
-        <p:txBody>
-          <a:bodyPr wrap="square" lIns="0" tIns="0" rIns="0" bIns="0" rtlCol="0" anchor="t"/>
-          <a:lstStyle/>
-          <a:p>
-            <a:pPr algn="l" indent="0" marL="0">
-              <a:buNone/>
-            </a:pPr>
-            <a:r>
-              <a:rPr lang="en-US" sz="1000" dirty="0">
-                <a:solidFill>
-                  <a:srgbClr val="9CA3AF"/>
-                </a:solidFill>
-                <a:latin typeface="Calibri" pitchFamily="34" charset="0"/>
-                <a:ea typeface="Calibri" pitchFamily="34" charset="-122"/>
-                <a:cs typeface="Calibri" pitchFamily="34" charset="-120"/>
-              </a:rPr>
-              <a:t>Why bcrypt matters. How JWT tokens work. Why passwords should never be stored as plain text — ever.</a:t>
-            </a:r>
-            <a:endParaRPr lang="en-US" sz="1000" dirty="0"/>
-          </a:p>
-        </p:txBody>
-      </p:sp>
-      <p:sp>
-        <p:nvSpPr>
-          <p:cNvPr id="16" name="Shape 12"/>
-          <p:cNvSpPr/>
-          <p:nvPr/>
-        </p:nvSpPr>
-        <p:spPr>
-          <a:xfrm>
-            <a:off x="6080760" y="1280160"/>
-            <a:ext cx="2651760" cy="1554480"/>
-          </a:xfrm>
-          <a:prstGeom prst="rect">
-            <a:avLst/>
-          </a:prstGeom>
-          <a:solidFill>
-            <a:srgbClr val="0D1626"/>
-          </a:solidFill>
-          <a:ln w="12700">
-            <a:solidFill>
-              <a:srgbClr val="1F2937"/>
-            </a:solidFill>
-            <a:prstDash val="solid"/>
-          </a:ln>
-          <a:effectLst>
-            <a:outerShdw sx="100000" sy="100000" kx="0" ky="0" algn="bl" rotWithShape="0" blurRad="101600" dist="38100" dir="8100000">
-              <a:srgbClr val="000000">
-                <a:alpha val="25000"/>
-              </a:srgbClr>
-            </a:outerShdw>
-          </a:effectLst>
-        </p:spPr>
-      </p:sp>
-      <p:sp>
-        <p:nvSpPr>
-          <p:cNvPr id="17" name="Shape 13"/>
-          <p:cNvSpPr/>
-          <p:nvPr/>
-        </p:nvSpPr>
-        <p:spPr>
-          <a:xfrm>
-            <a:off x="6080760" y="1280160"/>
-            <a:ext cx="2651760" cy="54864"/>
-          </a:xfrm>
-          <a:prstGeom prst="rect">
-            <a:avLst/>
-          </a:prstGeom>
-          <a:solidFill>
-            <a:srgbClr val="00E676"/>
-          </a:solidFill>
-          <a:ln w="12700">
-            <a:solidFill>
-              <a:srgbClr val="333333"/>
-            </a:solidFill>
-            <a:prstDash val="solid"/>
-          </a:ln>
-        </p:spPr>
-      </p:sp>
-      <p:pic>
-        <p:nvPicPr>
-          <p:cNvPr id="18" name="Image 2" descr="preencoded.png">    </p:cNvPr>
+          <p:cNvPr id="8" name="Image 0" descr="preencoded.png"/>
           <p:cNvPicPr>
             <a:picLocks noChangeAspect="1"/>
           </p:cNvPicPr>
@@ -3022,7 +2448,7 @@
         </p:blipFill>
         <p:spPr>
           <a:xfrm>
-            <a:off x="6217920" y="1444752"/>
+            <a:off x="457200" y="1444752"/>
             <a:ext cx="347472" cy="347472"/>
           </a:xfrm>
           <a:prstGeom prst="rect">
@@ -3032,13 +2458,13 @@
       </p:pic>
       <p:sp>
         <p:nvSpPr>
-          <p:cNvPr id="19" name="Text 14"/>
-          <p:cNvSpPr/>
-          <p:nvPr/>
-        </p:nvSpPr>
-        <p:spPr>
-          <a:xfrm>
-            <a:off x="6629400" y="1417320"/>
+          <p:cNvPr id="9" name="Text 6"/>
+          <p:cNvSpPr/>
+          <p:nvPr/>
+        </p:nvSpPr>
+        <p:spPr>
+          <a:xfrm>
+            <a:off x="868680" y="1417320"/>
             <a:ext cx="2011680" cy="384048"/>
           </a:xfrm>
           <a:prstGeom prst="rect">
@@ -3051,7 +2477,7 @@
           <a:bodyPr wrap="square" lIns="0" tIns="0" rIns="0" bIns="0" rtlCol="0" anchor="ctr"/>
           <a:lstStyle/>
           <a:p>
-            <a:pPr algn="l" indent="0" marL="0">
+            <a:pPr marL="0" indent="0" algn="l">
               <a:buNone/>
             </a:pPr>
             <a:r>
@@ -3063,7 +2489,7 @@
                 <a:ea typeface="Trebuchet MS" pitchFamily="34" charset="-122"/>
                 <a:cs typeface="Trebuchet MS" pitchFamily="34" charset="-120"/>
               </a:rPr>
-              <a:t>Database Design</a:t>
+              <a:t>WebSocket Protocol</a:t>
             </a:r>
             <a:endParaRPr lang="en-US" sz="1300" dirty="0"/>
           </a:p>
@@ -3071,13 +2497,13 @@
       </p:sp>
       <p:sp>
         <p:nvSpPr>
-          <p:cNvPr id="20" name="Text 15"/>
-          <p:cNvSpPr/>
-          <p:nvPr/>
-        </p:nvSpPr>
-        <p:spPr>
-          <a:xfrm>
-            <a:off x="6217920" y="1920240"/>
+          <p:cNvPr id="10" name="Text 7"/>
+          <p:cNvSpPr/>
+          <p:nvPr/>
+        </p:nvSpPr>
+        <p:spPr>
+          <a:xfrm>
+            <a:off x="457200" y="1920240"/>
             <a:ext cx="2377440" cy="822960"/>
           </a:xfrm>
           <a:prstGeom prst="rect">
@@ -3090,7 +2516,7 @@
           <a:bodyPr wrap="square" lIns="0" tIns="0" rIns="0" bIns="0" rtlCol="0" anchor="t"/>
           <a:lstStyle/>
           <a:p>
-            <a:pPr algn="l" indent="0" marL="0">
+            <a:pPr marL="0" indent="0" algn="l">
               <a:buNone/>
             </a:pPr>
             <a:r>
@@ -3102,7 +2528,7 @@
                 <a:ea typeface="Calibri" pitchFamily="34" charset="-122"/>
                 <a:cs typeface="Calibri" pitchFamily="34" charset="-120"/>
               </a:rPr>
-              <a:t>Designing MongoDB schemas, understanding document relationships, and why indexing matters at scale.</a:t>
+              <a:t>How real-time two-way communication works between browser and server — the backbone of every trading platform.</a:t>
             </a:r>
             <a:endParaRPr lang="en-US" sz="1000" dirty="0"/>
           </a:p>
@@ -3110,13 +2536,13 @@
       </p:sp>
       <p:sp>
         <p:nvSpPr>
-          <p:cNvPr id="21" name="Shape 16"/>
-          <p:cNvSpPr/>
-          <p:nvPr/>
-        </p:nvSpPr>
-        <p:spPr>
-          <a:xfrm>
-            <a:off x="320040" y="3017520"/>
+          <p:cNvPr id="11" name="Shape 8"/>
+          <p:cNvSpPr/>
+          <p:nvPr/>
+        </p:nvSpPr>
+        <p:spPr>
+          <a:xfrm>
+            <a:off x="3200400" y="1280160"/>
             <a:ext cx="2651760" cy="1554480"/>
           </a:xfrm>
           <a:prstGeom prst="rect">
@@ -3132,7 +2558,7 @@
             <a:prstDash val="solid"/>
           </a:ln>
           <a:effectLst>
-            <a:outerShdw sx="100000" sy="100000" kx="0" ky="0" algn="bl" rotWithShape="0" blurRad="101600" dist="38100" dir="8100000">
+            <a:outerShdw blurRad="101600" dist="38100" dir="8100000" algn="bl" rotWithShape="0">
               <a:srgbClr val="000000">
                 <a:alpha val="25000"/>
               </a:srgbClr>
@@ -3142,20 +2568,20 @@
       </p:sp>
       <p:sp>
         <p:nvSpPr>
-          <p:cNvPr id="22" name="Shape 17"/>
-          <p:cNvSpPr/>
-          <p:nvPr/>
-        </p:nvSpPr>
-        <p:spPr>
-          <a:xfrm>
-            <a:off x="320040" y="3017520"/>
+          <p:cNvPr id="12" name="Shape 9"/>
+          <p:cNvSpPr/>
+          <p:nvPr/>
+        </p:nvSpPr>
+        <p:spPr>
+          <a:xfrm>
+            <a:off x="3200400" y="1280160"/>
             <a:ext cx="2651760" cy="54864"/>
           </a:xfrm>
           <a:prstGeom prst="rect">
             <a:avLst/>
           </a:prstGeom>
           <a:solidFill>
-            <a:srgbClr val="00C853"/>
+            <a:srgbClr val="00BCD4"/>
           </a:solidFill>
           <a:ln w="12700">
             <a:solidFill>
@@ -3167,7 +2593,7 @@
       </p:sp>
       <p:pic>
         <p:nvPicPr>
-          <p:cNvPr id="23" name="Image 3" descr="preencoded.png">    </p:cNvPr>
+          <p:cNvPr id="13" name="Image 1" descr="preencoded.png"/>
           <p:cNvPicPr>
             <a:picLocks noChangeAspect="1"/>
           </p:cNvPicPr>
@@ -3181,7 +2607,7 @@
         </p:blipFill>
         <p:spPr>
           <a:xfrm>
-            <a:off x="457200" y="3182112"/>
+            <a:off x="3337560" y="1444752"/>
             <a:ext cx="347472" cy="347472"/>
           </a:xfrm>
           <a:prstGeom prst="rect">
@@ -3191,13 +2617,13 @@
       </p:pic>
       <p:sp>
         <p:nvSpPr>
-          <p:cNvPr id="24" name="Text 18"/>
-          <p:cNvSpPr/>
-          <p:nvPr/>
-        </p:nvSpPr>
-        <p:spPr>
-          <a:xfrm>
-            <a:off x="868680" y="3154680"/>
+          <p:cNvPr id="14" name="Text 10"/>
+          <p:cNvSpPr/>
+          <p:nvPr/>
+        </p:nvSpPr>
+        <p:spPr>
+          <a:xfrm>
+            <a:off x="3749040" y="1417320"/>
             <a:ext cx="2011680" cy="384048"/>
           </a:xfrm>
           <a:prstGeom prst="rect">
@@ -3210,7 +2636,7 @@
           <a:bodyPr wrap="square" lIns="0" tIns="0" rIns="0" bIns="0" rtlCol="0" anchor="ctr"/>
           <a:lstStyle/>
           <a:p>
-            <a:pPr algn="l" indent="0" marL="0">
+            <a:pPr marL="0" indent="0" algn="l">
               <a:buNone/>
             </a:pPr>
             <a:r>
@@ -3222,7 +2648,7 @@
                 <a:ea typeface="Trebuchet MS" pitchFamily="34" charset="-122"/>
                 <a:cs typeface="Trebuchet MS" pitchFamily="34" charset="-120"/>
               </a:rPr>
-              <a:t>API Integration</a:t>
+              <a:t>Authentication Flow</a:t>
             </a:r>
             <a:endParaRPr lang="en-US" sz="1300" dirty="0"/>
           </a:p>
@@ -3230,13 +2656,13 @@
       </p:sp>
       <p:sp>
         <p:nvSpPr>
-          <p:cNvPr id="25" name="Text 19"/>
-          <p:cNvSpPr/>
-          <p:nvPr/>
-        </p:nvSpPr>
-        <p:spPr>
-          <a:xfrm>
-            <a:off x="457200" y="3657600"/>
+          <p:cNvPr id="15" name="Text 11"/>
+          <p:cNvSpPr/>
+          <p:nvPr/>
+        </p:nvSpPr>
+        <p:spPr>
+          <a:xfrm>
+            <a:off x="3337560" y="1920240"/>
             <a:ext cx="2377440" cy="822960"/>
           </a:xfrm>
           <a:prstGeom prst="rect">
@@ -3249,7 +2675,7 @@
           <a:bodyPr wrap="square" lIns="0" tIns="0" rIns="0" bIns="0" rtlCol="0" anchor="t"/>
           <a:lstStyle/>
           <a:p>
-            <a:pPr algn="l" indent="0" marL="0">
+            <a:pPr marL="0" indent="0" algn="l">
               <a:buNone/>
             </a:pPr>
             <a:r>
@@ -3261,7 +2687,7 @@
                 <a:ea typeface="Calibri" pitchFamily="34" charset="-122"/>
                 <a:cs typeface="Calibri" pitchFamily="34" charset="-120"/>
               </a:rPr>
-              <a:t>Working with unofficial APIs, managing rate limits with caching, and building robust fallback systems.</a:t>
+              <a:t>Why bcrypt matters. How JWT tokens work. Why passwords should never be stored as plain text — ever.</a:t>
             </a:r>
             <a:endParaRPr lang="en-US" sz="1000" dirty="0"/>
           </a:p>
@@ -3269,13 +2695,13 @@
       </p:sp>
       <p:sp>
         <p:nvSpPr>
-          <p:cNvPr id="26" name="Shape 20"/>
-          <p:cNvSpPr/>
-          <p:nvPr/>
-        </p:nvSpPr>
-        <p:spPr>
-          <a:xfrm>
-            <a:off x="3200400" y="3017520"/>
+          <p:cNvPr id="16" name="Shape 12"/>
+          <p:cNvSpPr/>
+          <p:nvPr/>
+        </p:nvSpPr>
+        <p:spPr>
+          <a:xfrm>
+            <a:off x="6080760" y="1280160"/>
             <a:ext cx="2651760" cy="1554480"/>
           </a:xfrm>
           <a:prstGeom prst="rect">
@@ -3291,7 +2717,7 @@
             <a:prstDash val="solid"/>
           </a:ln>
           <a:effectLst>
-            <a:outerShdw sx="100000" sy="100000" kx="0" ky="0" algn="bl" rotWithShape="0" blurRad="101600" dist="38100" dir="8100000">
+            <a:outerShdw blurRad="101600" dist="38100" dir="8100000" algn="bl" rotWithShape="0">
               <a:srgbClr val="000000">
                 <a:alpha val="25000"/>
               </a:srgbClr>
@@ -3301,20 +2727,20 @@
       </p:sp>
       <p:sp>
         <p:nvSpPr>
-          <p:cNvPr id="27" name="Shape 21"/>
-          <p:cNvSpPr/>
-          <p:nvPr/>
-        </p:nvSpPr>
-        <p:spPr>
-          <a:xfrm>
-            <a:off x="3200400" y="3017520"/>
+          <p:cNvPr id="17" name="Shape 13"/>
+          <p:cNvSpPr/>
+          <p:nvPr/>
+        </p:nvSpPr>
+        <p:spPr>
+          <a:xfrm>
+            <a:off x="6080760" y="1280160"/>
             <a:ext cx="2651760" cy="54864"/>
           </a:xfrm>
           <a:prstGeom prst="rect">
             <a:avLst/>
           </a:prstGeom>
           <a:solidFill>
-            <a:srgbClr val="00BCD4"/>
+            <a:srgbClr val="00E676"/>
           </a:solidFill>
           <a:ln w="12700">
             <a:solidFill>
@@ -3326,7 +2752,7 @@
       </p:sp>
       <p:pic>
         <p:nvPicPr>
-          <p:cNvPr id="28" name="Image 4" descr="preencoded.png">    </p:cNvPr>
+          <p:cNvPr id="18" name="Image 2" descr="preencoded.png"/>
           <p:cNvPicPr>
             <a:picLocks noChangeAspect="1"/>
           </p:cNvPicPr>
@@ -3340,7 +2766,7 @@
         </p:blipFill>
         <p:spPr>
           <a:xfrm>
-            <a:off x="3337560" y="3182112"/>
+            <a:off x="6217920" y="1444752"/>
             <a:ext cx="347472" cy="347472"/>
           </a:xfrm>
           <a:prstGeom prst="rect">
@@ -3350,13 +2776,13 @@
       </p:pic>
       <p:sp>
         <p:nvSpPr>
-          <p:cNvPr id="29" name="Text 22"/>
-          <p:cNvSpPr/>
-          <p:nvPr/>
-        </p:nvSpPr>
-        <p:spPr>
-          <a:xfrm>
-            <a:off x="3749040" y="3154680"/>
+          <p:cNvPr id="19" name="Text 14"/>
+          <p:cNvSpPr/>
+          <p:nvPr/>
+        </p:nvSpPr>
+        <p:spPr>
+          <a:xfrm>
+            <a:off x="6629400" y="1417320"/>
             <a:ext cx="2011680" cy="384048"/>
           </a:xfrm>
           <a:prstGeom prst="rect">
@@ -3369,7 +2795,7 @@
           <a:bodyPr wrap="square" lIns="0" tIns="0" rIns="0" bIns="0" rtlCol="0" anchor="ctr"/>
           <a:lstStyle/>
           <a:p>
-            <a:pPr algn="l" indent="0" marL="0">
+            <a:pPr marL="0" indent="0" algn="l">
               <a:buNone/>
             </a:pPr>
             <a:r>
@@ -3381,7 +2807,7 @@
                 <a:ea typeface="Trebuchet MS" pitchFamily="34" charset="-122"/>
                 <a:cs typeface="Trebuchet MS" pitchFamily="34" charset="-120"/>
               </a:rPr>
-              <a:t>Deployment Pipeline</a:t>
+              <a:t>Database Design</a:t>
             </a:r>
             <a:endParaRPr lang="en-US" sz="1300" dirty="0"/>
           </a:p>
@@ -3389,13 +2815,13 @@
       </p:sp>
       <p:sp>
         <p:nvSpPr>
-          <p:cNvPr id="30" name="Text 23"/>
-          <p:cNvSpPr/>
-          <p:nvPr/>
-        </p:nvSpPr>
-        <p:spPr>
-          <a:xfrm>
-            <a:off x="3337560" y="3657600"/>
+          <p:cNvPr id="20" name="Text 15"/>
+          <p:cNvSpPr/>
+          <p:nvPr/>
+        </p:nvSpPr>
+        <p:spPr>
+          <a:xfrm>
+            <a:off x="6217920" y="1920240"/>
             <a:ext cx="2377440" cy="822960"/>
           </a:xfrm>
           <a:prstGeom prst="rect">
@@ -3408,7 +2834,7 @@
           <a:bodyPr wrap="square" lIns="0" tIns="0" rIns="0" bIns="0" rtlCol="0" anchor="t"/>
           <a:lstStyle/>
           <a:p>
-            <a:pPr algn="l" indent="0" marL="0">
+            <a:pPr marL="0" indent="0" algn="l">
               <a:buNone/>
             </a:pPr>
             <a:r>
@@ -3420,7 +2846,7 @@
                 <a:ea typeface="Calibri" pitchFamily="34" charset="-122"/>
                 <a:cs typeface="Calibri" pitchFamily="34" charset="-120"/>
               </a:rPr>
-              <a:t>GitHub to Vercel to Render — how auto-deployment works and why environment variables keep secrets safe.</a:t>
+              <a:t>Designing MongoDB schemas, understanding document relationships, and why indexing matters at scale.</a:t>
             </a:r>
             <a:endParaRPr lang="en-US" sz="1000" dirty="0"/>
           </a:p>
@@ -3428,13 +2854,13 @@
       </p:sp>
       <p:sp>
         <p:nvSpPr>
-          <p:cNvPr id="31" name="Shape 24"/>
-          <p:cNvSpPr/>
-          <p:nvPr/>
-        </p:nvSpPr>
-        <p:spPr>
-          <a:xfrm>
-            <a:off x="6080760" y="3017520"/>
+          <p:cNvPr id="21" name="Shape 16"/>
+          <p:cNvSpPr/>
+          <p:nvPr/>
+        </p:nvSpPr>
+        <p:spPr>
+          <a:xfrm>
+            <a:off x="320040" y="3017520"/>
             <a:ext cx="2651760" cy="1554480"/>
           </a:xfrm>
           <a:prstGeom prst="rect">
@@ -3450,7 +2876,7 @@
             <a:prstDash val="solid"/>
           </a:ln>
           <a:effectLst>
-            <a:outerShdw sx="100000" sy="100000" kx="0" ky="0" algn="bl" rotWithShape="0" blurRad="101600" dist="38100" dir="8100000">
+            <a:outerShdw blurRad="101600" dist="38100" dir="8100000" algn="bl" rotWithShape="0">
               <a:srgbClr val="000000">
                 <a:alpha val="25000"/>
               </a:srgbClr>
@@ -3460,20 +2886,20 @@
       </p:sp>
       <p:sp>
         <p:nvSpPr>
-          <p:cNvPr id="32" name="Shape 25"/>
-          <p:cNvSpPr/>
-          <p:nvPr/>
-        </p:nvSpPr>
-        <p:spPr>
-          <a:xfrm>
-            <a:off x="6080760" y="3017520"/>
+          <p:cNvPr id="22" name="Shape 17"/>
+          <p:cNvSpPr/>
+          <p:nvPr/>
+        </p:nvSpPr>
+        <p:spPr>
+          <a:xfrm>
+            <a:off x="320040" y="3017520"/>
             <a:ext cx="2651760" cy="54864"/>
           </a:xfrm>
           <a:prstGeom prst="rect">
             <a:avLst/>
           </a:prstGeom>
           <a:solidFill>
-            <a:srgbClr val="00E676"/>
+            <a:srgbClr val="00C853"/>
           </a:solidFill>
           <a:ln w="12700">
             <a:solidFill>
@@ -3485,7 +2911,7 @@
       </p:sp>
       <p:pic>
         <p:nvPicPr>
-          <p:cNvPr id="33" name="Image 5" descr="preencoded.png">    </p:cNvPr>
+          <p:cNvPr id="23" name="Image 3" descr="preencoded.png"/>
           <p:cNvPicPr>
             <a:picLocks noChangeAspect="1"/>
           </p:cNvPicPr>
@@ -3499,7 +2925,7 @@
         </p:blipFill>
         <p:spPr>
           <a:xfrm>
-            <a:off x="6217920" y="3182112"/>
+            <a:off x="457200" y="3182112"/>
             <a:ext cx="347472" cy="347472"/>
           </a:xfrm>
           <a:prstGeom prst="rect">
@@ -3509,13 +2935,13 @@
       </p:pic>
       <p:sp>
         <p:nvSpPr>
-          <p:cNvPr id="34" name="Text 26"/>
-          <p:cNvSpPr/>
-          <p:nvPr/>
-        </p:nvSpPr>
-        <p:spPr>
-          <a:xfrm>
-            <a:off x="6629400" y="3154680"/>
+          <p:cNvPr id="24" name="Text 18"/>
+          <p:cNvSpPr/>
+          <p:nvPr/>
+        </p:nvSpPr>
+        <p:spPr>
+          <a:xfrm>
+            <a:off x="868680" y="3154680"/>
             <a:ext cx="2011680" cy="384048"/>
           </a:xfrm>
           <a:prstGeom prst="rect">
@@ -3528,7 +2954,7 @@
           <a:bodyPr wrap="square" lIns="0" tIns="0" rIns="0" bIns="0" rtlCol="0" anchor="ctr"/>
           <a:lstStyle/>
           <a:p>
-            <a:pPr algn="l" indent="0" marL="0">
+            <a:pPr marL="0" indent="0" algn="l">
               <a:buNone/>
             </a:pPr>
             <a:r>
@@ -3540,7 +2966,7 @@
                 <a:ea typeface="Trebuchet MS" pitchFamily="34" charset="-122"/>
                 <a:cs typeface="Trebuchet MS" pitchFamily="34" charset="-120"/>
               </a:rPr>
-              <a:t>Product Thinking</a:t>
+              <a:t>API Integration</a:t>
             </a:r>
             <a:endParaRPr lang="en-US" sz="1300" dirty="0"/>
           </a:p>
@@ -3548,13 +2974,13 @@
       </p:sp>
       <p:sp>
         <p:nvSpPr>
-          <p:cNvPr id="35" name="Text 27"/>
-          <p:cNvSpPr/>
-          <p:nvPr/>
-        </p:nvSpPr>
-        <p:spPr>
-          <a:xfrm>
-            <a:off x="6217920" y="3657600"/>
+          <p:cNvPr id="25" name="Text 19"/>
+          <p:cNvSpPr/>
+          <p:nvPr/>
+        </p:nvSpPr>
+        <p:spPr>
+          <a:xfrm>
+            <a:off x="457200" y="3657600"/>
             <a:ext cx="2377440" cy="822960"/>
           </a:xfrm>
           <a:prstGeom prst="rect">
@@ -3567,7 +2993,7 @@
           <a:bodyPr wrap="square" lIns="0" tIns="0" rIns="0" bIns="0" rtlCol="0" anchor="t"/>
           <a:lstStyle/>
           <a:p>
-            <a:pPr algn="l" indent="0" marL="0">
+            <a:pPr marL="0" indent="0" algn="l">
               <a:buNone/>
             </a:pPr>
             <a:r>
@@ -3579,6 +3005,324 @@
                 <a:ea typeface="Calibri" pitchFamily="34" charset="-122"/>
                 <a:cs typeface="Calibri" pitchFamily="34" charset="-120"/>
               </a:rPr>
+              <a:t>Working with unofficial APIs, managing rate limits with caching, and building robust fallback systems.</a:t>
+            </a:r>
+            <a:endParaRPr lang="en-US" sz="1000" dirty="0"/>
+          </a:p>
+        </p:txBody>
+      </p:sp>
+      <p:sp>
+        <p:nvSpPr>
+          <p:cNvPr id="26" name="Shape 20"/>
+          <p:cNvSpPr/>
+          <p:nvPr/>
+        </p:nvSpPr>
+        <p:spPr>
+          <a:xfrm>
+            <a:off x="3200400" y="3017520"/>
+            <a:ext cx="2651760" cy="1554480"/>
+          </a:xfrm>
+          <a:prstGeom prst="rect">
+            <a:avLst/>
+          </a:prstGeom>
+          <a:solidFill>
+            <a:srgbClr val="0D1626"/>
+          </a:solidFill>
+          <a:ln w="12700">
+            <a:solidFill>
+              <a:srgbClr val="1F2937"/>
+            </a:solidFill>
+            <a:prstDash val="solid"/>
+          </a:ln>
+          <a:effectLst>
+            <a:outerShdw blurRad="101600" dist="38100" dir="8100000" algn="bl" rotWithShape="0">
+              <a:srgbClr val="000000">
+                <a:alpha val="25000"/>
+              </a:srgbClr>
+            </a:outerShdw>
+          </a:effectLst>
+        </p:spPr>
+      </p:sp>
+      <p:sp>
+        <p:nvSpPr>
+          <p:cNvPr id="27" name="Shape 21"/>
+          <p:cNvSpPr/>
+          <p:nvPr/>
+        </p:nvSpPr>
+        <p:spPr>
+          <a:xfrm>
+            <a:off x="3200400" y="3017520"/>
+            <a:ext cx="2651760" cy="54864"/>
+          </a:xfrm>
+          <a:prstGeom prst="rect">
+            <a:avLst/>
+          </a:prstGeom>
+          <a:solidFill>
+            <a:srgbClr val="00BCD4"/>
+          </a:solidFill>
+          <a:ln w="12700">
+            <a:solidFill>
+              <a:srgbClr val="333333"/>
+            </a:solidFill>
+            <a:prstDash val="solid"/>
+          </a:ln>
+        </p:spPr>
+      </p:sp>
+      <p:pic>
+        <p:nvPicPr>
+          <p:cNvPr id="28" name="Image 4" descr="preencoded.png"/>
+          <p:cNvPicPr>
+            <a:picLocks noChangeAspect="1"/>
+          </p:cNvPicPr>
+          <p:nvPr/>
+        </p:nvPicPr>
+        <p:blipFill>
+          <a:blip r:embed="rId7"/>
+          <a:stretch>
+            <a:fillRect/>
+          </a:stretch>
+        </p:blipFill>
+        <p:spPr>
+          <a:xfrm>
+            <a:off x="3337560" y="3182112"/>
+            <a:ext cx="347472" cy="347472"/>
+          </a:xfrm>
+          <a:prstGeom prst="rect">
+            <a:avLst/>
+          </a:prstGeom>
+        </p:spPr>
+      </p:pic>
+      <p:sp>
+        <p:nvSpPr>
+          <p:cNvPr id="29" name="Text 22"/>
+          <p:cNvSpPr/>
+          <p:nvPr/>
+        </p:nvSpPr>
+        <p:spPr>
+          <a:xfrm>
+            <a:off x="3749040" y="3154680"/>
+            <a:ext cx="2011680" cy="384048"/>
+          </a:xfrm>
+          <a:prstGeom prst="rect">
+            <a:avLst/>
+          </a:prstGeom>
+          <a:noFill/>
+          <a:ln/>
+        </p:spPr>
+        <p:txBody>
+          <a:bodyPr wrap="square" lIns="0" tIns="0" rIns="0" bIns="0" rtlCol="0" anchor="ctr"/>
+          <a:lstStyle/>
+          <a:p>
+            <a:pPr marL="0" indent="0" algn="l">
+              <a:buNone/>
+            </a:pPr>
+            <a:r>
+              <a:rPr lang="en-US" sz="1300" b="1" dirty="0">
+                <a:solidFill>
+                  <a:srgbClr val="FFFFFF"/>
+                </a:solidFill>
+                <a:latin typeface="Trebuchet MS" pitchFamily="34" charset="0"/>
+                <a:ea typeface="Trebuchet MS" pitchFamily="34" charset="-122"/>
+                <a:cs typeface="Trebuchet MS" pitchFamily="34" charset="-120"/>
+              </a:rPr>
+              <a:t>Deployment Pipeline</a:t>
+            </a:r>
+            <a:endParaRPr lang="en-US" sz="1300" dirty="0"/>
+          </a:p>
+        </p:txBody>
+      </p:sp>
+      <p:sp>
+        <p:nvSpPr>
+          <p:cNvPr id="30" name="Text 23"/>
+          <p:cNvSpPr/>
+          <p:nvPr/>
+        </p:nvSpPr>
+        <p:spPr>
+          <a:xfrm>
+            <a:off x="3337560" y="3657600"/>
+            <a:ext cx="2377440" cy="822960"/>
+          </a:xfrm>
+          <a:prstGeom prst="rect">
+            <a:avLst/>
+          </a:prstGeom>
+          <a:noFill/>
+          <a:ln/>
+        </p:spPr>
+        <p:txBody>
+          <a:bodyPr wrap="square" lIns="0" tIns="0" rIns="0" bIns="0" rtlCol="0" anchor="t"/>
+          <a:lstStyle/>
+          <a:p>
+            <a:pPr marL="0" indent="0" algn="l">
+              <a:buNone/>
+            </a:pPr>
+            <a:r>
+              <a:rPr lang="en-US" sz="1000" dirty="0">
+                <a:solidFill>
+                  <a:srgbClr val="9CA3AF"/>
+                </a:solidFill>
+                <a:latin typeface="Calibri" pitchFamily="34" charset="0"/>
+                <a:ea typeface="Calibri" pitchFamily="34" charset="-122"/>
+                <a:cs typeface="Calibri" pitchFamily="34" charset="-120"/>
+              </a:rPr>
+              <a:t>GitHub to Vercel to Render — how auto-deployment works and why environment variables keep secrets safe.</a:t>
+            </a:r>
+            <a:endParaRPr lang="en-US" sz="1000" dirty="0"/>
+          </a:p>
+        </p:txBody>
+      </p:sp>
+      <p:sp>
+        <p:nvSpPr>
+          <p:cNvPr id="31" name="Shape 24"/>
+          <p:cNvSpPr/>
+          <p:nvPr/>
+        </p:nvSpPr>
+        <p:spPr>
+          <a:xfrm>
+            <a:off x="6080760" y="3017520"/>
+            <a:ext cx="2651760" cy="1554480"/>
+          </a:xfrm>
+          <a:prstGeom prst="rect">
+            <a:avLst/>
+          </a:prstGeom>
+          <a:solidFill>
+            <a:srgbClr val="0D1626"/>
+          </a:solidFill>
+          <a:ln w="12700">
+            <a:solidFill>
+              <a:srgbClr val="1F2937"/>
+            </a:solidFill>
+            <a:prstDash val="solid"/>
+          </a:ln>
+          <a:effectLst>
+            <a:outerShdw blurRad="101600" dist="38100" dir="8100000" algn="bl" rotWithShape="0">
+              <a:srgbClr val="000000">
+                <a:alpha val="25000"/>
+              </a:srgbClr>
+            </a:outerShdw>
+          </a:effectLst>
+        </p:spPr>
+      </p:sp>
+      <p:sp>
+        <p:nvSpPr>
+          <p:cNvPr id="32" name="Shape 25"/>
+          <p:cNvSpPr/>
+          <p:nvPr/>
+        </p:nvSpPr>
+        <p:spPr>
+          <a:xfrm>
+            <a:off x="6080760" y="3017520"/>
+            <a:ext cx="2651760" cy="54864"/>
+          </a:xfrm>
+          <a:prstGeom prst="rect">
+            <a:avLst/>
+          </a:prstGeom>
+          <a:solidFill>
+            <a:srgbClr val="00E676"/>
+          </a:solidFill>
+          <a:ln w="12700">
+            <a:solidFill>
+              <a:srgbClr val="333333"/>
+            </a:solidFill>
+            <a:prstDash val="solid"/>
+          </a:ln>
+        </p:spPr>
+      </p:sp>
+      <p:pic>
+        <p:nvPicPr>
+          <p:cNvPr id="33" name="Image 5" descr="preencoded.png"/>
+          <p:cNvPicPr>
+            <a:picLocks noChangeAspect="1"/>
+          </p:cNvPicPr>
+          <p:nvPr/>
+        </p:nvPicPr>
+        <p:blipFill>
+          <a:blip r:embed="rId8"/>
+          <a:stretch>
+            <a:fillRect/>
+          </a:stretch>
+        </p:blipFill>
+        <p:spPr>
+          <a:xfrm>
+            <a:off x="6217920" y="3182112"/>
+            <a:ext cx="347472" cy="347472"/>
+          </a:xfrm>
+          <a:prstGeom prst="rect">
+            <a:avLst/>
+          </a:prstGeom>
+        </p:spPr>
+      </p:pic>
+      <p:sp>
+        <p:nvSpPr>
+          <p:cNvPr id="34" name="Text 26"/>
+          <p:cNvSpPr/>
+          <p:nvPr/>
+        </p:nvSpPr>
+        <p:spPr>
+          <a:xfrm>
+            <a:off x="6629400" y="3154680"/>
+            <a:ext cx="2011680" cy="384048"/>
+          </a:xfrm>
+          <a:prstGeom prst="rect">
+            <a:avLst/>
+          </a:prstGeom>
+          <a:noFill/>
+          <a:ln/>
+        </p:spPr>
+        <p:txBody>
+          <a:bodyPr wrap="square" lIns="0" tIns="0" rIns="0" bIns="0" rtlCol="0" anchor="ctr"/>
+          <a:lstStyle/>
+          <a:p>
+            <a:pPr marL="0" indent="0" algn="l">
+              <a:buNone/>
+            </a:pPr>
+            <a:r>
+              <a:rPr lang="en-US" sz="1300" b="1" dirty="0">
+                <a:solidFill>
+                  <a:srgbClr val="FFFFFF"/>
+                </a:solidFill>
+                <a:latin typeface="Trebuchet MS" pitchFamily="34" charset="0"/>
+                <a:ea typeface="Trebuchet MS" pitchFamily="34" charset="-122"/>
+                <a:cs typeface="Trebuchet MS" pitchFamily="34" charset="-120"/>
+              </a:rPr>
+              <a:t>Product Thinking</a:t>
+            </a:r>
+            <a:endParaRPr lang="en-US" sz="1300" dirty="0"/>
+          </a:p>
+        </p:txBody>
+      </p:sp>
+      <p:sp>
+        <p:nvSpPr>
+          <p:cNvPr id="35" name="Text 27"/>
+          <p:cNvSpPr/>
+          <p:nvPr/>
+        </p:nvSpPr>
+        <p:spPr>
+          <a:xfrm>
+            <a:off x="6217920" y="3657600"/>
+            <a:ext cx="2377440" cy="822960"/>
+          </a:xfrm>
+          <a:prstGeom prst="rect">
+            <a:avLst/>
+          </a:prstGeom>
+          <a:noFill/>
+          <a:ln/>
+        </p:spPr>
+        <p:txBody>
+          <a:bodyPr wrap="square" lIns="0" tIns="0" rIns="0" bIns="0" rtlCol="0" anchor="t"/>
+          <a:lstStyle/>
+          <a:p>
+            <a:pPr marL="0" indent="0" algn="l">
+              <a:buNone/>
+            </a:pPr>
+            <a:r>
+              <a:rPr lang="en-US" sz="1000" dirty="0">
+                <a:solidFill>
+                  <a:srgbClr val="9CA3AF"/>
+                </a:solidFill>
+                <a:latin typeface="Calibri" pitchFamily="34" charset="0"/>
+                <a:ea typeface="Calibri" pitchFamily="34" charset="-122"/>
+                <a:cs typeface="Calibri" pitchFamily="34" charset="-120"/>
+              </a:rPr>
               <a:t>Features that seem simple (live prices, login) involve 10 layers of complexity. The gap is just code.</a:t>
             </a:r>
             <a:endParaRPr lang="en-US" sz="1000" dirty="0"/>
@@ -3606,7 +3350,7 @@
           <a:bodyPr wrap="square" lIns="0" tIns="0" rIns="0" bIns="0" rtlCol="0" anchor="t"/>
           <a:lstStyle/>
           <a:p>
-            <a:pPr algn="r" indent="0" marL="0">
+            <a:pPr marL="0" indent="0" algn="r">
               <a:buNone/>
             </a:pPr>
             <a:r>
@@ -3640,6 +3384,7 @@
         <a:solidFill>
           <a:srgbClr val="111827"/>
         </a:solidFill>
+        <a:effectLst/>
       </p:bgPr>
     </p:bg>
     <p:spTree>
@@ -3702,7 +3447,7 @@
           <a:bodyPr wrap="square" lIns="0" tIns="0" rIns="0" bIns="0" rtlCol="0" anchor="ctr"/>
           <a:lstStyle/>
           <a:p>
-            <a:pPr algn="ctr" indent="0" marL="0">
+            <a:pPr marL="0" indent="0" algn="ctr">
               <a:buNone/>
             </a:pPr>
             <a:r>
@@ -3741,7 +3486,7 @@
           <a:bodyPr wrap="square" lIns="0" tIns="0" rIns="0" bIns="0" rtlCol="0" anchor="ctr"/>
           <a:lstStyle/>
           <a:p>
-            <a:pPr algn="l" indent="0" marL="0">
+            <a:pPr marL="0" indent="0" algn="l">
               <a:buNone/>
             </a:pPr>
             <a:r>
@@ -3758,7 +3503,7 @@
             <a:endParaRPr lang="en-US" sz="2800" dirty="0"/>
           </a:p>
           <a:p>
-            <a:pPr algn="l" indent="0" marL="0">
+            <a:pPr marL="0" indent="0" algn="l">
               <a:buNone/>
             </a:pPr>
             <a:r>
@@ -3775,7 +3520,7 @@
             <a:endParaRPr lang="en-US" sz="2800" dirty="0"/>
           </a:p>
           <a:p>
-            <a:pPr algn="l" indent="0" marL="0">
+            <a:pPr marL="0" indent="0" algn="l">
               <a:buNone/>
             </a:pPr>
             <a:r>
@@ -3839,7 +3584,7 @@
           <a:bodyPr wrap="square" lIns="0" tIns="0" rIns="0" bIns="0" rtlCol="0" anchor="t"/>
           <a:lstStyle/>
           <a:p>
-            <a:pPr algn="l" indent="0" marL="0">
+            <a:pPr marL="0" indent="0" algn="l">
               <a:buNone/>
             </a:pPr>
             <a:r>
@@ -3878,7 +3623,7 @@
           <a:bodyPr wrap="square" lIns="0" tIns="0" rIns="0" bIns="0" rtlCol="0" anchor="t"/>
           <a:lstStyle/>
           <a:p>
-            <a:pPr algn="l" indent="0" marL="0">
+            <a:pPr marL="0" indent="0" algn="l">
               <a:buNone/>
             </a:pPr>
             <a:r>
@@ -3920,7 +3665,7 @@
             <a:prstDash val="solid"/>
           </a:ln>
           <a:effectLst>
-            <a:outerShdw sx="100000" sy="100000" kx="0" ky="0" algn="bl" rotWithShape="0" blurRad="101600" dist="38100" dir="8100000">
+            <a:outerShdw blurRad="101600" dist="38100" dir="8100000" algn="bl" rotWithShape="0">
               <a:srgbClr val="000000">
                 <a:alpha val="25000"/>
               </a:srgbClr>
@@ -3974,7 +3719,7 @@
           <a:bodyPr wrap="square" lIns="0" tIns="0" rIns="0" bIns="0" rtlCol="0" anchor="ctr"/>
           <a:lstStyle/>
           <a:p>
-            <a:pPr algn="ctr" indent="0" marL="0">
+            <a:pPr marL="0" indent="0" algn="ctr">
               <a:buNone/>
             </a:pPr>
             <a:r>
@@ -4016,7 +3761,7 @@
             <a:prstDash val="solid"/>
           </a:ln>
           <a:effectLst>
-            <a:outerShdw sx="100000" sy="100000" kx="0" ky="0" algn="bl" rotWithShape="0" blurRad="101600" dist="38100" dir="8100000">
+            <a:outerShdw blurRad="101600" dist="38100" dir="8100000" algn="bl" rotWithShape="0">
               <a:srgbClr val="000000">
                 <a:alpha val="25000"/>
               </a:srgbClr>
@@ -4070,7 +3815,7 @@
           <a:bodyPr wrap="square" lIns="0" tIns="0" rIns="0" bIns="0" rtlCol="0" anchor="ctr"/>
           <a:lstStyle/>
           <a:p>
-            <a:pPr indent="0" marL="0">
+            <a:pPr marL="0" indent="0">
               <a:buNone/>
             </a:pPr>
             <a:r>
@@ -4109,7 +3854,7 @@
           <a:bodyPr wrap="square" lIns="0" tIns="0" rIns="0" bIns="0" rtlCol="0" anchor="t"/>
           <a:lstStyle/>
           <a:p>
-            <a:pPr algn="l" indent="0" marL="0">
+            <a:pPr marL="0" indent="0" algn="l">
               <a:buNone/>
             </a:pPr>
             <a:r>
@@ -4151,7 +3896,7 @@
             <a:prstDash val="solid"/>
           </a:ln>
           <a:effectLst>
-            <a:outerShdw sx="100000" sy="100000" kx="0" ky="0" algn="bl" rotWithShape="0" blurRad="101600" dist="38100" dir="8100000">
+            <a:outerShdw blurRad="101600" dist="38100" dir="8100000" algn="bl" rotWithShape="0">
               <a:srgbClr val="000000">
                 <a:alpha val="25000"/>
               </a:srgbClr>
@@ -4205,7 +3950,7 @@
           <a:bodyPr wrap="square" lIns="0" tIns="0" rIns="0" bIns="0" rtlCol="0" anchor="ctr"/>
           <a:lstStyle/>
           <a:p>
-            <a:pPr indent="0" marL="0">
+            <a:pPr marL="0" indent="0">
               <a:buNone/>
             </a:pPr>
             <a:r>
@@ -4244,7 +3989,7 @@
           <a:bodyPr wrap="square" lIns="0" tIns="0" rIns="0" bIns="0" rtlCol="0" anchor="t"/>
           <a:lstStyle/>
           <a:p>
-            <a:pPr algn="l" indent="0" marL="0">
+            <a:pPr marL="0" indent="0" algn="l">
               <a:buNone/>
             </a:pPr>
             <a:r>
@@ -4286,7 +4031,7 @@
             <a:prstDash val="solid"/>
           </a:ln>
           <a:effectLst>
-            <a:outerShdw sx="100000" sy="100000" kx="0" ky="0" algn="bl" rotWithShape="0" blurRad="101600" dist="38100" dir="8100000">
+            <a:outerShdw blurRad="101600" dist="38100" dir="8100000" algn="bl" rotWithShape="0">
               <a:srgbClr val="000000">
                 <a:alpha val="25000"/>
               </a:srgbClr>
@@ -4340,7 +4085,7 @@
           <a:bodyPr wrap="square" lIns="0" tIns="0" rIns="0" bIns="0" rtlCol="0" anchor="ctr"/>
           <a:lstStyle/>
           <a:p>
-            <a:pPr indent="0" marL="0">
+            <a:pPr marL="0" indent="0">
               <a:buNone/>
             </a:pPr>
             <a:r>
@@ -4379,7 +4124,7 @@
           <a:bodyPr wrap="square" lIns="0" tIns="0" rIns="0" bIns="0" rtlCol="0" anchor="t"/>
           <a:lstStyle/>
           <a:p>
-            <a:pPr algn="l" indent="0" marL="0">
+            <a:pPr marL="0" indent="0" algn="l">
               <a:buNone/>
             </a:pPr>
             <a:r>
@@ -4418,7 +4163,7 @@
           <a:bodyPr wrap="square" lIns="0" tIns="0" rIns="0" bIns="0" rtlCol="0" anchor="ctr"/>
           <a:lstStyle/>
           <a:p>
-            <a:pPr algn="l" indent="0" marL="0">
+            <a:pPr marL="0" indent="0" algn="l">
               <a:buNone/>
             </a:pPr>
             <a:r>
@@ -4457,7 +4202,7 @@
           <a:bodyPr wrap="square" lIns="0" tIns="0" rIns="0" bIns="0" rtlCol="0" anchor="t"/>
           <a:lstStyle/>
           <a:p>
-            <a:pPr algn="r" indent="0" marL="0">
+            <a:pPr marL="0" indent="0" algn="r">
               <a:buNone/>
             </a:pPr>
             <a:r>
@@ -4491,6 +4236,7 @@
         <a:solidFill>
           <a:srgbClr val="0A0E1A"/>
         </a:solidFill>
+        <a:effectLst/>
       </p:bgPr>
     </p:bg>
     <p:spTree>
@@ -4580,7 +4326,7 @@
           <a:bodyPr wrap="square" lIns="0" tIns="0" rIns="0" bIns="0" rtlCol="0" anchor="ctr"/>
           <a:lstStyle/>
           <a:p>
-            <a:pPr algn="ctr" indent="0" marL="0">
+            <a:pPr marL="0" indent="0" algn="ctr">
               <a:buNone/>
             </a:pPr>
             <a:r>
@@ -4619,7 +4365,7 @@
           <a:bodyPr wrap="square" lIns="0" tIns="0" rIns="0" bIns="0" rtlCol="0" anchor="ctr"/>
           <a:lstStyle/>
           <a:p>
-            <a:pPr algn="l" indent="0" marL="0">
+            <a:pPr marL="0" indent="0" algn="l">
               <a:buNone/>
             </a:pPr>
             <a:r>
@@ -4661,7 +4407,7 @@
             <a:prstDash val="solid"/>
           </a:ln>
           <a:effectLst>
-            <a:outerShdw sx="100000" sy="100000" kx="0" ky="0" algn="bl" rotWithShape="0" blurRad="101600" dist="38100" dir="8100000">
+            <a:outerShdw blurRad="101600" dist="38100" dir="8100000" algn="bl" rotWithShape="0">
               <a:srgbClr val="000000">
                 <a:alpha val="25000"/>
               </a:srgbClr>
@@ -4715,7 +4461,7 @@
           <a:bodyPr wrap="square" lIns="0" tIns="0" rIns="0" bIns="0" rtlCol="0" anchor="ctr"/>
           <a:lstStyle/>
           <a:p>
-            <a:pPr algn="l" indent="0" marL="0">
+            <a:pPr marL="0" indent="0" algn="l">
               <a:buNone/>
             </a:pPr>
             <a:r>
@@ -4757,7 +4503,7 @@
             <a:prstDash val="solid"/>
           </a:ln>
           <a:effectLst>
-            <a:outerShdw sx="100000" sy="100000" kx="0" ky="0" algn="bl" rotWithShape="0" blurRad="101600" dist="38100" dir="8100000">
+            <a:outerShdw blurRad="101600" dist="38100" dir="8100000" algn="bl" rotWithShape="0">
               <a:srgbClr val="000000">
                 <a:alpha val="25000"/>
               </a:srgbClr>
@@ -4811,7 +4557,7 @@
           <a:bodyPr wrap="square" lIns="0" tIns="0" rIns="0" bIns="0" rtlCol="0" anchor="ctr"/>
           <a:lstStyle/>
           <a:p>
-            <a:pPr algn="l" indent="0" marL="0">
+            <a:pPr marL="0" indent="0" algn="l">
               <a:buNone/>
             </a:pPr>
             <a:r>
@@ -4850,7 +4596,7 @@
           <a:bodyPr wrap="square" lIns="0" tIns="0" rIns="0" bIns="0" rtlCol="0" anchor="t"/>
           <a:lstStyle/>
           <a:p>
-            <a:pPr algn="l" indent="0" marL="0">
+            <a:pPr marL="0" indent="0" algn="l">
               <a:buNone/>
             </a:pPr>
             <a:r>
@@ -4892,7 +4638,7 @@
             <a:prstDash val="solid"/>
           </a:ln>
           <a:effectLst>
-            <a:outerShdw sx="100000" sy="100000" kx="0" ky="0" algn="bl" rotWithShape="0" blurRad="101600" dist="38100" dir="8100000">
+            <a:outerShdw blurRad="101600" dist="38100" dir="8100000" algn="bl" rotWithShape="0">
               <a:srgbClr val="000000">
                 <a:alpha val="25000"/>
               </a:srgbClr>
@@ -4946,7 +4692,7 @@
           <a:bodyPr wrap="square" lIns="0" tIns="0" rIns="0" bIns="0" rtlCol="0" anchor="ctr"/>
           <a:lstStyle/>
           <a:p>
-            <a:pPr algn="l" indent="0" marL="0">
+            <a:pPr marL="0" indent="0" algn="l">
               <a:buNone/>
             </a:pPr>
             <a:r>
@@ -4985,7 +4731,7 @@
           <a:bodyPr wrap="square" lIns="0" tIns="0" rIns="0" bIns="0" rtlCol="0" anchor="t"/>
           <a:lstStyle/>
           <a:p>
-            <a:pPr algn="l" indent="0" marL="0">
+            <a:pPr marL="0" indent="0" algn="l">
               <a:buNone/>
             </a:pPr>
             <a:r>
@@ -5027,7 +4773,7 @@
             <a:prstDash val="solid"/>
           </a:ln>
           <a:effectLst>
-            <a:outerShdw sx="100000" sy="100000" kx="0" ky="0" algn="bl" rotWithShape="0" blurRad="101600" dist="38100" dir="8100000">
+            <a:outerShdw blurRad="101600" dist="38100" dir="8100000" algn="bl" rotWithShape="0">
               <a:srgbClr val="000000">
                 <a:alpha val="25000"/>
               </a:srgbClr>
@@ -5081,7 +4827,7 @@
           <a:bodyPr wrap="square" lIns="0" tIns="0" rIns="0" bIns="0" rtlCol="0" anchor="ctr"/>
           <a:lstStyle/>
           <a:p>
-            <a:pPr algn="l" indent="0" marL="0">
+            <a:pPr marL="0" indent="0" algn="l">
               <a:buNone/>
             </a:pPr>
             <a:r>
@@ -5120,7 +4866,7 @@
           <a:bodyPr wrap="square" lIns="0" tIns="0" rIns="0" bIns="0" rtlCol="0" anchor="t"/>
           <a:lstStyle/>
           <a:p>
-            <a:pPr algn="l" indent="0" marL="0">
+            <a:pPr marL="0" indent="0" algn="l">
               <a:buNone/>
             </a:pPr>
             <a:r>
@@ -5159,7 +4905,7 @@
           <a:bodyPr wrap="square" lIns="0" tIns="0" rIns="0" bIns="0" rtlCol="0" anchor="t"/>
           <a:lstStyle/>
           <a:p>
-            <a:pPr algn="r" indent="0" marL="0">
+            <a:pPr marL="0" indent="0" algn="r">
               <a:buNone/>
             </a:pPr>
             <a:r>
@@ -5193,6 +4939,7 @@
         <a:solidFill>
           <a:srgbClr val="0A0E1A"/>
         </a:solidFill>
+        <a:effectLst/>
       </p:bgPr>
     </p:bg>
     <p:spTree>
@@ -5282,7 +5029,7 @@
           <a:bodyPr wrap="square" lIns="0" tIns="0" rIns="0" bIns="0" rtlCol="0" anchor="ctr"/>
           <a:lstStyle/>
           <a:p>
-            <a:pPr algn="ctr" indent="0" marL="0">
+            <a:pPr marL="0" indent="0" algn="ctr">
               <a:buNone/>
             </a:pPr>
             <a:r>
@@ -5321,7 +5068,7 @@
           <a:bodyPr wrap="square" lIns="0" tIns="0" rIns="0" bIns="0" rtlCol="0" anchor="ctr"/>
           <a:lstStyle/>
           <a:p>
-            <a:pPr algn="l" indent="0" marL="0">
+            <a:pPr marL="0" indent="0" algn="l">
               <a:buNone/>
             </a:pPr>
             <a:r>
@@ -5360,7 +5107,7 @@
           <a:bodyPr wrap="square" lIns="0" tIns="0" rIns="0" bIns="0" rtlCol="0" anchor="t"/>
           <a:lstStyle/>
           <a:p>
-            <a:pPr algn="l" indent="0" marL="0">
+            <a:pPr marL="0" indent="0" algn="l">
               <a:buNone/>
             </a:pPr>
             <a:r>
@@ -5402,7 +5149,7 @@
             <a:prstDash val="solid"/>
           </a:ln>
           <a:effectLst>
-            <a:outerShdw sx="100000" sy="100000" kx="0" ky="0" algn="bl" rotWithShape="0" blurRad="101600" dist="38100" dir="8100000">
+            <a:outerShdw blurRad="101600" dist="38100" dir="8100000" algn="bl" rotWithShape="0">
               <a:srgbClr val="000000">
                 <a:alpha val="25000"/>
               </a:srgbClr>
@@ -5437,325 +5184,7 @@
       </p:sp>
       <p:pic>
         <p:nvPicPr>
-          <p:cNvPr id="9" name="Image 0" descr="preencoded.png">    </p:cNvPr>
-          <p:cNvPicPr>
-            <a:picLocks noChangeAspect="1"/>
-          </p:cNvPicPr>
-          <p:nvPr/>
-        </p:nvPicPr>
-        <p:blipFill>
-          <a:blip r:embed="rId1"/>
-          <a:stretch>
-            <a:fillRect/>
-          </a:stretch>
-        </p:blipFill>
-        <p:spPr>
-          <a:xfrm>
-            <a:off x="429768" y="1828800"/>
-            <a:ext cx="320040" cy="320040"/>
-          </a:xfrm>
-          <a:prstGeom prst="rect">
-            <a:avLst/>
-          </a:prstGeom>
-        </p:spPr>
-      </p:pic>
-      <p:sp>
-        <p:nvSpPr>
-          <p:cNvPr id="10" name="Text 7"/>
-          <p:cNvSpPr/>
-          <p:nvPr/>
-        </p:nvSpPr>
-        <p:spPr>
-          <a:xfrm>
-            <a:off x="822960" y="1801368"/>
-            <a:ext cx="1371600" cy="320040"/>
-          </a:xfrm>
-          <a:prstGeom prst="rect">
-            <a:avLst/>
-          </a:prstGeom>
-          <a:noFill/>
-          <a:ln/>
-        </p:spPr>
-        <p:txBody>
-          <a:bodyPr wrap="square" lIns="0" tIns="0" rIns="0" bIns="0" rtlCol="0" anchor="ctr"/>
-          <a:lstStyle/>
-          <a:p>
-            <a:pPr algn="l" indent="0" marL="0">
-              <a:buNone/>
-            </a:pPr>
-            <a:r>
-              <a:rPr lang="en-US" sz="1200" b="1" dirty="0">
-                <a:solidFill>
-                  <a:srgbClr val="FFFFFF"/>
-                </a:solidFill>
-                <a:latin typeface="Trebuchet MS" pitchFamily="34" charset="0"/>
-                <a:ea typeface="Trebuchet MS" pitchFamily="34" charset="-122"/>
-                <a:cs typeface="Trebuchet MS" pitchFamily="34" charset="-120"/>
-              </a:rPr>
-              <a:t>Live Markets</a:t>
-            </a:r>
-            <a:endParaRPr lang="en-US" sz="1200" dirty="0"/>
-          </a:p>
-        </p:txBody>
-      </p:sp>
-      <p:sp>
-        <p:nvSpPr>
-          <p:cNvPr id="11" name="Text 8"/>
-          <p:cNvSpPr/>
-          <p:nvPr/>
-        </p:nvSpPr>
-        <p:spPr>
-          <a:xfrm>
-            <a:off x="411480" y="2240280"/>
-            <a:ext cx="1737360" cy="640080"/>
-          </a:xfrm>
-          <a:prstGeom prst="rect">
-            <a:avLst/>
-          </a:prstGeom>
-          <a:noFill/>
-          <a:ln/>
-        </p:spPr>
-        <p:txBody>
-          <a:bodyPr wrap="square" lIns="0" tIns="0" rIns="0" bIns="0" rtlCol="0" anchor="t"/>
-          <a:lstStyle/>
-          <a:p>
-            <a:pPr algn="l" indent="0" marL="0">
-              <a:buNone/>
-            </a:pPr>
-            <a:r>
-              <a:rPr lang="en-US" sz="1000" dirty="0">
-                <a:solidFill>
-                  <a:srgbClr val="9CA3AF"/>
-                </a:solidFill>
-                <a:latin typeface="Calibri" pitchFamily="34" charset="0"/>
-                <a:ea typeface="Calibri" pitchFamily="34" charset="-122"/>
-                <a:cs typeface="Calibri" pitchFamily="34" charset="-120"/>
-              </a:rPr>
-              <a:t>NIFTY, SENSEX, BANK NIFTY every 10s</a:t>
-            </a:r>
-            <a:endParaRPr lang="en-US" sz="1000" dirty="0"/>
-          </a:p>
-        </p:txBody>
-      </p:sp>
-      <p:sp>
-        <p:nvSpPr>
-          <p:cNvPr id="12" name="Shape 9"/>
-          <p:cNvSpPr/>
-          <p:nvPr/>
-        </p:nvSpPr>
-        <p:spPr>
-          <a:xfrm>
-            <a:off x="2468880" y="1691640"/>
-            <a:ext cx="1920240" cy="1325880"/>
-          </a:xfrm>
-          <a:prstGeom prst="rect">
-            <a:avLst/>
-          </a:prstGeom>
-          <a:solidFill>
-            <a:srgbClr val="0D1626"/>
-          </a:solidFill>
-          <a:ln w="12700">
-            <a:solidFill>
-              <a:srgbClr val="1F2937"/>
-            </a:solidFill>
-            <a:prstDash val="solid"/>
-          </a:ln>
-          <a:effectLst>
-            <a:outerShdw sx="100000" sy="100000" kx="0" ky="0" algn="bl" rotWithShape="0" blurRad="101600" dist="38100" dir="8100000">
-              <a:srgbClr val="000000">
-                <a:alpha val="25000"/>
-              </a:srgbClr>
-            </a:outerShdw>
-          </a:effectLst>
-        </p:spPr>
-      </p:sp>
-      <p:sp>
-        <p:nvSpPr>
-          <p:cNvPr id="13" name="Shape 10"/>
-          <p:cNvSpPr/>
-          <p:nvPr/>
-        </p:nvSpPr>
-        <p:spPr>
-          <a:xfrm>
-            <a:off x="2468880" y="1691640"/>
-            <a:ext cx="1920240" cy="45720"/>
-          </a:xfrm>
-          <a:prstGeom prst="rect">
-            <a:avLst/>
-          </a:prstGeom>
-          <a:solidFill>
-            <a:srgbClr val="00BCD4"/>
-          </a:solidFill>
-          <a:ln w="12700">
-            <a:solidFill>
-              <a:srgbClr val="333333"/>
-            </a:solidFill>
-            <a:prstDash val="solid"/>
-          </a:ln>
-        </p:spPr>
-      </p:sp>
-      <p:pic>
-        <p:nvPicPr>
-          <p:cNvPr id="14" name="Image 1" descr="preencoded.png">    </p:cNvPr>
-          <p:cNvPicPr>
-            <a:picLocks noChangeAspect="1"/>
-          </p:cNvPicPr>
-          <p:nvPr/>
-        </p:nvPicPr>
-        <p:blipFill>
-          <a:blip r:embed="rId2"/>
-          <a:stretch>
-            <a:fillRect/>
-          </a:stretch>
-        </p:blipFill>
-        <p:spPr>
-          <a:xfrm>
-            <a:off x="2578608" y="1828800"/>
-            <a:ext cx="320040" cy="320040"/>
-          </a:xfrm>
-          <a:prstGeom prst="rect">
-            <a:avLst/>
-          </a:prstGeom>
-        </p:spPr>
-      </p:pic>
-      <p:sp>
-        <p:nvSpPr>
-          <p:cNvPr id="15" name="Text 11"/>
-          <p:cNvSpPr/>
-          <p:nvPr/>
-        </p:nvSpPr>
-        <p:spPr>
-          <a:xfrm>
-            <a:off x="2971800" y="1801368"/>
-            <a:ext cx="1371600" cy="320040"/>
-          </a:xfrm>
-          <a:prstGeom prst="rect">
-            <a:avLst/>
-          </a:prstGeom>
-          <a:noFill/>
-          <a:ln/>
-        </p:spPr>
-        <p:txBody>
-          <a:bodyPr wrap="square" lIns="0" tIns="0" rIns="0" bIns="0" rtlCol="0" anchor="ctr"/>
-          <a:lstStyle/>
-          <a:p>
-            <a:pPr algn="l" indent="0" marL="0">
-              <a:buNone/>
-            </a:pPr>
-            <a:r>
-              <a:rPr lang="en-US" sz="1200" b="1" dirty="0">
-                <a:solidFill>
-                  <a:srgbClr val="FFFFFF"/>
-                </a:solidFill>
-                <a:latin typeface="Trebuchet MS" pitchFamily="34" charset="0"/>
-                <a:ea typeface="Trebuchet MS" pitchFamily="34" charset="-122"/>
-                <a:cs typeface="Trebuchet MS" pitchFamily="34" charset="-120"/>
-              </a:rPr>
-              <a:t>Crypto</a:t>
-            </a:r>
-            <a:endParaRPr lang="en-US" sz="1200" dirty="0"/>
-          </a:p>
-        </p:txBody>
-      </p:sp>
-      <p:sp>
-        <p:nvSpPr>
-          <p:cNvPr id="16" name="Text 12"/>
-          <p:cNvSpPr/>
-          <p:nvPr/>
-        </p:nvSpPr>
-        <p:spPr>
-          <a:xfrm>
-            <a:off x="2560320" y="2240280"/>
-            <a:ext cx="1737360" cy="640080"/>
-          </a:xfrm>
-          <a:prstGeom prst="rect">
-            <a:avLst/>
-          </a:prstGeom>
-          <a:noFill/>
-          <a:ln/>
-        </p:spPr>
-        <p:txBody>
-          <a:bodyPr wrap="square" lIns="0" tIns="0" rIns="0" bIns="0" rtlCol="0" anchor="t"/>
-          <a:lstStyle/>
-          <a:p>
-            <a:pPr algn="l" indent="0" marL="0">
-              <a:buNone/>
-            </a:pPr>
-            <a:r>
-              <a:rPr lang="en-US" sz="1000" dirty="0">
-                <a:solidFill>
-                  <a:srgbClr val="9CA3AF"/>
-                </a:solidFill>
-                <a:latin typeface="Calibri" pitchFamily="34" charset="0"/>
-                <a:ea typeface="Calibri" pitchFamily="34" charset="-122"/>
-                <a:cs typeface="Calibri" pitchFamily="34" charset="-120"/>
-              </a:rPr>
-              <a:t>Top 15 coins in INR via CoinGecko</a:t>
-            </a:r>
-            <a:endParaRPr lang="en-US" sz="1000" dirty="0"/>
-          </a:p>
-        </p:txBody>
-      </p:sp>
-      <p:sp>
-        <p:nvSpPr>
-          <p:cNvPr id="17" name="Shape 13"/>
-          <p:cNvSpPr/>
-          <p:nvPr/>
-        </p:nvSpPr>
-        <p:spPr>
-          <a:xfrm>
-            <a:off x="4617720" y="1691640"/>
-            <a:ext cx="1920240" cy="1325880"/>
-          </a:xfrm>
-          <a:prstGeom prst="rect">
-            <a:avLst/>
-          </a:prstGeom>
-          <a:solidFill>
-            <a:srgbClr val="0D1626"/>
-          </a:solidFill>
-          <a:ln w="12700">
-            <a:solidFill>
-              <a:srgbClr val="1F2937"/>
-            </a:solidFill>
-            <a:prstDash val="solid"/>
-          </a:ln>
-          <a:effectLst>
-            <a:outerShdw sx="100000" sy="100000" kx="0" ky="0" algn="bl" rotWithShape="0" blurRad="101600" dist="38100" dir="8100000">
-              <a:srgbClr val="000000">
-                <a:alpha val="25000"/>
-              </a:srgbClr>
-            </a:outerShdw>
-          </a:effectLst>
-        </p:spPr>
-      </p:sp>
-      <p:sp>
-        <p:nvSpPr>
-          <p:cNvPr id="18" name="Shape 14"/>
-          <p:cNvSpPr/>
-          <p:nvPr/>
-        </p:nvSpPr>
-        <p:spPr>
-          <a:xfrm>
-            <a:off x="4617720" y="1691640"/>
-            <a:ext cx="1920240" cy="45720"/>
-          </a:xfrm>
-          <a:prstGeom prst="rect">
-            <a:avLst/>
-          </a:prstGeom>
-          <a:solidFill>
-            <a:srgbClr val="00E676"/>
-          </a:solidFill>
-          <a:ln w="12700">
-            <a:solidFill>
-              <a:srgbClr val="333333"/>
-            </a:solidFill>
-            <a:prstDash val="solid"/>
-          </a:ln>
-        </p:spPr>
-      </p:sp>
-      <p:pic>
-        <p:nvPicPr>
-          <p:cNvPr id="19" name="Image 2" descr="preencoded.png">    </p:cNvPr>
+          <p:cNvPr id="9" name="Image 0" descr="preencoded.png"/>
           <p:cNvPicPr>
             <a:picLocks noChangeAspect="1"/>
           </p:cNvPicPr>
@@ -5769,7 +5198,7 @@
         </p:blipFill>
         <p:spPr>
           <a:xfrm>
-            <a:off x="4727448" y="1828800"/>
+            <a:off x="429768" y="1828800"/>
             <a:ext cx="320040" cy="320040"/>
           </a:xfrm>
           <a:prstGeom prst="rect">
@@ -5779,13 +5208,13 @@
       </p:pic>
       <p:sp>
         <p:nvSpPr>
-          <p:cNvPr id="20" name="Text 15"/>
-          <p:cNvSpPr/>
-          <p:nvPr/>
-        </p:nvSpPr>
-        <p:spPr>
-          <a:xfrm>
-            <a:off x="5120640" y="1801368"/>
+          <p:cNvPr id="10" name="Text 7"/>
+          <p:cNvSpPr/>
+          <p:nvPr/>
+        </p:nvSpPr>
+        <p:spPr>
+          <a:xfrm>
+            <a:off x="822960" y="1801368"/>
             <a:ext cx="1371600" cy="320040"/>
           </a:xfrm>
           <a:prstGeom prst="rect">
@@ -5798,7 +5227,7 @@
           <a:bodyPr wrap="square" lIns="0" tIns="0" rIns="0" bIns="0" rtlCol="0" anchor="ctr"/>
           <a:lstStyle/>
           <a:p>
-            <a:pPr algn="l" indent="0" marL="0">
+            <a:pPr marL="0" indent="0" algn="l">
               <a:buNone/>
             </a:pPr>
             <a:r>
@@ -5810,7 +5239,7 @@
                 <a:ea typeface="Trebuchet MS" pitchFamily="34" charset="-122"/>
                 <a:cs typeface="Trebuchet MS" pitchFamily="34" charset="-120"/>
               </a:rPr>
-              <a:t>Market News</a:t>
+              <a:t>Live Markets</a:t>
             </a:r>
             <a:endParaRPr lang="en-US" sz="1200" dirty="0"/>
           </a:p>
@@ -5818,13 +5247,13 @@
       </p:sp>
       <p:sp>
         <p:nvSpPr>
-          <p:cNvPr id="21" name="Text 16"/>
-          <p:cNvSpPr/>
-          <p:nvPr/>
-        </p:nvSpPr>
-        <p:spPr>
-          <a:xfrm>
-            <a:off x="4709160" y="2240280"/>
+          <p:cNvPr id="11" name="Text 8"/>
+          <p:cNvSpPr/>
+          <p:nvPr/>
+        </p:nvSpPr>
+        <p:spPr>
+          <a:xfrm>
+            <a:off x="411480" y="2240280"/>
             <a:ext cx="1737360" cy="640080"/>
           </a:xfrm>
           <a:prstGeom prst="rect">
@@ -5837,7 +5266,7 @@
           <a:bodyPr wrap="square" lIns="0" tIns="0" rIns="0" bIns="0" rtlCol="0" anchor="t"/>
           <a:lstStyle/>
           <a:p>
-            <a:pPr algn="l" indent="0" marL="0">
+            <a:pPr marL="0" indent="0" algn="l">
               <a:buNone/>
             </a:pPr>
             <a:r>
@@ -5849,7 +5278,7 @@
                 <a:ea typeface="Calibri" pitchFamily="34" charset="-122"/>
                 <a:cs typeface="Calibri" pitchFamily="34" charset="-120"/>
               </a:rPr>
-              <a:t>Real news from ET, Moneycontrol, BS</a:t>
+              <a:t>NIFTY, SENSEX, BANK NIFTY every 10s</a:t>
             </a:r>
             <a:endParaRPr lang="en-US" sz="1000" dirty="0"/>
           </a:p>
@@ -5857,13 +5286,13 @@
       </p:sp>
       <p:sp>
         <p:nvSpPr>
-          <p:cNvPr id="22" name="Shape 17"/>
-          <p:cNvSpPr/>
-          <p:nvPr/>
-        </p:nvSpPr>
-        <p:spPr>
-          <a:xfrm>
-            <a:off x="6766560" y="1691640"/>
+          <p:cNvPr id="12" name="Shape 9"/>
+          <p:cNvSpPr/>
+          <p:nvPr/>
+        </p:nvSpPr>
+        <p:spPr>
+          <a:xfrm>
+            <a:off x="2468880" y="1691640"/>
             <a:ext cx="1920240" cy="1325880"/>
           </a:xfrm>
           <a:prstGeom prst="rect">
@@ -5879,7 +5308,7 @@
             <a:prstDash val="solid"/>
           </a:ln>
           <a:effectLst>
-            <a:outerShdw sx="100000" sy="100000" kx="0" ky="0" algn="bl" rotWithShape="0" blurRad="101600" dist="38100" dir="8100000">
+            <a:outerShdw blurRad="101600" dist="38100" dir="8100000" algn="bl" rotWithShape="0">
               <a:srgbClr val="000000">
                 <a:alpha val="25000"/>
               </a:srgbClr>
@@ -5889,20 +5318,20 @@
       </p:sp>
       <p:sp>
         <p:nvSpPr>
-          <p:cNvPr id="23" name="Shape 18"/>
-          <p:cNvSpPr/>
-          <p:nvPr/>
-        </p:nvSpPr>
-        <p:spPr>
-          <a:xfrm>
-            <a:off x="6766560" y="1691640"/>
+          <p:cNvPr id="13" name="Shape 10"/>
+          <p:cNvSpPr/>
+          <p:nvPr/>
+        </p:nvSpPr>
+        <p:spPr>
+          <a:xfrm>
+            <a:off x="2468880" y="1691640"/>
             <a:ext cx="1920240" cy="45720"/>
           </a:xfrm>
           <a:prstGeom prst="rect">
             <a:avLst/>
           </a:prstGeom>
           <a:solidFill>
-            <a:srgbClr val="00C853"/>
+            <a:srgbClr val="00BCD4"/>
           </a:solidFill>
           <a:ln w="12700">
             <a:solidFill>
@@ -5914,7 +5343,7 @@
       </p:sp>
       <p:pic>
         <p:nvPicPr>
-          <p:cNvPr id="24" name="Image 3" descr="preencoded.png">    </p:cNvPr>
+          <p:cNvPr id="14" name="Image 1" descr="preencoded.png"/>
           <p:cNvPicPr>
             <a:picLocks noChangeAspect="1"/>
           </p:cNvPicPr>
@@ -5928,7 +5357,7 @@
         </p:blipFill>
         <p:spPr>
           <a:xfrm>
-            <a:off x="6876288" y="1828800"/>
+            <a:off x="2578608" y="1828800"/>
             <a:ext cx="320040" cy="320040"/>
           </a:xfrm>
           <a:prstGeom prst="rect">
@@ -5938,13 +5367,13 @@
       </p:pic>
       <p:sp>
         <p:nvSpPr>
-          <p:cNvPr id="25" name="Text 19"/>
-          <p:cNvSpPr/>
-          <p:nvPr/>
-        </p:nvSpPr>
-        <p:spPr>
-          <a:xfrm>
-            <a:off x="7269480" y="1801368"/>
+          <p:cNvPr id="15" name="Text 11"/>
+          <p:cNvSpPr/>
+          <p:nvPr/>
+        </p:nvSpPr>
+        <p:spPr>
+          <a:xfrm>
+            <a:off x="2971800" y="1801368"/>
             <a:ext cx="1371600" cy="320040"/>
           </a:xfrm>
           <a:prstGeom prst="rect">
@@ -5957,7 +5386,7 @@
           <a:bodyPr wrap="square" lIns="0" tIns="0" rIns="0" bIns="0" rtlCol="0" anchor="ctr"/>
           <a:lstStyle/>
           <a:p>
-            <a:pPr algn="l" indent="0" marL="0">
+            <a:pPr marL="0" indent="0" algn="l">
               <a:buNone/>
             </a:pPr>
             <a:r>
@@ -5969,7 +5398,7 @@
                 <a:ea typeface="Trebuchet MS" pitchFamily="34" charset="-122"/>
                 <a:cs typeface="Trebuchet MS" pitchFamily="34" charset="-120"/>
               </a:rPr>
-              <a:t>Mutual Funds</a:t>
+              <a:t>Crypto</a:t>
             </a:r>
             <a:endParaRPr lang="en-US" sz="1200" dirty="0"/>
           </a:p>
@@ -5977,13 +5406,13 @@
       </p:sp>
       <p:sp>
         <p:nvSpPr>
-          <p:cNvPr id="26" name="Text 20"/>
-          <p:cNvSpPr/>
-          <p:nvPr/>
-        </p:nvSpPr>
-        <p:spPr>
-          <a:xfrm>
-            <a:off x="6858000" y="2240280"/>
+          <p:cNvPr id="16" name="Text 12"/>
+          <p:cNvSpPr/>
+          <p:nvPr/>
+        </p:nvSpPr>
+        <p:spPr>
+          <a:xfrm>
+            <a:off x="2560320" y="2240280"/>
             <a:ext cx="1737360" cy="640080"/>
           </a:xfrm>
           <a:prstGeom prst="rect">
@@ -5996,7 +5425,7 @@
           <a:bodyPr wrap="square" lIns="0" tIns="0" rIns="0" bIns="0" rtlCol="0" anchor="t"/>
           <a:lstStyle/>
           <a:p>
-            <a:pPr algn="l" indent="0" marL="0">
+            <a:pPr marL="0" indent="0" algn="l">
               <a:buNone/>
             </a:pPr>
             <a:r>
@@ -6008,7 +5437,7 @@
                 <a:ea typeface="Calibri" pitchFamily="34" charset="-122"/>
                 <a:cs typeface="Calibri" pitchFamily="34" charset="-120"/>
               </a:rPr>
-              <a:t>Live NAV from AMFI India</a:t>
+              <a:t>Top 15 coins in INR via CoinGecko</a:t>
             </a:r>
             <a:endParaRPr lang="en-US" sz="1000" dirty="0"/>
           </a:p>
@@ -6016,13 +5445,13 @@
       </p:sp>
       <p:sp>
         <p:nvSpPr>
-          <p:cNvPr id="27" name="Shape 21"/>
-          <p:cNvSpPr/>
-          <p:nvPr/>
-        </p:nvSpPr>
-        <p:spPr>
-          <a:xfrm>
-            <a:off x="320040" y="3200400"/>
+          <p:cNvPr id="17" name="Shape 13"/>
+          <p:cNvSpPr/>
+          <p:nvPr/>
+        </p:nvSpPr>
+        <p:spPr>
+          <a:xfrm>
+            <a:off x="4617720" y="1691640"/>
             <a:ext cx="1920240" cy="1325880"/>
           </a:xfrm>
           <a:prstGeom prst="rect">
@@ -6038,7 +5467,7 @@
             <a:prstDash val="solid"/>
           </a:ln>
           <a:effectLst>
-            <a:outerShdw sx="100000" sy="100000" kx="0" ky="0" algn="bl" rotWithShape="0" blurRad="101600" dist="38100" dir="8100000">
+            <a:outerShdw blurRad="101600" dist="38100" dir="8100000" algn="bl" rotWithShape="0">
               <a:srgbClr val="000000">
                 <a:alpha val="25000"/>
               </a:srgbClr>
@@ -6048,20 +5477,20 @@
       </p:sp>
       <p:sp>
         <p:nvSpPr>
-          <p:cNvPr id="28" name="Shape 22"/>
-          <p:cNvSpPr/>
-          <p:nvPr/>
-        </p:nvSpPr>
-        <p:spPr>
-          <a:xfrm>
-            <a:off x="320040" y="3200400"/>
+          <p:cNvPr id="18" name="Shape 14"/>
+          <p:cNvSpPr/>
+          <p:nvPr/>
+        </p:nvSpPr>
+        <p:spPr>
+          <a:xfrm>
+            <a:off x="4617720" y="1691640"/>
             <a:ext cx="1920240" cy="45720"/>
           </a:xfrm>
           <a:prstGeom prst="rect">
             <a:avLst/>
           </a:prstGeom>
           <a:solidFill>
-            <a:srgbClr val="00BCD4"/>
+            <a:srgbClr val="00E676"/>
           </a:solidFill>
           <a:ln w="12700">
             <a:solidFill>
@@ -6073,7 +5502,7 @@
       </p:sp>
       <p:pic>
         <p:nvPicPr>
-          <p:cNvPr id="29" name="Image 4" descr="preencoded.png">    </p:cNvPr>
+          <p:cNvPr id="19" name="Image 2" descr="preencoded.png"/>
           <p:cNvPicPr>
             <a:picLocks noChangeAspect="1"/>
           </p:cNvPicPr>
@@ -6087,7 +5516,7 @@
         </p:blipFill>
         <p:spPr>
           <a:xfrm>
-            <a:off x="429768" y="3337560"/>
+            <a:off x="4727448" y="1828800"/>
             <a:ext cx="320040" cy="320040"/>
           </a:xfrm>
           <a:prstGeom prst="rect">
@@ -6097,13 +5526,13 @@
       </p:pic>
       <p:sp>
         <p:nvSpPr>
-          <p:cNvPr id="30" name="Text 23"/>
-          <p:cNvSpPr/>
-          <p:nvPr/>
-        </p:nvSpPr>
-        <p:spPr>
-          <a:xfrm>
-            <a:off x="822960" y="3310128"/>
+          <p:cNvPr id="20" name="Text 15"/>
+          <p:cNvSpPr/>
+          <p:nvPr/>
+        </p:nvSpPr>
+        <p:spPr>
+          <a:xfrm>
+            <a:off x="5120640" y="1801368"/>
             <a:ext cx="1371600" cy="320040"/>
           </a:xfrm>
           <a:prstGeom prst="rect">
@@ -6116,7 +5545,7 @@
           <a:bodyPr wrap="square" lIns="0" tIns="0" rIns="0" bIns="0" rtlCol="0" anchor="ctr"/>
           <a:lstStyle/>
           <a:p>
-            <a:pPr algn="l" indent="0" marL="0">
+            <a:pPr marL="0" indent="0" algn="l">
               <a:buNone/>
             </a:pPr>
             <a:r>
@@ -6128,7 +5557,7 @@
                 <a:ea typeface="Trebuchet MS" pitchFamily="34" charset="-122"/>
                 <a:cs typeface="Trebuchet MS" pitchFamily="34" charset="-120"/>
               </a:rPr>
-              <a:t>Portfolio Tracker</a:t>
+              <a:t>Market News</a:t>
             </a:r>
             <a:endParaRPr lang="en-US" sz="1200" dirty="0"/>
           </a:p>
@@ -6136,13 +5565,13 @@
       </p:sp>
       <p:sp>
         <p:nvSpPr>
-          <p:cNvPr id="31" name="Text 24"/>
-          <p:cNvSpPr/>
-          <p:nvPr/>
-        </p:nvSpPr>
-        <p:spPr>
-          <a:xfrm>
-            <a:off x="411480" y="3749040"/>
+          <p:cNvPr id="21" name="Text 16"/>
+          <p:cNvSpPr/>
+          <p:nvPr/>
+        </p:nvSpPr>
+        <p:spPr>
+          <a:xfrm>
+            <a:off x="4709160" y="2240280"/>
             <a:ext cx="1737360" cy="640080"/>
           </a:xfrm>
           <a:prstGeom prst="rect">
@@ -6155,7 +5584,7 @@
           <a:bodyPr wrap="square" lIns="0" tIns="0" rIns="0" bIns="0" rtlCol="0" anchor="t"/>
           <a:lstStyle/>
           <a:p>
-            <a:pPr algn="l" indent="0" marL="0">
+            <a:pPr marL="0" indent="0" algn="l">
               <a:buNone/>
             </a:pPr>
             <a:r>
@@ -6167,7 +5596,7 @@
                 <a:ea typeface="Calibri" pitchFamily="34" charset="-122"/>
                 <a:cs typeface="Calibri" pitchFamily="34" charset="-120"/>
               </a:rPr>
-              <a:t>Add stocks, track P&amp;L in real time</a:t>
+              <a:t>Real news from ET, Moneycontrol, BS</a:t>
             </a:r>
             <a:endParaRPr lang="en-US" sz="1000" dirty="0"/>
           </a:p>
@@ -6175,13 +5604,13 @@
       </p:sp>
       <p:sp>
         <p:nvSpPr>
-          <p:cNvPr id="32" name="Shape 25"/>
-          <p:cNvSpPr/>
-          <p:nvPr/>
-        </p:nvSpPr>
-        <p:spPr>
-          <a:xfrm>
-            <a:off x="2468880" y="3200400"/>
+          <p:cNvPr id="22" name="Shape 17"/>
+          <p:cNvSpPr/>
+          <p:nvPr/>
+        </p:nvSpPr>
+        <p:spPr>
+          <a:xfrm>
+            <a:off x="6766560" y="1691640"/>
             <a:ext cx="1920240" cy="1325880"/>
           </a:xfrm>
           <a:prstGeom prst="rect">
@@ -6197,7 +5626,7 @@
             <a:prstDash val="solid"/>
           </a:ln>
           <a:effectLst>
-            <a:outerShdw sx="100000" sy="100000" kx="0" ky="0" algn="bl" rotWithShape="0" blurRad="101600" dist="38100" dir="8100000">
+            <a:outerShdw blurRad="101600" dist="38100" dir="8100000" algn="bl" rotWithShape="0">
               <a:srgbClr val="000000">
                 <a:alpha val="25000"/>
               </a:srgbClr>
@@ -6207,20 +5636,20 @@
       </p:sp>
       <p:sp>
         <p:nvSpPr>
-          <p:cNvPr id="33" name="Shape 26"/>
-          <p:cNvSpPr/>
-          <p:nvPr/>
-        </p:nvSpPr>
-        <p:spPr>
-          <a:xfrm>
-            <a:off x="2468880" y="3200400"/>
+          <p:cNvPr id="23" name="Shape 18"/>
+          <p:cNvSpPr/>
+          <p:nvPr/>
+        </p:nvSpPr>
+        <p:spPr>
+          <a:xfrm>
+            <a:off x="6766560" y="1691640"/>
             <a:ext cx="1920240" cy="45720"/>
           </a:xfrm>
           <a:prstGeom prst="rect">
             <a:avLst/>
           </a:prstGeom>
           <a:solidFill>
-            <a:srgbClr val="00E676"/>
+            <a:srgbClr val="00C853"/>
           </a:solidFill>
           <a:ln w="12700">
             <a:solidFill>
@@ -6232,7 +5661,7 @@
       </p:sp>
       <p:pic>
         <p:nvPicPr>
-          <p:cNvPr id="34" name="Image 5" descr="preencoded.png">    </p:cNvPr>
+          <p:cNvPr id="24" name="Image 3" descr="preencoded.png"/>
           <p:cNvPicPr>
             <a:picLocks noChangeAspect="1"/>
           </p:cNvPicPr>
@@ -6246,7 +5675,7 @@
         </p:blipFill>
         <p:spPr>
           <a:xfrm>
-            <a:off x="2578608" y="3337560"/>
+            <a:off x="6876288" y="1828800"/>
             <a:ext cx="320040" cy="320040"/>
           </a:xfrm>
           <a:prstGeom prst="rect">
@@ -6256,13 +5685,13 @@
       </p:pic>
       <p:sp>
         <p:nvSpPr>
-          <p:cNvPr id="35" name="Text 27"/>
-          <p:cNvSpPr/>
-          <p:nvPr/>
-        </p:nvSpPr>
-        <p:spPr>
-          <a:xfrm>
-            <a:off x="2971800" y="3310128"/>
+          <p:cNvPr id="25" name="Text 19"/>
+          <p:cNvSpPr/>
+          <p:nvPr/>
+        </p:nvSpPr>
+        <p:spPr>
+          <a:xfrm>
+            <a:off x="7269480" y="1801368"/>
             <a:ext cx="1371600" cy="320040"/>
           </a:xfrm>
           <a:prstGeom prst="rect">
@@ -6275,7 +5704,7 @@
           <a:bodyPr wrap="square" lIns="0" tIns="0" rIns="0" bIns="0" rtlCol="0" anchor="ctr"/>
           <a:lstStyle/>
           <a:p>
-            <a:pPr algn="l" indent="0" marL="0">
+            <a:pPr marL="0" indent="0" algn="l">
               <a:buNone/>
             </a:pPr>
             <a:r>
@@ -6287,7 +5716,7 @@
                 <a:ea typeface="Trebuchet MS" pitchFamily="34" charset="-122"/>
                 <a:cs typeface="Trebuchet MS" pitchFamily="34" charset="-120"/>
               </a:rPr>
-              <a:t>Watchlist</a:t>
+              <a:t>Mutual Funds</a:t>
             </a:r>
             <a:endParaRPr lang="en-US" sz="1200" dirty="0"/>
           </a:p>
@@ -6295,13 +5724,13 @@
       </p:sp>
       <p:sp>
         <p:nvSpPr>
-          <p:cNvPr id="36" name="Text 28"/>
-          <p:cNvSpPr/>
-          <p:nvPr/>
-        </p:nvSpPr>
-        <p:spPr>
-          <a:xfrm>
-            <a:off x="2560320" y="3749040"/>
+          <p:cNvPr id="26" name="Text 20"/>
+          <p:cNvSpPr/>
+          <p:nvPr/>
+        </p:nvSpPr>
+        <p:spPr>
+          <a:xfrm>
+            <a:off x="6858000" y="2240280"/>
             <a:ext cx="1737360" cy="640080"/>
           </a:xfrm>
           <a:prstGeom prst="rect">
@@ -6314,7 +5743,7 @@
           <a:bodyPr wrap="square" lIns="0" tIns="0" rIns="0" bIns="0" rtlCol="0" anchor="t"/>
           <a:lstStyle/>
           <a:p>
-            <a:pPr algn="l" indent="0" marL="0">
+            <a:pPr marL="0" indent="0" algn="l">
               <a:buNone/>
             </a:pPr>
             <a:r>
@@ -6326,7 +5755,7 @@
                 <a:ea typeface="Calibri" pitchFamily="34" charset="-122"/>
                 <a:cs typeface="Calibri" pitchFamily="34" charset="-120"/>
               </a:rPr>
-              <a:t>Personalised list saved to cloud DB</a:t>
+              <a:t>Live NAV from AMFI India</a:t>
             </a:r>
             <a:endParaRPr lang="en-US" sz="1000" dirty="0"/>
           </a:p>
@@ -6334,13 +5763,13 @@
       </p:sp>
       <p:sp>
         <p:nvSpPr>
-          <p:cNvPr id="37" name="Shape 29"/>
-          <p:cNvSpPr/>
-          <p:nvPr/>
-        </p:nvSpPr>
-        <p:spPr>
-          <a:xfrm>
-            <a:off x="4617720" y="3200400"/>
+          <p:cNvPr id="27" name="Shape 21"/>
+          <p:cNvSpPr/>
+          <p:nvPr/>
+        </p:nvSpPr>
+        <p:spPr>
+          <a:xfrm>
+            <a:off x="320040" y="3200400"/>
             <a:ext cx="1920240" cy="1325880"/>
           </a:xfrm>
           <a:prstGeom prst="rect">
@@ -6356,7 +5785,7 @@
             <a:prstDash val="solid"/>
           </a:ln>
           <a:effectLst>
-            <a:outerShdw sx="100000" sy="100000" kx="0" ky="0" algn="bl" rotWithShape="0" blurRad="101600" dist="38100" dir="8100000">
+            <a:outerShdw blurRad="101600" dist="38100" dir="8100000" algn="bl" rotWithShape="0">
               <a:srgbClr val="000000">
                 <a:alpha val="25000"/>
               </a:srgbClr>
@@ -6366,20 +5795,20 @@
       </p:sp>
       <p:sp>
         <p:nvSpPr>
-          <p:cNvPr id="38" name="Shape 30"/>
-          <p:cNvSpPr/>
-          <p:nvPr/>
-        </p:nvSpPr>
-        <p:spPr>
-          <a:xfrm>
-            <a:off x="4617720" y="3200400"/>
+          <p:cNvPr id="28" name="Shape 22"/>
+          <p:cNvSpPr/>
+          <p:nvPr/>
+        </p:nvSpPr>
+        <p:spPr>
+          <a:xfrm>
+            <a:off x="320040" y="3200400"/>
             <a:ext cx="1920240" cy="45720"/>
           </a:xfrm>
           <a:prstGeom prst="rect">
             <a:avLst/>
           </a:prstGeom>
           <a:solidFill>
-            <a:srgbClr val="00C853"/>
+            <a:srgbClr val="00BCD4"/>
           </a:solidFill>
           <a:ln w="12700">
             <a:solidFill>
@@ -6391,7 +5820,7 @@
       </p:sp>
       <p:pic>
         <p:nvPicPr>
-          <p:cNvPr id="39" name="Image 6" descr="preencoded.png">    </p:cNvPr>
+          <p:cNvPr id="29" name="Image 4" descr="preencoded.png"/>
           <p:cNvPicPr>
             <a:picLocks noChangeAspect="1"/>
           </p:cNvPicPr>
@@ -6405,7 +5834,7 @@
         </p:blipFill>
         <p:spPr>
           <a:xfrm>
-            <a:off x="4727448" y="3337560"/>
+            <a:off x="429768" y="3337560"/>
             <a:ext cx="320040" cy="320040"/>
           </a:xfrm>
           <a:prstGeom prst="rect">
@@ -6415,13 +5844,13 @@
       </p:pic>
       <p:sp>
         <p:nvSpPr>
-          <p:cNvPr id="40" name="Text 31"/>
-          <p:cNvSpPr/>
-          <p:nvPr/>
-        </p:nvSpPr>
-        <p:spPr>
-          <a:xfrm>
-            <a:off x="5120640" y="3310128"/>
+          <p:cNvPr id="30" name="Text 23"/>
+          <p:cNvSpPr/>
+          <p:nvPr/>
+        </p:nvSpPr>
+        <p:spPr>
+          <a:xfrm>
+            <a:off x="822960" y="3310128"/>
             <a:ext cx="1371600" cy="320040"/>
           </a:xfrm>
           <a:prstGeom prst="rect">
@@ -6434,7 +5863,7 @@
           <a:bodyPr wrap="square" lIns="0" tIns="0" rIns="0" bIns="0" rtlCol="0" anchor="ctr"/>
           <a:lstStyle/>
           <a:p>
-            <a:pPr algn="l" indent="0" marL="0">
+            <a:pPr marL="0" indent="0" algn="l">
               <a:buNone/>
             </a:pPr>
             <a:r>
@@ -6446,7 +5875,7 @@
                 <a:ea typeface="Trebuchet MS" pitchFamily="34" charset="-122"/>
                 <a:cs typeface="Trebuchet MS" pitchFamily="34" charset="-120"/>
               </a:rPr>
-              <a:t>7 Calculators</a:t>
+              <a:t>Portfolio Tracker</a:t>
             </a:r>
             <a:endParaRPr lang="en-US" sz="1200" dirty="0"/>
           </a:p>
@@ -6454,13 +5883,13 @@
       </p:sp>
       <p:sp>
         <p:nvSpPr>
-          <p:cNvPr id="41" name="Text 32"/>
-          <p:cNvSpPr/>
-          <p:nvPr/>
-        </p:nvSpPr>
-        <p:spPr>
-          <a:xfrm>
-            <a:off x="4709160" y="3749040"/>
+          <p:cNvPr id="31" name="Text 24"/>
+          <p:cNvSpPr/>
+          <p:nvPr/>
+        </p:nvSpPr>
+        <p:spPr>
+          <a:xfrm>
+            <a:off x="411480" y="3749040"/>
             <a:ext cx="1737360" cy="640080"/>
           </a:xfrm>
           <a:prstGeom prst="rect">
@@ -6473,7 +5902,7 @@
           <a:bodyPr wrap="square" lIns="0" tIns="0" rIns="0" bIns="0" rtlCol="0" anchor="t"/>
           <a:lstStyle/>
           <a:p>
-            <a:pPr algn="l" indent="0" marL="0">
+            <a:pPr marL="0" indent="0" algn="l">
               <a:buNone/>
             </a:pPr>
             <a:r>
@@ -6485,7 +5914,7 @@
                 <a:ea typeface="Calibri" pitchFamily="34" charset="-122"/>
                 <a:cs typeface="Calibri" pitchFamily="34" charset="-120"/>
               </a:rPr>
-              <a:t>SIP, Brokerage, EMI, Position Size...</a:t>
+              <a:t>Add stocks, track P&amp;L in real time</a:t>
             </a:r>
             <a:endParaRPr lang="en-US" sz="1000" dirty="0"/>
           </a:p>
@@ -6493,13 +5922,13 @@
       </p:sp>
       <p:sp>
         <p:nvSpPr>
-          <p:cNvPr id="42" name="Shape 33"/>
-          <p:cNvSpPr/>
-          <p:nvPr/>
-        </p:nvSpPr>
-        <p:spPr>
-          <a:xfrm>
-            <a:off x="6766560" y="3200400"/>
+          <p:cNvPr id="32" name="Shape 25"/>
+          <p:cNvSpPr/>
+          <p:nvPr/>
+        </p:nvSpPr>
+        <p:spPr>
+          <a:xfrm>
+            <a:off x="2468880" y="3200400"/>
             <a:ext cx="1920240" cy="1325880"/>
           </a:xfrm>
           <a:prstGeom prst="rect">
@@ -6515,7 +5944,7 @@
             <a:prstDash val="solid"/>
           </a:ln>
           <a:effectLst>
-            <a:outerShdw sx="100000" sy="100000" kx="0" ky="0" algn="bl" rotWithShape="0" blurRad="101600" dist="38100" dir="8100000">
+            <a:outerShdw blurRad="101600" dist="38100" dir="8100000" algn="bl" rotWithShape="0">
               <a:srgbClr val="000000">
                 <a:alpha val="25000"/>
               </a:srgbClr>
@@ -6525,20 +5954,20 @@
       </p:sp>
       <p:sp>
         <p:nvSpPr>
-          <p:cNvPr id="43" name="Shape 34"/>
-          <p:cNvSpPr/>
-          <p:nvPr/>
-        </p:nvSpPr>
-        <p:spPr>
-          <a:xfrm>
-            <a:off x="6766560" y="3200400"/>
+          <p:cNvPr id="33" name="Shape 26"/>
+          <p:cNvSpPr/>
+          <p:nvPr/>
+        </p:nvSpPr>
+        <p:spPr>
+          <a:xfrm>
+            <a:off x="2468880" y="3200400"/>
             <a:ext cx="1920240" cy="45720"/>
           </a:xfrm>
           <a:prstGeom prst="rect">
             <a:avLst/>
           </a:prstGeom>
           <a:solidFill>
-            <a:srgbClr val="00BCD4"/>
+            <a:srgbClr val="00E676"/>
           </a:solidFill>
           <a:ln w="12700">
             <a:solidFill>
@@ -6550,7 +5979,7 @@
       </p:sp>
       <p:pic>
         <p:nvPicPr>
-          <p:cNvPr id="44" name="Image 7" descr="preencoded.png">    </p:cNvPr>
+          <p:cNvPr id="34" name="Image 5" descr="preencoded.png"/>
           <p:cNvPicPr>
             <a:picLocks noChangeAspect="1"/>
           </p:cNvPicPr>
@@ -6564,7 +5993,7 @@
         </p:blipFill>
         <p:spPr>
           <a:xfrm>
-            <a:off x="6876288" y="3337560"/>
+            <a:off x="2578608" y="3337560"/>
             <a:ext cx="320040" cy="320040"/>
           </a:xfrm>
           <a:prstGeom prst="rect">
@@ -6574,13 +6003,13 @@
       </p:pic>
       <p:sp>
         <p:nvSpPr>
-          <p:cNvPr id="45" name="Text 35"/>
-          <p:cNvSpPr/>
-          <p:nvPr/>
-        </p:nvSpPr>
-        <p:spPr>
-          <a:xfrm>
-            <a:off x="7269480" y="3310128"/>
+          <p:cNvPr id="35" name="Text 27"/>
+          <p:cNvSpPr/>
+          <p:nvPr/>
+        </p:nvSpPr>
+        <p:spPr>
+          <a:xfrm>
+            <a:off x="2971800" y="3310128"/>
             <a:ext cx="1371600" cy="320040"/>
           </a:xfrm>
           <a:prstGeom prst="rect">
@@ -6593,7 +6022,7 @@
           <a:bodyPr wrap="square" lIns="0" tIns="0" rIns="0" bIns="0" rtlCol="0" anchor="ctr"/>
           <a:lstStyle/>
           <a:p>
-            <a:pPr algn="l" indent="0" marL="0">
+            <a:pPr marL="0" indent="0" algn="l">
               <a:buNone/>
             </a:pPr>
             <a:r>
@@ -6605,7 +6034,7 @@
                 <a:ea typeface="Trebuchet MS" pitchFamily="34" charset="-122"/>
                 <a:cs typeface="Trebuchet MS" pitchFamily="34" charset="-120"/>
               </a:rPr>
-              <a:t>Authentication</a:t>
+              <a:t>Watchlist</a:t>
             </a:r>
             <a:endParaRPr lang="en-US" sz="1200" dirty="0"/>
           </a:p>
@@ -6613,13 +6042,13 @@
       </p:sp>
       <p:sp>
         <p:nvSpPr>
-          <p:cNvPr id="46" name="Text 36"/>
-          <p:cNvSpPr/>
-          <p:nvPr/>
-        </p:nvSpPr>
-        <p:spPr>
-          <a:xfrm>
-            <a:off x="6858000" y="3749040"/>
+          <p:cNvPr id="36" name="Text 28"/>
+          <p:cNvSpPr/>
+          <p:nvPr/>
+        </p:nvSpPr>
+        <p:spPr>
+          <a:xfrm>
+            <a:off x="2560320" y="3749040"/>
             <a:ext cx="1737360" cy="640080"/>
           </a:xfrm>
           <a:prstGeom prst="rect">
@@ -6632,7 +6061,7 @@
           <a:bodyPr wrap="square" lIns="0" tIns="0" rIns="0" bIns="0" rtlCol="0" anchor="t"/>
           <a:lstStyle/>
           <a:p>
-            <a:pPr algn="l" indent="0" marL="0">
+            <a:pPr marL="0" indent="0" algn="l">
               <a:buNone/>
             </a:pPr>
             <a:r>
@@ -6644,6 +6073,324 @@
                 <a:ea typeface="Calibri" pitchFamily="34" charset="-122"/>
                 <a:cs typeface="Calibri" pitchFamily="34" charset="-120"/>
               </a:rPr>
+              <a:t>Personalised list saved to cloud DB</a:t>
+            </a:r>
+            <a:endParaRPr lang="en-US" sz="1000" dirty="0"/>
+          </a:p>
+        </p:txBody>
+      </p:sp>
+      <p:sp>
+        <p:nvSpPr>
+          <p:cNvPr id="37" name="Shape 29"/>
+          <p:cNvSpPr/>
+          <p:nvPr/>
+        </p:nvSpPr>
+        <p:spPr>
+          <a:xfrm>
+            <a:off x="4617720" y="3200400"/>
+            <a:ext cx="1920240" cy="1325880"/>
+          </a:xfrm>
+          <a:prstGeom prst="rect">
+            <a:avLst/>
+          </a:prstGeom>
+          <a:solidFill>
+            <a:srgbClr val="0D1626"/>
+          </a:solidFill>
+          <a:ln w="12700">
+            <a:solidFill>
+              <a:srgbClr val="1F2937"/>
+            </a:solidFill>
+            <a:prstDash val="solid"/>
+          </a:ln>
+          <a:effectLst>
+            <a:outerShdw blurRad="101600" dist="38100" dir="8100000" algn="bl" rotWithShape="0">
+              <a:srgbClr val="000000">
+                <a:alpha val="25000"/>
+              </a:srgbClr>
+            </a:outerShdw>
+          </a:effectLst>
+        </p:spPr>
+      </p:sp>
+      <p:sp>
+        <p:nvSpPr>
+          <p:cNvPr id="38" name="Shape 30"/>
+          <p:cNvSpPr/>
+          <p:nvPr/>
+        </p:nvSpPr>
+        <p:spPr>
+          <a:xfrm>
+            <a:off x="4617720" y="3200400"/>
+            <a:ext cx="1920240" cy="45720"/>
+          </a:xfrm>
+          <a:prstGeom prst="rect">
+            <a:avLst/>
+          </a:prstGeom>
+          <a:solidFill>
+            <a:srgbClr val="00C853"/>
+          </a:solidFill>
+          <a:ln w="12700">
+            <a:solidFill>
+              <a:srgbClr val="333333"/>
+            </a:solidFill>
+            <a:prstDash val="solid"/>
+          </a:ln>
+        </p:spPr>
+      </p:sp>
+      <p:pic>
+        <p:nvPicPr>
+          <p:cNvPr id="39" name="Image 6" descr="preencoded.png"/>
+          <p:cNvPicPr>
+            <a:picLocks noChangeAspect="1"/>
+          </p:cNvPicPr>
+          <p:nvPr/>
+        </p:nvPicPr>
+        <p:blipFill>
+          <a:blip r:embed="rId9"/>
+          <a:stretch>
+            <a:fillRect/>
+          </a:stretch>
+        </p:blipFill>
+        <p:spPr>
+          <a:xfrm>
+            <a:off x="4727448" y="3337560"/>
+            <a:ext cx="320040" cy="320040"/>
+          </a:xfrm>
+          <a:prstGeom prst="rect">
+            <a:avLst/>
+          </a:prstGeom>
+        </p:spPr>
+      </p:pic>
+      <p:sp>
+        <p:nvSpPr>
+          <p:cNvPr id="40" name="Text 31"/>
+          <p:cNvSpPr/>
+          <p:nvPr/>
+        </p:nvSpPr>
+        <p:spPr>
+          <a:xfrm>
+            <a:off x="5120640" y="3310128"/>
+            <a:ext cx="1371600" cy="320040"/>
+          </a:xfrm>
+          <a:prstGeom prst="rect">
+            <a:avLst/>
+          </a:prstGeom>
+          <a:noFill/>
+          <a:ln/>
+        </p:spPr>
+        <p:txBody>
+          <a:bodyPr wrap="square" lIns="0" tIns="0" rIns="0" bIns="0" rtlCol="0" anchor="ctr"/>
+          <a:lstStyle/>
+          <a:p>
+            <a:pPr marL="0" indent="0" algn="l">
+              <a:buNone/>
+            </a:pPr>
+            <a:r>
+              <a:rPr lang="en-US" sz="1200" b="1" dirty="0">
+                <a:solidFill>
+                  <a:srgbClr val="FFFFFF"/>
+                </a:solidFill>
+                <a:latin typeface="Trebuchet MS" pitchFamily="34" charset="0"/>
+                <a:ea typeface="Trebuchet MS" pitchFamily="34" charset="-122"/>
+                <a:cs typeface="Trebuchet MS" pitchFamily="34" charset="-120"/>
+              </a:rPr>
+              <a:t>7 Calculators</a:t>
+            </a:r>
+            <a:endParaRPr lang="en-US" sz="1200" dirty="0"/>
+          </a:p>
+        </p:txBody>
+      </p:sp>
+      <p:sp>
+        <p:nvSpPr>
+          <p:cNvPr id="41" name="Text 32"/>
+          <p:cNvSpPr/>
+          <p:nvPr/>
+        </p:nvSpPr>
+        <p:spPr>
+          <a:xfrm>
+            <a:off x="4709160" y="3749040"/>
+            <a:ext cx="1737360" cy="640080"/>
+          </a:xfrm>
+          <a:prstGeom prst="rect">
+            <a:avLst/>
+          </a:prstGeom>
+          <a:noFill/>
+          <a:ln/>
+        </p:spPr>
+        <p:txBody>
+          <a:bodyPr wrap="square" lIns="0" tIns="0" rIns="0" bIns="0" rtlCol="0" anchor="t"/>
+          <a:lstStyle/>
+          <a:p>
+            <a:pPr marL="0" indent="0" algn="l">
+              <a:buNone/>
+            </a:pPr>
+            <a:r>
+              <a:rPr lang="en-US" sz="1000" dirty="0">
+                <a:solidFill>
+                  <a:srgbClr val="9CA3AF"/>
+                </a:solidFill>
+                <a:latin typeface="Calibri" pitchFamily="34" charset="0"/>
+                <a:ea typeface="Calibri" pitchFamily="34" charset="-122"/>
+                <a:cs typeface="Calibri" pitchFamily="34" charset="-120"/>
+              </a:rPr>
+              <a:t>SIP, Brokerage, EMI, Position Size...</a:t>
+            </a:r>
+            <a:endParaRPr lang="en-US" sz="1000" dirty="0"/>
+          </a:p>
+        </p:txBody>
+      </p:sp>
+      <p:sp>
+        <p:nvSpPr>
+          <p:cNvPr id="42" name="Shape 33"/>
+          <p:cNvSpPr/>
+          <p:nvPr/>
+        </p:nvSpPr>
+        <p:spPr>
+          <a:xfrm>
+            <a:off x="6766560" y="3200400"/>
+            <a:ext cx="1920240" cy="1325880"/>
+          </a:xfrm>
+          <a:prstGeom prst="rect">
+            <a:avLst/>
+          </a:prstGeom>
+          <a:solidFill>
+            <a:srgbClr val="0D1626"/>
+          </a:solidFill>
+          <a:ln w="12700">
+            <a:solidFill>
+              <a:srgbClr val="1F2937"/>
+            </a:solidFill>
+            <a:prstDash val="solid"/>
+          </a:ln>
+          <a:effectLst>
+            <a:outerShdw blurRad="101600" dist="38100" dir="8100000" algn="bl" rotWithShape="0">
+              <a:srgbClr val="000000">
+                <a:alpha val="25000"/>
+              </a:srgbClr>
+            </a:outerShdw>
+          </a:effectLst>
+        </p:spPr>
+      </p:sp>
+      <p:sp>
+        <p:nvSpPr>
+          <p:cNvPr id="43" name="Shape 34"/>
+          <p:cNvSpPr/>
+          <p:nvPr/>
+        </p:nvSpPr>
+        <p:spPr>
+          <a:xfrm>
+            <a:off x="6766560" y="3200400"/>
+            <a:ext cx="1920240" cy="45720"/>
+          </a:xfrm>
+          <a:prstGeom prst="rect">
+            <a:avLst/>
+          </a:prstGeom>
+          <a:solidFill>
+            <a:srgbClr val="00BCD4"/>
+          </a:solidFill>
+          <a:ln w="12700">
+            <a:solidFill>
+              <a:srgbClr val="333333"/>
+            </a:solidFill>
+            <a:prstDash val="solid"/>
+          </a:ln>
+        </p:spPr>
+      </p:sp>
+      <p:pic>
+        <p:nvPicPr>
+          <p:cNvPr id="44" name="Image 7" descr="preencoded.png"/>
+          <p:cNvPicPr>
+            <a:picLocks noChangeAspect="1"/>
+          </p:cNvPicPr>
+          <p:nvPr/>
+        </p:nvPicPr>
+        <p:blipFill>
+          <a:blip r:embed="rId10"/>
+          <a:stretch>
+            <a:fillRect/>
+          </a:stretch>
+        </p:blipFill>
+        <p:spPr>
+          <a:xfrm>
+            <a:off x="6876288" y="3337560"/>
+            <a:ext cx="320040" cy="320040"/>
+          </a:xfrm>
+          <a:prstGeom prst="rect">
+            <a:avLst/>
+          </a:prstGeom>
+        </p:spPr>
+      </p:pic>
+      <p:sp>
+        <p:nvSpPr>
+          <p:cNvPr id="45" name="Text 35"/>
+          <p:cNvSpPr/>
+          <p:nvPr/>
+        </p:nvSpPr>
+        <p:spPr>
+          <a:xfrm>
+            <a:off x="7269480" y="3310128"/>
+            <a:ext cx="1371600" cy="320040"/>
+          </a:xfrm>
+          <a:prstGeom prst="rect">
+            <a:avLst/>
+          </a:prstGeom>
+          <a:noFill/>
+          <a:ln/>
+        </p:spPr>
+        <p:txBody>
+          <a:bodyPr wrap="square" lIns="0" tIns="0" rIns="0" bIns="0" rtlCol="0" anchor="ctr"/>
+          <a:lstStyle/>
+          <a:p>
+            <a:pPr marL="0" indent="0" algn="l">
+              <a:buNone/>
+            </a:pPr>
+            <a:r>
+              <a:rPr lang="en-US" sz="1200" b="1" dirty="0">
+                <a:solidFill>
+                  <a:srgbClr val="FFFFFF"/>
+                </a:solidFill>
+                <a:latin typeface="Trebuchet MS" pitchFamily="34" charset="0"/>
+                <a:ea typeface="Trebuchet MS" pitchFamily="34" charset="-122"/>
+                <a:cs typeface="Trebuchet MS" pitchFamily="34" charset="-120"/>
+              </a:rPr>
+              <a:t>Authentication</a:t>
+            </a:r>
+            <a:endParaRPr lang="en-US" sz="1200" dirty="0"/>
+          </a:p>
+        </p:txBody>
+      </p:sp>
+      <p:sp>
+        <p:nvSpPr>
+          <p:cNvPr id="46" name="Text 36"/>
+          <p:cNvSpPr/>
+          <p:nvPr/>
+        </p:nvSpPr>
+        <p:spPr>
+          <a:xfrm>
+            <a:off x="6858000" y="3749040"/>
+            <a:ext cx="1737360" cy="640080"/>
+          </a:xfrm>
+          <a:prstGeom prst="rect">
+            <a:avLst/>
+          </a:prstGeom>
+          <a:noFill/>
+          <a:ln/>
+        </p:spPr>
+        <p:txBody>
+          <a:bodyPr wrap="square" lIns="0" tIns="0" rIns="0" bIns="0" rtlCol="0" anchor="t"/>
+          <a:lstStyle/>
+          <a:p>
+            <a:pPr marL="0" indent="0" algn="l">
+              <a:buNone/>
+            </a:pPr>
+            <a:r>
+              <a:rPr lang="en-US" sz="1000" dirty="0">
+                <a:solidFill>
+                  <a:srgbClr val="9CA3AF"/>
+                </a:solidFill>
+                <a:latin typeface="Calibri" pitchFamily="34" charset="0"/>
+                <a:ea typeface="Calibri" pitchFamily="34" charset="-122"/>
+                <a:cs typeface="Calibri" pitchFamily="34" charset="-120"/>
+              </a:rPr>
               <a:t>JWT + Bcrypt secure login</a:t>
             </a:r>
             <a:endParaRPr lang="en-US" sz="1000" dirty="0"/>
@@ -6671,7 +6418,7 @@
           <a:bodyPr wrap="square" lIns="0" tIns="0" rIns="0" bIns="0" rtlCol="0" anchor="t"/>
           <a:lstStyle/>
           <a:p>
-            <a:pPr algn="r" indent="0" marL="0">
+            <a:pPr marL="0" indent="0" algn="r">
               <a:buNone/>
             </a:pPr>
             <a:r>
@@ -6705,6 +6452,7 @@
         <a:solidFill>
           <a:srgbClr val="0A0E1A"/>
         </a:solidFill>
+        <a:effectLst/>
       </p:bgPr>
     </p:bg>
     <p:spTree>
@@ -6794,7 +6542,7 @@
           <a:bodyPr wrap="square" lIns="0" tIns="0" rIns="0" bIns="0" rtlCol="0" anchor="ctr"/>
           <a:lstStyle/>
           <a:p>
-            <a:pPr algn="ctr" indent="0" marL="0">
+            <a:pPr marL="0" indent="0" algn="ctr">
               <a:buNone/>
             </a:pPr>
             <a:r>
@@ -6833,7 +6581,7 @@
           <a:bodyPr wrap="square" lIns="0" tIns="0" rIns="0" bIns="0" rtlCol="0" anchor="ctr"/>
           <a:lstStyle/>
           <a:p>
-            <a:pPr algn="l" indent="0" marL="0">
+            <a:pPr marL="0" indent="0" algn="l">
               <a:buNone/>
             </a:pPr>
             <a:r>
@@ -6875,7 +6623,7 @@
             <a:prstDash val="solid"/>
           </a:ln>
           <a:effectLst>
-            <a:outerShdw sx="100000" sy="100000" kx="0" ky="0" algn="bl" rotWithShape="0" blurRad="101600" dist="38100" dir="8100000">
+            <a:outerShdw blurRad="101600" dist="38100" dir="8100000" algn="bl" rotWithShape="0">
               <a:srgbClr val="000000">
                 <a:alpha val="25000"/>
               </a:srgbClr>
@@ -6931,11 +6679,11 @@
           <a:bodyPr wrap="square" lIns="0" tIns="0" rIns="0" bIns="0" rtlCol="0" anchor="ctr"/>
           <a:lstStyle/>
           <a:p>
-            <a:pPr algn="ctr" indent="0" marL="0">
-              <a:buNone/>
-            </a:pPr>
-            <a:r>
-              <a:rPr lang="en-US" sz="1000" b="1" spc="200" kern="0" dirty="0">
+            <a:pPr marL="0" indent="0" algn="ctr">
+              <a:buNone/>
+            </a:pPr>
+            <a:r>
+              <a:rPr lang="en-US" sz="1000" b="1" kern="0" spc="200" dirty="0">
                 <a:solidFill>
                   <a:srgbClr val="00C853"/>
                 </a:solidFill>
@@ -6995,7 +6743,7 @@
           <a:bodyPr wrap="square" lIns="0" tIns="0" rIns="0" bIns="0" rtlCol="0" anchor="ctr"/>
           <a:lstStyle/>
           <a:p>
-            <a:pPr indent="0" marL="0">
+            <a:pPr marL="0" indent="0">
               <a:buNone/>
             </a:pPr>
             <a:r>
@@ -7059,7 +6807,7 @@
           <a:bodyPr wrap="square" lIns="0" tIns="0" rIns="0" bIns="0" rtlCol="0" anchor="ctr"/>
           <a:lstStyle/>
           <a:p>
-            <a:pPr indent="0" marL="0">
+            <a:pPr marL="0" indent="0">
               <a:buNone/>
             </a:pPr>
             <a:r>
@@ -7123,7 +6871,7 @@
           <a:bodyPr wrap="square" lIns="0" tIns="0" rIns="0" bIns="0" rtlCol="0" anchor="ctr"/>
           <a:lstStyle/>
           <a:p>
-            <a:pPr indent="0" marL="0">
+            <a:pPr marL="0" indent="0">
               <a:buNone/>
             </a:pPr>
             <a:r>
@@ -7187,7 +6935,7 @@
           <a:bodyPr wrap="square" lIns="0" tIns="0" rIns="0" bIns="0" rtlCol="0" anchor="ctr"/>
           <a:lstStyle/>
           <a:p>
-            <a:pPr indent="0" marL="0">
+            <a:pPr marL="0" indent="0">
               <a:buNone/>
             </a:pPr>
             <a:r>
@@ -7251,7 +6999,7 @@
           <a:bodyPr wrap="square" lIns="0" tIns="0" rIns="0" bIns="0" rtlCol="0" anchor="ctr"/>
           <a:lstStyle/>
           <a:p>
-            <a:pPr indent="0" marL="0">
+            <a:pPr marL="0" indent="0">
               <a:buNone/>
             </a:pPr>
             <a:r>
@@ -7315,7 +7063,7 @@
           <a:bodyPr wrap="square" lIns="0" tIns="0" rIns="0" bIns="0" rtlCol="0" anchor="ctr"/>
           <a:lstStyle/>
           <a:p>
-            <a:pPr indent="0" marL="0">
+            <a:pPr marL="0" indent="0">
               <a:buNone/>
             </a:pPr>
             <a:r>
@@ -7357,7 +7105,7 @@
             <a:prstDash val="solid"/>
           </a:ln>
           <a:effectLst>
-            <a:outerShdw sx="100000" sy="100000" kx="0" ky="0" algn="bl" rotWithShape="0" blurRad="101600" dist="38100" dir="8100000">
+            <a:outerShdw blurRad="101600" dist="38100" dir="8100000" algn="bl" rotWithShape="0">
               <a:srgbClr val="000000">
                 <a:alpha val="25000"/>
               </a:srgbClr>
@@ -7413,11 +7161,11 @@
           <a:bodyPr wrap="square" lIns="0" tIns="0" rIns="0" bIns="0" rtlCol="0" anchor="ctr"/>
           <a:lstStyle/>
           <a:p>
-            <a:pPr algn="ctr" indent="0" marL="0">
-              <a:buNone/>
-            </a:pPr>
-            <a:r>
-              <a:rPr lang="en-US" sz="1000" b="1" spc="200" kern="0" dirty="0">
+            <a:pPr marL="0" indent="0" algn="ctr">
+              <a:buNone/>
+            </a:pPr>
+            <a:r>
+              <a:rPr lang="en-US" sz="1000" b="1" kern="0" spc="200" dirty="0">
                 <a:solidFill>
                   <a:srgbClr val="00BCD4"/>
                 </a:solidFill>
@@ -7477,7 +7225,7 @@
           <a:bodyPr wrap="square" lIns="0" tIns="0" rIns="0" bIns="0" rtlCol="0" anchor="ctr"/>
           <a:lstStyle/>
           <a:p>
-            <a:pPr indent="0" marL="0">
+            <a:pPr marL="0" indent="0">
               <a:buNone/>
             </a:pPr>
             <a:r>
@@ -7541,7 +7289,7 @@
           <a:bodyPr wrap="square" lIns="0" tIns="0" rIns="0" bIns="0" rtlCol="0" anchor="ctr"/>
           <a:lstStyle/>
           <a:p>
-            <a:pPr indent="0" marL="0">
+            <a:pPr marL="0" indent="0">
               <a:buNone/>
             </a:pPr>
             <a:r>
@@ -7605,7 +7353,7 @@
           <a:bodyPr wrap="square" lIns="0" tIns="0" rIns="0" bIns="0" rtlCol="0" anchor="ctr"/>
           <a:lstStyle/>
           <a:p>
-            <a:pPr indent="0" marL="0">
+            <a:pPr marL="0" indent="0">
               <a:buNone/>
             </a:pPr>
             <a:r>
@@ -7669,7 +7417,7 @@
           <a:bodyPr wrap="square" lIns="0" tIns="0" rIns="0" bIns="0" rtlCol="0" anchor="ctr"/>
           <a:lstStyle/>
           <a:p>
-            <a:pPr indent="0" marL="0">
+            <a:pPr marL="0" indent="0">
               <a:buNone/>
             </a:pPr>
             <a:r>
@@ -7733,7 +7481,7 @@
           <a:bodyPr wrap="square" lIns="0" tIns="0" rIns="0" bIns="0" rtlCol="0" anchor="ctr"/>
           <a:lstStyle/>
           <a:p>
-            <a:pPr indent="0" marL="0">
+            <a:pPr marL="0" indent="0">
               <a:buNone/>
             </a:pPr>
             <a:r>
@@ -7797,7 +7545,7 @@
           <a:bodyPr wrap="square" lIns="0" tIns="0" rIns="0" bIns="0" rtlCol="0" anchor="ctr"/>
           <a:lstStyle/>
           <a:p>
-            <a:pPr indent="0" marL="0">
+            <a:pPr marL="0" indent="0">
               <a:buNone/>
             </a:pPr>
             <a:r>
@@ -7839,7 +7587,7 @@
             <a:prstDash val="solid"/>
           </a:ln>
           <a:effectLst>
-            <a:outerShdw sx="100000" sy="100000" kx="0" ky="0" algn="bl" rotWithShape="0" blurRad="101600" dist="38100" dir="8100000">
+            <a:outerShdw blurRad="101600" dist="38100" dir="8100000" algn="bl" rotWithShape="0">
               <a:srgbClr val="000000">
                 <a:alpha val="25000"/>
               </a:srgbClr>
@@ -7895,11 +7643,11 @@
           <a:bodyPr wrap="square" lIns="0" tIns="0" rIns="0" bIns="0" rtlCol="0" anchor="ctr"/>
           <a:lstStyle/>
           <a:p>
-            <a:pPr algn="ctr" indent="0" marL="0">
-              <a:buNone/>
-            </a:pPr>
-            <a:r>
-              <a:rPr lang="en-US" sz="1000" b="1" spc="200" kern="0" dirty="0">
+            <a:pPr marL="0" indent="0" algn="ctr">
+              <a:buNone/>
+            </a:pPr>
+            <a:r>
+              <a:rPr lang="en-US" sz="1000" b="1" kern="0" spc="200" dirty="0">
                 <a:solidFill>
                   <a:srgbClr val="00E676"/>
                 </a:solidFill>
@@ -7959,7 +7707,7 @@
           <a:bodyPr wrap="square" lIns="0" tIns="0" rIns="0" bIns="0" rtlCol="0" anchor="ctr"/>
           <a:lstStyle/>
           <a:p>
-            <a:pPr indent="0" marL="0">
+            <a:pPr marL="0" indent="0">
               <a:buNone/>
             </a:pPr>
             <a:r>
@@ -8023,7 +7771,7 @@
           <a:bodyPr wrap="square" lIns="0" tIns="0" rIns="0" bIns="0" rtlCol="0" anchor="ctr"/>
           <a:lstStyle/>
           <a:p>
-            <a:pPr indent="0" marL="0">
+            <a:pPr marL="0" indent="0">
               <a:buNone/>
             </a:pPr>
             <a:r>
@@ -8087,7 +7835,7 @@
           <a:bodyPr wrap="square" lIns="0" tIns="0" rIns="0" bIns="0" rtlCol="0" anchor="ctr"/>
           <a:lstStyle/>
           <a:p>
-            <a:pPr indent="0" marL="0">
+            <a:pPr marL="0" indent="0">
               <a:buNone/>
             </a:pPr>
             <a:r>
@@ -8151,7 +7899,7 @@
           <a:bodyPr wrap="square" lIns="0" tIns="0" rIns="0" bIns="0" rtlCol="0" anchor="ctr"/>
           <a:lstStyle/>
           <a:p>
-            <a:pPr indent="0" marL="0">
+            <a:pPr marL="0" indent="0">
               <a:buNone/>
             </a:pPr>
             <a:r>
@@ -8215,7 +7963,7 @@
           <a:bodyPr wrap="square" lIns="0" tIns="0" rIns="0" bIns="0" rtlCol="0" anchor="ctr"/>
           <a:lstStyle/>
           <a:p>
-            <a:pPr indent="0" marL="0">
+            <a:pPr marL="0" indent="0">
               <a:buNone/>
             </a:pPr>
             <a:r>
@@ -8279,7 +8027,7 @@
           <a:bodyPr wrap="square" lIns="0" tIns="0" rIns="0" bIns="0" rtlCol="0" anchor="ctr"/>
           <a:lstStyle/>
           <a:p>
-            <a:pPr indent="0" marL="0">
+            <a:pPr marL="0" indent="0">
               <a:buNone/>
             </a:pPr>
             <a:r>
@@ -8321,7 +8069,7 @@
             <a:prstDash val="solid"/>
           </a:ln>
           <a:effectLst>
-            <a:outerShdw sx="100000" sy="100000" kx="0" ky="0" algn="bl" rotWithShape="0" blurRad="101600" dist="38100" dir="8100000">
+            <a:outerShdw blurRad="101600" dist="38100" dir="8100000" algn="bl" rotWithShape="0">
               <a:srgbClr val="000000">
                 <a:alpha val="25000"/>
               </a:srgbClr>
@@ -8377,11 +8125,11 @@
           <a:bodyPr wrap="square" lIns="0" tIns="0" rIns="0" bIns="0" rtlCol="0" anchor="ctr"/>
           <a:lstStyle/>
           <a:p>
-            <a:pPr algn="ctr" indent="0" marL="0">
-              <a:buNone/>
-            </a:pPr>
-            <a:r>
-              <a:rPr lang="en-US" sz="1000" b="1" spc="200" kern="0" dirty="0">
+            <a:pPr marL="0" indent="0" algn="ctr">
+              <a:buNone/>
+            </a:pPr>
+            <a:r>
+              <a:rPr lang="en-US" sz="1000" b="1" kern="0" spc="200" dirty="0">
                 <a:solidFill>
                   <a:srgbClr val="FFB300"/>
                 </a:solidFill>
@@ -8441,7 +8189,7 @@
           <a:bodyPr wrap="square" lIns="0" tIns="0" rIns="0" bIns="0" rtlCol="0" anchor="ctr"/>
           <a:lstStyle/>
           <a:p>
-            <a:pPr indent="0" marL="0">
+            <a:pPr marL="0" indent="0">
               <a:buNone/>
             </a:pPr>
             <a:r>
@@ -8505,7 +8253,7 @@
           <a:bodyPr wrap="square" lIns="0" tIns="0" rIns="0" bIns="0" rtlCol="0" anchor="ctr"/>
           <a:lstStyle/>
           <a:p>
-            <a:pPr indent="0" marL="0">
+            <a:pPr marL="0" indent="0">
               <a:buNone/>
             </a:pPr>
             <a:r>
@@ -8569,7 +8317,7 @@
           <a:bodyPr wrap="square" lIns="0" tIns="0" rIns="0" bIns="0" rtlCol="0" anchor="ctr"/>
           <a:lstStyle/>
           <a:p>
-            <a:pPr indent="0" marL="0">
+            <a:pPr marL="0" indent="0">
               <a:buNone/>
             </a:pPr>
             <a:r>
@@ -8633,7 +8381,7 @@
           <a:bodyPr wrap="square" lIns="0" tIns="0" rIns="0" bIns="0" rtlCol="0" anchor="ctr"/>
           <a:lstStyle/>
           <a:p>
-            <a:pPr indent="0" marL="0">
+            <a:pPr marL="0" indent="0">
               <a:buNone/>
             </a:pPr>
             <a:r>
@@ -8697,7 +8445,7 @@
           <a:bodyPr wrap="square" lIns="0" tIns="0" rIns="0" bIns="0" rtlCol="0" anchor="ctr"/>
           <a:lstStyle/>
           <a:p>
-            <a:pPr indent="0" marL="0">
+            <a:pPr marL="0" indent="0">
               <a:buNone/>
             </a:pPr>
             <a:r>
@@ -8761,7 +8509,7 @@
           <a:bodyPr wrap="square" lIns="0" tIns="0" rIns="0" bIns="0" rtlCol="0" anchor="ctr"/>
           <a:lstStyle/>
           <a:p>
-            <a:pPr indent="0" marL="0">
+            <a:pPr marL="0" indent="0">
               <a:buNone/>
             </a:pPr>
             <a:r>
@@ -8800,7 +8548,7 @@
           <a:bodyPr wrap="square" lIns="0" tIns="0" rIns="0" bIns="0" rtlCol="0" anchor="t"/>
           <a:lstStyle/>
           <a:p>
-            <a:pPr algn="ctr" indent="0" marL="0">
+            <a:pPr marL="0" indent="0" algn="ctr">
               <a:buNone/>
             </a:pPr>
             <a:r>
@@ -8839,7 +8587,7 @@
           <a:bodyPr wrap="square" lIns="0" tIns="0" rIns="0" bIns="0" rtlCol="0" anchor="t"/>
           <a:lstStyle/>
           <a:p>
-            <a:pPr algn="r" indent="0" marL="0">
+            <a:pPr marL="0" indent="0" algn="r">
               <a:buNone/>
             </a:pPr>
             <a:r>
@@ -8873,6 +8621,7 @@
         <a:solidFill>
           <a:srgbClr val="0A0E1A"/>
         </a:solidFill>
+        <a:effectLst/>
       </p:bgPr>
     </p:bg>
     <p:spTree>
@@ -8962,7 +8711,7 @@
           <a:bodyPr wrap="square" lIns="0" tIns="0" rIns="0" bIns="0" rtlCol="0" anchor="ctr"/>
           <a:lstStyle/>
           <a:p>
-            <a:pPr algn="ctr" indent="0" marL="0">
+            <a:pPr marL="0" indent="0" algn="ctr">
               <a:buNone/>
             </a:pPr>
             <a:r>
@@ -9001,7 +8750,7 @@
           <a:bodyPr wrap="square" lIns="0" tIns="0" rIns="0" bIns="0" rtlCol="0" anchor="ctr"/>
           <a:lstStyle/>
           <a:p>
-            <a:pPr algn="l" indent="0" marL="0">
+            <a:pPr marL="0" indent="0" algn="l">
               <a:buNone/>
             </a:pPr>
             <a:r>
@@ -9043,7 +8792,7 @@
             <a:prstDash val="solid"/>
           </a:ln>
           <a:effectLst>
-            <a:outerShdw sx="100000" sy="100000" kx="0" ky="0" algn="bl" rotWithShape="0" blurRad="101600" dist="38100" dir="8100000">
+            <a:outerShdw blurRad="101600" dist="38100" dir="8100000" algn="bl" rotWithShape="0">
               <a:srgbClr val="000000">
                 <a:alpha val="25000"/>
               </a:srgbClr>
@@ -9099,11 +8848,11 @@
           <a:bodyPr wrap="square" lIns="0" tIns="0" rIns="0" bIns="0" rtlCol="0" anchor="ctr"/>
           <a:lstStyle/>
           <a:p>
-            <a:pPr algn="ctr" indent="0" marL="0">
-              <a:buNone/>
-            </a:pPr>
-            <a:r>
-              <a:rPr lang="en-US" sz="1100" b="1" spc="150" kern="0" dirty="0">
+            <a:pPr marL="0" indent="0" algn="ctr">
+              <a:buNone/>
+            </a:pPr>
+            <a:r>
+              <a:rPr lang="en-US" sz="1100" b="1" kern="0" spc="150" dirty="0">
                 <a:solidFill>
                   <a:srgbClr val="00C853"/>
                 </a:solidFill>
@@ -9163,7 +8912,7 @@
           <a:bodyPr wrap="square" lIns="0" tIns="0" rIns="0" bIns="0" rtlCol="0" anchor="ctr"/>
           <a:lstStyle/>
           <a:p>
-            <a:pPr indent="0" marL="0">
+            <a:pPr marL="0" indent="0">
               <a:buNone/>
             </a:pPr>
             <a:r>
@@ -9227,7 +8976,7 @@
           <a:bodyPr wrap="square" lIns="0" tIns="0" rIns="0" bIns="0" rtlCol="0" anchor="ctr"/>
           <a:lstStyle/>
           <a:p>
-            <a:pPr indent="0" marL="0">
+            <a:pPr marL="0" indent="0">
               <a:buNone/>
             </a:pPr>
             <a:r>
@@ -9291,7 +9040,7 @@
           <a:bodyPr wrap="square" lIns="0" tIns="0" rIns="0" bIns="0" rtlCol="0" anchor="ctr"/>
           <a:lstStyle/>
           <a:p>
-            <a:pPr indent="0" marL="0">
+            <a:pPr marL="0" indent="0">
               <a:buNone/>
             </a:pPr>
             <a:r>
@@ -9355,7 +9104,7 @@
           <a:bodyPr wrap="square" lIns="0" tIns="0" rIns="0" bIns="0" rtlCol="0" anchor="ctr"/>
           <a:lstStyle/>
           <a:p>
-            <a:pPr indent="0" marL="0">
+            <a:pPr marL="0" indent="0">
               <a:buNone/>
             </a:pPr>
             <a:r>
@@ -9419,7 +9168,7 @@
           <a:bodyPr wrap="square" lIns="0" tIns="0" rIns="0" bIns="0" rtlCol="0" anchor="ctr"/>
           <a:lstStyle/>
           <a:p>
-            <a:pPr indent="0" marL="0">
+            <a:pPr marL="0" indent="0">
               <a:buNone/>
             </a:pPr>
             <a:r>
@@ -9461,7 +9210,7 @@
             <a:prstDash val="solid"/>
           </a:ln>
           <a:effectLst>
-            <a:outerShdw sx="100000" sy="100000" kx="0" ky="0" algn="bl" rotWithShape="0" blurRad="101600" dist="38100" dir="8100000">
+            <a:outerShdw blurRad="101600" dist="38100" dir="8100000" algn="bl" rotWithShape="0">
               <a:srgbClr val="000000">
                 <a:alpha val="25000"/>
               </a:srgbClr>
@@ -9517,11 +9266,11 @@
           <a:bodyPr wrap="square" lIns="0" tIns="0" rIns="0" bIns="0" rtlCol="0" anchor="ctr"/>
           <a:lstStyle/>
           <a:p>
-            <a:pPr algn="ctr" indent="0" marL="0">
-              <a:buNone/>
-            </a:pPr>
-            <a:r>
-              <a:rPr lang="en-US" sz="1100" b="1" spc="150" kern="0" dirty="0">
+            <a:pPr marL="0" indent="0" algn="ctr">
+              <a:buNone/>
+            </a:pPr>
+            <a:r>
+              <a:rPr lang="en-US" sz="1100" b="1" kern="0" spc="150" dirty="0">
                 <a:solidFill>
                   <a:srgbClr val="00BCD4"/>
                 </a:solidFill>
@@ -9581,7 +9330,7 @@
           <a:bodyPr wrap="square" lIns="0" tIns="0" rIns="0" bIns="0" rtlCol="0" anchor="ctr"/>
           <a:lstStyle/>
           <a:p>
-            <a:pPr indent="0" marL="0">
+            <a:pPr marL="0" indent="0">
               <a:buNone/>
             </a:pPr>
             <a:r>
@@ -9645,7 +9394,7 @@
           <a:bodyPr wrap="square" lIns="0" tIns="0" rIns="0" bIns="0" rtlCol="0" anchor="ctr"/>
           <a:lstStyle/>
           <a:p>
-            <a:pPr indent="0" marL="0">
+            <a:pPr marL="0" indent="0">
               <a:buNone/>
             </a:pPr>
             <a:r>
@@ -9709,7 +9458,7 @@
           <a:bodyPr wrap="square" lIns="0" tIns="0" rIns="0" bIns="0" rtlCol="0" anchor="ctr"/>
           <a:lstStyle/>
           <a:p>
-            <a:pPr indent="0" marL="0">
+            <a:pPr marL="0" indent="0">
               <a:buNone/>
             </a:pPr>
             <a:r>
@@ -9773,7 +9522,7 @@
           <a:bodyPr wrap="square" lIns="0" tIns="0" rIns="0" bIns="0" rtlCol="0" anchor="ctr"/>
           <a:lstStyle/>
           <a:p>
-            <a:pPr indent="0" marL="0">
+            <a:pPr marL="0" indent="0">
               <a:buNone/>
             </a:pPr>
             <a:r>
@@ -9837,7 +9586,7 @@
           <a:bodyPr wrap="square" lIns="0" tIns="0" rIns="0" bIns="0" rtlCol="0" anchor="ctr"/>
           <a:lstStyle/>
           <a:p>
-            <a:pPr indent="0" marL="0">
+            <a:pPr marL="0" indent="0">
               <a:buNone/>
             </a:pPr>
             <a:r>
@@ -9879,7 +9628,7 @@
             <a:prstDash val="solid"/>
           </a:ln>
           <a:effectLst>
-            <a:outerShdw sx="100000" sy="100000" kx="0" ky="0" algn="bl" rotWithShape="0" blurRad="101600" dist="38100" dir="8100000">
+            <a:outerShdw blurRad="101600" dist="38100" dir="8100000" algn="bl" rotWithShape="0">
               <a:srgbClr val="000000">
                 <a:alpha val="25000"/>
               </a:srgbClr>
@@ -9935,11 +9684,11 @@
           <a:bodyPr wrap="square" lIns="0" tIns="0" rIns="0" bIns="0" rtlCol="0" anchor="ctr"/>
           <a:lstStyle/>
           <a:p>
-            <a:pPr algn="ctr" indent="0" marL="0">
-              <a:buNone/>
-            </a:pPr>
-            <a:r>
-              <a:rPr lang="en-US" sz="1100" b="1" spc="150" kern="0" dirty="0">
+            <a:pPr marL="0" indent="0" algn="ctr">
+              <a:buNone/>
+            </a:pPr>
+            <a:r>
+              <a:rPr lang="en-US" sz="1100" b="1" kern="0" spc="150" dirty="0">
                 <a:solidFill>
                   <a:srgbClr val="00E676"/>
                 </a:solidFill>
@@ -9999,7 +9748,7 @@
           <a:bodyPr wrap="square" lIns="0" tIns="0" rIns="0" bIns="0" rtlCol="0" anchor="ctr"/>
           <a:lstStyle/>
           <a:p>
-            <a:pPr indent="0" marL="0">
+            <a:pPr marL="0" indent="0">
               <a:buNone/>
             </a:pPr>
             <a:r>
@@ -10063,7 +9812,7 @@
           <a:bodyPr wrap="square" lIns="0" tIns="0" rIns="0" bIns="0" rtlCol="0" anchor="ctr"/>
           <a:lstStyle/>
           <a:p>
-            <a:pPr indent="0" marL="0">
+            <a:pPr marL="0" indent="0">
               <a:buNone/>
             </a:pPr>
             <a:r>
@@ -10127,7 +9876,7 @@
           <a:bodyPr wrap="square" lIns="0" tIns="0" rIns="0" bIns="0" rtlCol="0" anchor="ctr"/>
           <a:lstStyle/>
           <a:p>
-            <a:pPr indent="0" marL="0">
+            <a:pPr marL="0" indent="0">
               <a:buNone/>
             </a:pPr>
             <a:r>
@@ -10191,7 +9940,7 @@
           <a:bodyPr wrap="square" lIns="0" tIns="0" rIns="0" bIns="0" rtlCol="0" anchor="ctr"/>
           <a:lstStyle/>
           <a:p>
-            <a:pPr indent="0" marL="0">
+            <a:pPr marL="0" indent="0">
               <a:buNone/>
             </a:pPr>
             <a:r>
@@ -10255,7 +10004,7 @@
           <a:bodyPr wrap="square" lIns="0" tIns="0" rIns="0" bIns="0" rtlCol="0" anchor="ctr"/>
           <a:lstStyle/>
           <a:p>
-            <a:pPr indent="0" marL="0">
+            <a:pPr marL="0" indent="0">
               <a:buNone/>
             </a:pPr>
             <a:r>
@@ -10317,7 +10066,7 @@
           <a:bodyPr wrap="square" lIns="0" tIns="0" rIns="0" bIns="0" rtlCol="0" anchor="ctr"/>
           <a:lstStyle/>
           <a:p>
-            <a:pPr algn="ctr" indent="0" marL="0">
+            <a:pPr marL="0" indent="0" algn="ctr">
               <a:buNone/>
             </a:pPr>
             <a:r>
@@ -10379,7 +10128,7 @@
           <a:bodyPr wrap="square" lIns="0" tIns="0" rIns="0" bIns="0" rtlCol="0" anchor="ctr"/>
           <a:lstStyle/>
           <a:p>
-            <a:pPr algn="ctr" indent="0" marL="0">
+            <a:pPr marL="0" indent="0" algn="ctr">
               <a:buNone/>
             </a:pPr>
             <a:r>
@@ -10418,7 +10167,7 @@
           <a:bodyPr wrap="square" lIns="0" tIns="0" rIns="0" bIns="0" rtlCol="0" anchor="t"/>
           <a:lstStyle/>
           <a:p>
-            <a:pPr algn="r" indent="0" marL="0">
+            <a:pPr marL="0" indent="0" algn="r">
               <a:buNone/>
             </a:pPr>
             <a:r>
@@ -10452,6 +10201,7 @@
         <a:solidFill>
           <a:srgbClr val="0A0E1A"/>
         </a:solidFill>
+        <a:effectLst/>
       </p:bgPr>
     </p:bg>
     <p:spTree>
@@ -10541,7 +10291,7 @@
           <a:bodyPr wrap="square" lIns="0" tIns="0" rIns="0" bIns="0" rtlCol="0" anchor="ctr"/>
           <a:lstStyle/>
           <a:p>
-            <a:pPr algn="ctr" indent="0" marL="0">
+            <a:pPr marL="0" indent="0" algn="ctr">
               <a:buNone/>
             </a:pPr>
             <a:r>
@@ -10580,7 +10330,7 @@
           <a:bodyPr wrap="square" lIns="0" tIns="0" rIns="0" bIns="0" rtlCol="0" anchor="ctr"/>
           <a:lstStyle/>
           <a:p>
-            <a:pPr algn="l" indent="0" marL="0">
+            <a:pPr marL="0" indent="0" algn="l">
               <a:buNone/>
             </a:pPr>
             <a:r>
@@ -10619,7 +10369,7 @@
           <a:bodyPr wrap="square" lIns="0" tIns="0" rIns="0" bIns="0" rtlCol="0" anchor="ctr"/>
           <a:lstStyle/>
           <a:p>
-            <a:pPr algn="ctr" indent="0" marL="0">
+            <a:pPr marL="0" indent="0" algn="ctr">
               <a:buNone/>
             </a:pPr>
             <a:r>
@@ -10658,7 +10408,7 @@
           <a:bodyPr wrap="square" lIns="0" tIns="0" rIns="0" bIns="0" rtlCol="0" anchor="ctr"/>
           <a:lstStyle/>
           <a:p>
-            <a:pPr algn="l" indent="0" marL="0">
+            <a:pPr marL="0" indent="0" algn="l">
               <a:buNone/>
             </a:pPr>
             <a:r>
@@ -10697,7 +10447,7 @@
           <a:bodyPr wrap="square" lIns="0" tIns="0" rIns="0" bIns="0" rtlCol="0" anchor="t"/>
           <a:lstStyle/>
           <a:p>
-            <a:pPr algn="l" indent="0" marL="0">
+            <a:pPr marL="0" indent="0" algn="l">
               <a:buNone/>
             </a:pPr>
             <a:r>
@@ -10761,7 +10511,7 @@
           <a:bodyPr wrap="square" lIns="0" tIns="0" rIns="0" bIns="0" rtlCol="0" anchor="ctr"/>
           <a:lstStyle/>
           <a:p>
-            <a:pPr algn="ctr" indent="0" marL="0">
+            <a:pPr marL="0" indent="0" algn="ctr">
               <a:buNone/>
             </a:pPr>
             <a:r>
@@ -10800,7 +10550,7 @@
           <a:bodyPr wrap="square" lIns="0" tIns="0" rIns="0" bIns="0" rtlCol="0" anchor="ctr"/>
           <a:lstStyle/>
           <a:p>
-            <a:pPr algn="l" indent="0" marL="0">
+            <a:pPr marL="0" indent="0" algn="l">
               <a:buNone/>
             </a:pPr>
             <a:r>
@@ -10839,7 +10589,7 @@
           <a:bodyPr wrap="square" lIns="0" tIns="0" rIns="0" bIns="0" rtlCol="0" anchor="t"/>
           <a:lstStyle/>
           <a:p>
-            <a:pPr algn="l" indent="0" marL="0">
+            <a:pPr marL="0" indent="0" algn="l">
               <a:buNone/>
             </a:pPr>
             <a:r>
@@ -10903,7 +10653,7 @@
           <a:bodyPr wrap="square" lIns="0" tIns="0" rIns="0" bIns="0" rtlCol="0" anchor="ctr"/>
           <a:lstStyle/>
           <a:p>
-            <a:pPr algn="ctr" indent="0" marL="0">
+            <a:pPr marL="0" indent="0" algn="ctr">
               <a:buNone/>
             </a:pPr>
             <a:r>
@@ -10942,7 +10692,7 @@
           <a:bodyPr wrap="square" lIns="0" tIns="0" rIns="0" bIns="0" rtlCol="0" anchor="ctr"/>
           <a:lstStyle/>
           <a:p>
-            <a:pPr algn="l" indent="0" marL="0">
+            <a:pPr marL="0" indent="0" algn="l">
               <a:buNone/>
             </a:pPr>
             <a:r>
@@ -10981,7 +10731,7 @@
           <a:bodyPr wrap="square" lIns="0" tIns="0" rIns="0" bIns="0" rtlCol="0" anchor="t"/>
           <a:lstStyle/>
           <a:p>
-            <a:pPr algn="l" indent="0" marL="0">
+            <a:pPr marL="0" indent="0" algn="l">
               <a:buNone/>
             </a:pPr>
             <a:r>
@@ -11045,7 +10795,7 @@
           <a:bodyPr wrap="square" lIns="0" tIns="0" rIns="0" bIns="0" rtlCol="0" anchor="ctr"/>
           <a:lstStyle/>
           <a:p>
-            <a:pPr algn="ctr" indent="0" marL="0">
+            <a:pPr marL="0" indent="0" algn="ctr">
               <a:buNone/>
             </a:pPr>
             <a:r>
@@ -11084,7 +10834,7 @@
           <a:bodyPr wrap="square" lIns="0" tIns="0" rIns="0" bIns="0" rtlCol="0" anchor="ctr"/>
           <a:lstStyle/>
           <a:p>
-            <a:pPr algn="l" indent="0" marL="0">
+            <a:pPr marL="0" indent="0" algn="l">
               <a:buNone/>
             </a:pPr>
             <a:r>
@@ -11123,7 +10873,7 @@
           <a:bodyPr wrap="square" lIns="0" tIns="0" rIns="0" bIns="0" rtlCol="0" anchor="t"/>
           <a:lstStyle/>
           <a:p>
-            <a:pPr algn="l" indent="0" marL="0">
+            <a:pPr marL="0" indent="0" algn="l">
               <a:buNone/>
             </a:pPr>
             <a:r>
@@ -11165,7 +10915,7 @@
             <a:prstDash val="solid"/>
           </a:ln>
           <a:effectLst>
-            <a:outerShdw sx="100000" sy="100000" kx="0" ky="0" algn="bl" rotWithShape="0" blurRad="101600" dist="38100" dir="8100000">
+            <a:outerShdw blurRad="101600" dist="38100" dir="8100000" algn="bl" rotWithShape="0">
               <a:srgbClr val="000000">
                 <a:alpha val="25000"/>
               </a:srgbClr>
@@ -11219,7 +10969,7 @@
           <a:bodyPr wrap="square" lIns="0" tIns="0" rIns="0" bIns="0" rtlCol="0" anchor="ctr"/>
           <a:lstStyle/>
           <a:p>
-            <a:pPr algn="ctr" indent="0" marL="0">
+            <a:pPr marL="0" indent="0" algn="ctr">
               <a:buNone/>
             </a:pPr>
             <a:r>
@@ -11283,7 +11033,7 @@
           <a:bodyPr wrap="square" lIns="0" tIns="0" rIns="0" bIns="0" rtlCol="0" anchor="ctr"/>
           <a:lstStyle/>
           <a:p>
-            <a:pPr algn="ctr" indent="0" marL="0">
+            <a:pPr marL="0" indent="0" algn="ctr">
               <a:buNone/>
             </a:pPr>
             <a:r>
@@ -11322,7 +11072,7 @@
           <a:bodyPr wrap="square" lIns="0" tIns="0" rIns="0" bIns="0" rtlCol="0" anchor="ctr"/>
           <a:lstStyle/>
           <a:p>
-            <a:pPr algn="l" indent="0" marL="0">
+            <a:pPr marL="0" indent="0" algn="l">
               <a:buNone/>
             </a:pPr>
             <a:r>
@@ -11386,7 +11136,7 @@
           <a:bodyPr wrap="square" lIns="0" tIns="0" rIns="0" bIns="0" rtlCol="0" anchor="ctr"/>
           <a:lstStyle/>
           <a:p>
-            <a:pPr algn="ctr" indent="0" marL="0">
+            <a:pPr marL="0" indent="0" algn="ctr">
               <a:buNone/>
             </a:pPr>
             <a:r>
@@ -11425,7 +11175,7 @@
           <a:bodyPr wrap="square" lIns="0" tIns="0" rIns="0" bIns="0" rtlCol="0" anchor="ctr"/>
           <a:lstStyle/>
           <a:p>
-            <a:pPr algn="l" indent="0" marL="0">
+            <a:pPr marL="0" indent="0" algn="l">
               <a:buNone/>
             </a:pPr>
             <a:r>
@@ -11489,7 +11239,7 @@
           <a:bodyPr wrap="square" lIns="0" tIns="0" rIns="0" bIns="0" rtlCol="0" anchor="ctr"/>
           <a:lstStyle/>
           <a:p>
-            <a:pPr algn="ctr" indent="0" marL="0">
+            <a:pPr marL="0" indent="0" algn="ctr">
               <a:buNone/>
             </a:pPr>
             <a:r>
@@ -11528,7 +11278,7 @@
           <a:bodyPr wrap="square" lIns="0" tIns="0" rIns="0" bIns="0" rtlCol="0" anchor="ctr"/>
           <a:lstStyle/>
           <a:p>
-            <a:pPr algn="l" indent="0" marL="0">
+            <a:pPr marL="0" indent="0" algn="l">
               <a:buNone/>
             </a:pPr>
             <a:r>
@@ -11592,7 +11342,7 @@
           <a:bodyPr wrap="square" lIns="0" tIns="0" rIns="0" bIns="0" rtlCol="0" anchor="ctr"/>
           <a:lstStyle/>
           <a:p>
-            <a:pPr algn="ctr" indent="0" marL="0">
+            <a:pPr marL="0" indent="0" algn="ctr">
               <a:buNone/>
             </a:pPr>
             <a:r>
@@ -11631,7 +11381,7 @@
           <a:bodyPr wrap="square" lIns="0" tIns="0" rIns="0" bIns="0" rtlCol="0" anchor="ctr"/>
           <a:lstStyle/>
           <a:p>
-            <a:pPr algn="l" indent="0" marL="0">
+            <a:pPr marL="0" indent="0" algn="l">
               <a:buNone/>
             </a:pPr>
             <a:r>
@@ -11695,7 +11445,7 @@
           <a:bodyPr wrap="square" lIns="0" tIns="0" rIns="0" bIns="0" rtlCol="0" anchor="ctr"/>
           <a:lstStyle/>
           <a:p>
-            <a:pPr algn="ctr" indent="0" marL="0">
+            <a:pPr marL="0" indent="0" algn="ctr">
               <a:buNone/>
             </a:pPr>
             <a:r>
@@ -11734,7 +11484,7 @@
           <a:bodyPr wrap="square" lIns="0" tIns="0" rIns="0" bIns="0" rtlCol="0" anchor="ctr"/>
           <a:lstStyle/>
           <a:p>
-            <a:pPr algn="l" indent="0" marL="0">
+            <a:pPr marL="0" indent="0" algn="l">
               <a:buNone/>
             </a:pPr>
             <a:r>
@@ -11773,7 +11523,7 @@
           <a:bodyPr wrap="square" lIns="0" tIns="0" rIns="0" bIns="0" rtlCol="0" anchor="t"/>
           <a:lstStyle/>
           <a:p>
-            <a:pPr algn="r" indent="0" marL="0">
+            <a:pPr marL="0" indent="0" algn="r">
               <a:buNone/>
             </a:pPr>
             <a:r>
@@ -11807,6 +11557,7 @@
         <a:solidFill>
           <a:srgbClr val="0A0E1A"/>
         </a:solidFill>
+        <a:effectLst/>
       </p:bgPr>
     </p:bg>
     <p:spTree>
@@ -11896,7 +11647,7 @@
           <a:bodyPr wrap="square" lIns="0" tIns="0" rIns="0" bIns="0" rtlCol="0" anchor="ctr"/>
           <a:lstStyle/>
           <a:p>
-            <a:pPr algn="ctr" indent="0" marL="0">
+            <a:pPr marL="0" indent="0" algn="ctr">
               <a:buNone/>
             </a:pPr>
             <a:r>
@@ -11935,7 +11686,7 @@
           <a:bodyPr wrap="square" lIns="0" tIns="0" rIns="0" bIns="0" rtlCol="0" anchor="ctr"/>
           <a:lstStyle/>
           <a:p>
-            <a:pPr algn="l" indent="0" marL="0">
+            <a:pPr marL="0" indent="0" algn="l">
               <a:buNone/>
             </a:pPr>
             <a:r>
@@ -11974,7 +11725,7 @@
           <a:bodyPr wrap="square" lIns="0" tIns="0" rIns="0" bIns="0" rtlCol="0" anchor="t"/>
           <a:lstStyle/>
           <a:p>
-            <a:pPr algn="l" indent="0" marL="0">
+            <a:pPr marL="0" indent="0" algn="l">
               <a:buNone/>
             </a:pPr>
             <a:r>
@@ -12016,7 +11767,7 @@
             <a:prstDash val="solid"/>
           </a:ln>
           <a:effectLst>
-            <a:outerShdw sx="100000" sy="100000" kx="0" ky="0" algn="bl" rotWithShape="0" blurRad="101600" dist="38100" dir="8100000">
+            <a:outerShdw blurRad="101600" dist="38100" dir="8100000" algn="bl" rotWithShape="0">
               <a:srgbClr val="000000">
                 <a:alpha val="25000"/>
               </a:srgbClr>
@@ -12045,7 +11796,7 @@
           <a:bodyPr wrap="square" lIns="0" tIns="0" rIns="0" bIns="0" rtlCol="0" anchor="ctr"/>
           <a:lstStyle/>
           <a:p>
-            <a:pPr algn="ctr" indent="0" marL="0">
+            <a:pPr marL="0" indent="0" algn="ctr">
               <a:buNone/>
             </a:pPr>
             <a:r>
@@ -12107,7 +11858,7 @@
           <a:bodyPr wrap="square" lIns="0" tIns="0" rIns="0" bIns="0" rtlCol="0" anchor="ctr"/>
           <a:lstStyle/>
           <a:p>
-            <a:pPr algn="l" indent="0" marL="0">
+            <a:pPr marL="0" indent="0" algn="l">
               <a:buNone/>
             </a:pPr>
             <a:r>
@@ -12146,7 +11897,7 @@
           <a:bodyPr wrap="square" lIns="0" tIns="0" rIns="0" bIns="0" rtlCol="0" anchor="t"/>
           <a:lstStyle/>
           <a:p>
-            <a:pPr algn="l" indent="0" marL="0">
+            <a:pPr marL="0" indent="0" algn="l">
               <a:buNone/>
             </a:pPr>
             <a:r>
@@ -12188,7 +11939,7 @@
             <a:prstDash val="solid"/>
           </a:ln>
           <a:effectLst>
-            <a:outerShdw sx="100000" sy="100000" kx="0" ky="0" algn="bl" rotWithShape="0" blurRad="101600" dist="38100" dir="8100000">
+            <a:outerShdw blurRad="101600" dist="38100" dir="8100000" algn="bl" rotWithShape="0">
               <a:srgbClr val="000000">
                 <a:alpha val="25000"/>
               </a:srgbClr>
@@ -12217,7 +11968,7 @@
           <a:bodyPr wrap="square" lIns="0" tIns="0" rIns="0" bIns="0" rtlCol="0" anchor="ctr"/>
           <a:lstStyle/>
           <a:p>
-            <a:pPr algn="ctr" indent="0" marL="0">
+            <a:pPr marL="0" indent="0" algn="ctr">
               <a:buNone/>
             </a:pPr>
             <a:r>
@@ -12279,7 +12030,7 @@
           <a:bodyPr wrap="square" lIns="0" tIns="0" rIns="0" bIns="0" rtlCol="0" anchor="ctr"/>
           <a:lstStyle/>
           <a:p>
-            <a:pPr algn="l" indent="0" marL="0">
+            <a:pPr marL="0" indent="0" algn="l">
               <a:buNone/>
             </a:pPr>
             <a:r>
@@ -12318,7 +12069,7 @@
           <a:bodyPr wrap="square" lIns="0" tIns="0" rIns="0" bIns="0" rtlCol="0" anchor="t"/>
           <a:lstStyle/>
           <a:p>
-            <a:pPr algn="l" indent="0" marL="0">
+            <a:pPr marL="0" indent="0" algn="l">
               <a:buNone/>
             </a:pPr>
             <a:r>
@@ -12360,7 +12111,7 @@
             <a:prstDash val="solid"/>
           </a:ln>
           <a:effectLst>
-            <a:outerShdw sx="100000" sy="100000" kx="0" ky="0" algn="bl" rotWithShape="0" blurRad="101600" dist="38100" dir="8100000">
+            <a:outerShdw blurRad="101600" dist="38100" dir="8100000" algn="bl" rotWithShape="0">
               <a:srgbClr val="000000">
                 <a:alpha val="25000"/>
               </a:srgbClr>
@@ -12389,7 +12140,7 @@
           <a:bodyPr wrap="square" lIns="0" tIns="0" rIns="0" bIns="0" rtlCol="0" anchor="ctr"/>
           <a:lstStyle/>
           <a:p>
-            <a:pPr algn="ctr" indent="0" marL="0">
+            <a:pPr marL="0" indent="0" algn="ctr">
               <a:buNone/>
             </a:pPr>
             <a:r>
@@ -12451,7 +12202,7 @@
           <a:bodyPr wrap="square" lIns="0" tIns="0" rIns="0" bIns="0" rtlCol="0" anchor="ctr"/>
           <a:lstStyle/>
           <a:p>
-            <a:pPr algn="l" indent="0" marL="0">
+            <a:pPr marL="0" indent="0" algn="l">
               <a:buNone/>
             </a:pPr>
             <a:r>
@@ -12490,7 +12241,7 @@
           <a:bodyPr wrap="square" lIns="0" tIns="0" rIns="0" bIns="0" rtlCol="0" anchor="t"/>
           <a:lstStyle/>
           <a:p>
-            <a:pPr algn="l" indent="0" marL="0">
+            <a:pPr marL="0" indent="0" algn="l">
               <a:buNone/>
             </a:pPr>
             <a:r>
@@ -12532,7 +12283,7 @@
             <a:prstDash val="solid"/>
           </a:ln>
           <a:effectLst>
-            <a:outerShdw sx="100000" sy="100000" kx="0" ky="0" algn="bl" rotWithShape="0" blurRad="101600" dist="38100" dir="8100000">
+            <a:outerShdw blurRad="101600" dist="38100" dir="8100000" algn="bl" rotWithShape="0">
               <a:srgbClr val="000000">
                 <a:alpha val="25000"/>
               </a:srgbClr>
@@ -12561,7 +12312,7 @@
           <a:bodyPr wrap="square" lIns="0" tIns="0" rIns="0" bIns="0" rtlCol="0" anchor="ctr"/>
           <a:lstStyle/>
           <a:p>
-            <a:pPr algn="ctr" indent="0" marL="0">
+            <a:pPr marL="0" indent="0" algn="ctr">
               <a:buNone/>
             </a:pPr>
             <a:r>
@@ -12623,7 +12374,7 @@
           <a:bodyPr wrap="square" lIns="0" tIns="0" rIns="0" bIns="0" rtlCol="0" anchor="ctr"/>
           <a:lstStyle/>
           <a:p>
-            <a:pPr algn="l" indent="0" marL="0">
+            <a:pPr marL="0" indent="0" algn="l">
               <a:buNone/>
             </a:pPr>
             <a:r>
@@ -12662,7 +12413,7 @@
           <a:bodyPr wrap="square" lIns="0" tIns="0" rIns="0" bIns="0" rtlCol="0" anchor="t"/>
           <a:lstStyle/>
           <a:p>
-            <a:pPr algn="l" indent="0" marL="0">
+            <a:pPr marL="0" indent="0" algn="l">
               <a:buNone/>
             </a:pPr>
             <a:r>
@@ -12704,7 +12455,7 @@
             <a:prstDash val="solid"/>
           </a:ln>
           <a:effectLst>
-            <a:outerShdw sx="100000" sy="100000" kx="0" ky="0" algn="bl" rotWithShape="0" blurRad="101600" dist="38100" dir="8100000">
+            <a:outerShdw blurRad="101600" dist="38100" dir="8100000" algn="bl" rotWithShape="0">
               <a:srgbClr val="000000">
                 <a:alpha val="25000"/>
               </a:srgbClr>
@@ -12733,7 +12484,7 @@
           <a:bodyPr wrap="square" lIns="0" tIns="0" rIns="0" bIns="0" rtlCol="0" anchor="ctr"/>
           <a:lstStyle/>
           <a:p>
-            <a:pPr algn="ctr" indent="0" marL="0">
+            <a:pPr marL="0" indent="0" algn="ctr">
               <a:buNone/>
             </a:pPr>
             <a:r>
@@ -12795,7 +12546,7 @@
           <a:bodyPr wrap="square" lIns="0" tIns="0" rIns="0" bIns="0" rtlCol="0" anchor="ctr"/>
           <a:lstStyle/>
           <a:p>
-            <a:pPr algn="l" indent="0" marL="0">
+            <a:pPr marL="0" indent="0" algn="l">
               <a:buNone/>
             </a:pPr>
             <a:r>
@@ -12834,7 +12585,7 @@
           <a:bodyPr wrap="square" lIns="0" tIns="0" rIns="0" bIns="0" rtlCol="0" anchor="t"/>
           <a:lstStyle/>
           <a:p>
-            <a:pPr algn="l" indent="0" marL="0">
+            <a:pPr marL="0" indent="0" algn="l">
               <a:buNone/>
             </a:pPr>
             <a:r>
@@ -12876,7 +12627,7 @@
             <a:prstDash val="solid"/>
           </a:ln>
           <a:effectLst>
-            <a:outerShdw sx="100000" sy="100000" kx="0" ky="0" algn="bl" rotWithShape="0" blurRad="101600" dist="38100" dir="8100000">
+            <a:outerShdw blurRad="101600" dist="38100" dir="8100000" algn="bl" rotWithShape="0">
               <a:srgbClr val="000000">
                 <a:alpha val="25000"/>
               </a:srgbClr>
@@ -12905,7 +12656,7 @@
           <a:bodyPr wrap="square" lIns="0" tIns="0" rIns="0" bIns="0" rtlCol="0" anchor="ctr"/>
           <a:lstStyle/>
           <a:p>
-            <a:pPr algn="ctr" indent="0" marL="0">
+            <a:pPr marL="0" indent="0" algn="ctr">
               <a:buNone/>
             </a:pPr>
             <a:r>
@@ -12967,7 +12718,7 @@
           <a:bodyPr wrap="square" lIns="0" tIns="0" rIns="0" bIns="0" rtlCol="0" anchor="ctr"/>
           <a:lstStyle/>
           <a:p>
-            <a:pPr algn="l" indent="0" marL="0">
+            <a:pPr marL="0" indent="0" algn="l">
               <a:buNone/>
             </a:pPr>
             <a:r>
@@ -13006,7 +12757,7 @@
           <a:bodyPr wrap="square" lIns="0" tIns="0" rIns="0" bIns="0" rtlCol="0" anchor="t"/>
           <a:lstStyle/>
           <a:p>
-            <a:pPr algn="l" indent="0" marL="0">
+            <a:pPr marL="0" indent="0" algn="l">
               <a:buNone/>
             </a:pPr>
             <a:r>
@@ -13048,7 +12799,7 @@
             <a:prstDash val="solid"/>
           </a:ln>
           <a:effectLst>
-            <a:outerShdw sx="100000" sy="100000" kx="0" ky="0" algn="bl" rotWithShape="0" blurRad="101600" dist="38100" dir="8100000">
+            <a:outerShdw blurRad="101600" dist="38100" dir="8100000" algn="bl" rotWithShape="0">
               <a:srgbClr val="000000">
                 <a:alpha val="25000"/>
               </a:srgbClr>
@@ -13077,7 +12828,7 @@
           <a:bodyPr wrap="square" lIns="0" tIns="0" rIns="0" bIns="0" rtlCol="0" anchor="ctr"/>
           <a:lstStyle/>
           <a:p>
-            <a:pPr algn="ctr" indent="0" marL="0">
+            <a:pPr marL="0" indent="0" algn="ctr">
               <a:buNone/>
             </a:pPr>
             <a:r>
@@ -13139,7 +12890,7 @@
           <a:bodyPr wrap="square" lIns="0" tIns="0" rIns="0" bIns="0" rtlCol="0" anchor="ctr"/>
           <a:lstStyle/>
           <a:p>
-            <a:pPr algn="l" indent="0" marL="0">
+            <a:pPr marL="0" indent="0" algn="l">
               <a:buNone/>
             </a:pPr>
             <a:r>
@@ -13178,7 +12929,7 @@
           <a:bodyPr wrap="square" lIns="0" tIns="0" rIns="0" bIns="0" rtlCol="0" anchor="t"/>
           <a:lstStyle/>
           <a:p>
-            <a:pPr algn="l" indent="0" marL="0">
+            <a:pPr marL="0" indent="0" algn="l">
               <a:buNone/>
             </a:pPr>
             <a:r>
@@ -13220,7 +12971,7 @@
             <a:prstDash val="solid"/>
           </a:ln>
           <a:effectLst>
-            <a:outerShdw sx="100000" sy="100000" kx="0" ky="0" algn="bl" rotWithShape="0" blurRad="101600" dist="38100" dir="8100000">
+            <a:outerShdw blurRad="101600" dist="38100" dir="8100000" algn="bl" rotWithShape="0">
               <a:srgbClr val="000000">
                 <a:alpha val="25000"/>
               </a:srgbClr>
@@ -13249,7 +13000,7 @@
           <a:bodyPr wrap="square" lIns="0" tIns="0" rIns="0" bIns="0" rtlCol="0" anchor="ctr"/>
           <a:lstStyle/>
           <a:p>
-            <a:pPr algn="ctr" indent="0" marL="0">
+            <a:pPr marL="0" indent="0" algn="ctr">
               <a:buNone/>
             </a:pPr>
             <a:r>
@@ -13288,7 +13039,7 @@
           <a:bodyPr wrap="square" lIns="0" tIns="0" rIns="0" bIns="0" rtlCol="0" anchor="t"/>
           <a:lstStyle/>
           <a:p>
-            <a:pPr algn="r" indent="0" marL="0">
+            <a:pPr marL="0" indent="0" algn="r">
               <a:buNone/>
             </a:pPr>
             <a:r>
@@ -13322,6 +13073,7 @@
         <a:solidFill>
           <a:srgbClr val="0A0E1A"/>
         </a:solidFill>
+        <a:effectLst/>
       </p:bgPr>
     </p:bg>
     <p:spTree>
@@ -13411,7 +13163,7 @@
           <a:bodyPr wrap="square" lIns="0" tIns="0" rIns="0" bIns="0" rtlCol="0" anchor="ctr"/>
           <a:lstStyle/>
           <a:p>
-            <a:pPr algn="ctr" indent="0" marL="0">
+            <a:pPr marL="0" indent="0" algn="ctr">
               <a:buNone/>
             </a:pPr>
             <a:r>
@@ -13450,7 +13202,7 @@
           <a:bodyPr wrap="square" lIns="0" tIns="0" rIns="0" bIns="0" rtlCol="0" anchor="ctr"/>
           <a:lstStyle/>
           <a:p>
-            <a:pPr algn="l" indent="0" marL="0">
+            <a:pPr marL="0" indent="0" algn="l">
               <a:buNone/>
             </a:pPr>
             <a:r>
@@ -13492,7 +13244,7 @@
             <a:prstDash val="solid"/>
           </a:ln>
           <a:effectLst>
-            <a:outerShdw sx="100000" sy="100000" kx="0" ky="0" algn="bl" rotWithShape="0" blurRad="101600" dist="38100" dir="8100000">
+            <a:outerShdw blurRad="101600" dist="38100" dir="8100000" algn="bl" rotWithShape="0">
               <a:srgbClr val="000000">
                 <a:alpha val="25000"/>
               </a:srgbClr>
@@ -13521,7 +13273,7 @@
           <a:bodyPr wrap="square" lIns="0" tIns="0" rIns="0" bIns="0" rtlCol="0" anchor="ctr"/>
           <a:lstStyle/>
           <a:p>
-            <a:pPr algn="ctr" indent="0" marL="0">
+            <a:pPr marL="0" indent="0" algn="ctr">
               <a:buNone/>
             </a:pPr>
             <a:r>
@@ -13560,7 +13312,7 @@
           <a:bodyPr wrap="square" lIns="0" tIns="0" rIns="0" bIns="0" rtlCol="0" anchor="ctr"/>
           <a:lstStyle/>
           <a:p>
-            <a:pPr algn="l" indent="0" marL="0">
+            <a:pPr marL="0" indent="0" algn="l">
               <a:buNone/>
             </a:pPr>
             <a:r>
@@ -13599,7 +13351,7 @@
           <a:bodyPr wrap="square" lIns="0" tIns="0" rIns="0" bIns="0" rtlCol="0" anchor="t"/>
           <a:lstStyle/>
           <a:p>
-            <a:pPr algn="l" indent="0" marL="0">
+            <a:pPr marL="0" indent="0" algn="l">
               <a:buNone/>
             </a:pPr>
             <a:r>
@@ -13664,7 +13416,7 @@
             <a:prstDash val="solid"/>
           </a:ln>
           <a:effectLst>
-            <a:outerShdw sx="100000" sy="100000" kx="0" ky="0" algn="bl" rotWithShape="0" blurRad="101600" dist="38100" dir="8100000">
+            <a:outerShdw blurRad="101600" dist="38100" dir="8100000" algn="bl" rotWithShape="0">
               <a:srgbClr val="000000">
                 <a:alpha val="25000"/>
               </a:srgbClr>
@@ -13693,7 +13445,7 @@
           <a:bodyPr wrap="square" lIns="0" tIns="0" rIns="0" bIns="0" rtlCol="0" anchor="ctr"/>
           <a:lstStyle/>
           <a:p>
-            <a:pPr algn="ctr" indent="0" marL="0">
+            <a:pPr marL="0" indent="0" algn="ctr">
               <a:buNone/>
             </a:pPr>
             <a:r>
@@ -13732,7 +13484,7 @@
           <a:bodyPr wrap="square" lIns="0" tIns="0" rIns="0" bIns="0" rtlCol="0" anchor="ctr"/>
           <a:lstStyle/>
           <a:p>
-            <a:pPr algn="l" indent="0" marL="0">
+            <a:pPr marL="0" indent="0" algn="l">
               <a:buNone/>
             </a:pPr>
             <a:r>
@@ -13771,7 +13523,7 @@
           <a:bodyPr wrap="square" lIns="0" tIns="0" rIns="0" bIns="0" rtlCol="0" anchor="t"/>
           <a:lstStyle/>
           <a:p>
-            <a:pPr algn="l" indent="0" marL="0">
+            <a:pPr marL="0" indent="0" algn="l">
               <a:buNone/>
             </a:pPr>
             <a:r>
@@ -13836,7 +13588,7 @@
             <a:prstDash val="solid"/>
           </a:ln>
           <a:effectLst>
-            <a:outerShdw sx="100000" sy="100000" kx="0" ky="0" algn="bl" rotWithShape="0" blurRad="101600" dist="38100" dir="8100000">
+            <a:outerShdw blurRad="101600" dist="38100" dir="8100000" algn="bl" rotWithShape="0">
               <a:srgbClr val="000000">
                 <a:alpha val="25000"/>
               </a:srgbClr>
@@ -13865,7 +13617,7 @@
           <a:bodyPr wrap="square" lIns="0" tIns="0" rIns="0" bIns="0" rtlCol="0" anchor="ctr"/>
           <a:lstStyle/>
           <a:p>
-            <a:pPr algn="ctr" indent="0" marL="0">
+            <a:pPr marL="0" indent="0" algn="ctr">
               <a:buNone/>
             </a:pPr>
             <a:r>
@@ -13904,7 +13656,7 @@
           <a:bodyPr wrap="square" lIns="0" tIns="0" rIns="0" bIns="0" rtlCol="0" anchor="ctr"/>
           <a:lstStyle/>
           <a:p>
-            <a:pPr algn="l" indent="0" marL="0">
+            <a:pPr marL="0" indent="0" algn="l">
               <a:buNone/>
             </a:pPr>
             <a:r>
@@ -13943,7 +13695,7 @@
           <a:bodyPr wrap="square" lIns="0" tIns="0" rIns="0" bIns="0" rtlCol="0" anchor="t"/>
           <a:lstStyle/>
           <a:p>
-            <a:pPr algn="l" indent="0" marL="0">
+            <a:pPr marL="0" indent="0" algn="l">
               <a:buNone/>
             </a:pPr>
             <a:r>
@@ -13985,7 +13737,7 @@
             <a:prstDash val="solid"/>
           </a:ln>
           <a:effectLst>
-            <a:outerShdw sx="100000" sy="100000" kx="0" ky="0" algn="bl" rotWithShape="0" blurRad="101600" dist="38100" dir="8100000">
+            <a:outerShdw blurRad="101600" dist="38100" dir="8100000" algn="bl" rotWithShape="0">
               <a:srgbClr val="000000">
                 <a:alpha val="25000"/>
               </a:srgbClr>
@@ -14014,7 +13766,7 @@
           <a:bodyPr wrap="square" lIns="0" tIns="0" rIns="0" bIns="0" rtlCol="0" anchor="ctr"/>
           <a:lstStyle/>
           <a:p>
-            <a:pPr algn="ctr" indent="0" marL="0">
+            <a:pPr marL="0" indent="0" algn="ctr">
               <a:buNone/>
             </a:pPr>
             <a:r>
@@ -14053,7 +13805,7 @@
           <a:bodyPr wrap="square" lIns="0" tIns="0" rIns="0" bIns="0" rtlCol="0" anchor="ctr"/>
           <a:lstStyle/>
           <a:p>
-            <a:pPr algn="l" indent="0" marL="0">
+            <a:pPr marL="0" indent="0" algn="l">
               <a:buNone/>
             </a:pPr>
             <a:r>
@@ -14092,7 +13844,7 @@
           <a:bodyPr wrap="square" lIns="0" tIns="0" rIns="0" bIns="0" rtlCol="0" anchor="t"/>
           <a:lstStyle/>
           <a:p>
-            <a:pPr algn="l" indent="0" marL="0">
+            <a:pPr marL="0" indent="0" algn="l">
               <a:buNone/>
             </a:pPr>
             <a:r>
@@ -14157,7 +13909,7 @@
             <a:prstDash val="solid"/>
           </a:ln>
           <a:effectLst>
-            <a:outerShdw sx="100000" sy="100000" kx="0" ky="0" algn="bl" rotWithShape="0" blurRad="101600" dist="38100" dir="8100000">
+            <a:outerShdw blurRad="101600" dist="38100" dir="8100000" algn="bl" rotWithShape="0">
               <a:srgbClr val="000000">
                 <a:alpha val="25000"/>
               </a:srgbClr>
@@ -14186,7 +13938,7 @@
           <a:bodyPr wrap="square" lIns="0" tIns="0" rIns="0" bIns="0" rtlCol="0" anchor="ctr"/>
           <a:lstStyle/>
           <a:p>
-            <a:pPr algn="ctr" indent="0" marL="0">
+            <a:pPr marL="0" indent="0" algn="ctr">
               <a:buNone/>
             </a:pPr>
             <a:r>
@@ -14225,7 +13977,7 @@
           <a:bodyPr wrap="square" lIns="0" tIns="0" rIns="0" bIns="0" rtlCol="0" anchor="ctr"/>
           <a:lstStyle/>
           <a:p>
-            <a:pPr algn="l" indent="0" marL="0">
+            <a:pPr marL="0" indent="0" algn="l">
               <a:buNone/>
             </a:pPr>
             <a:r>
@@ -14264,7 +14016,7 @@
           <a:bodyPr wrap="square" lIns="0" tIns="0" rIns="0" bIns="0" rtlCol="0" anchor="t"/>
           <a:lstStyle/>
           <a:p>
-            <a:pPr algn="l" indent="0" marL="0">
+            <a:pPr marL="0" indent="0" algn="l">
               <a:buNone/>
             </a:pPr>
             <a:r>
@@ -14329,7 +14081,7 @@
             <a:prstDash val="solid"/>
           </a:ln>
           <a:effectLst>
-            <a:outerShdw sx="100000" sy="100000" kx="0" ky="0" algn="bl" rotWithShape="0" blurRad="101600" dist="38100" dir="8100000">
+            <a:outerShdw blurRad="101600" dist="38100" dir="8100000" algn="bl" rotWithShape="0">
               <a:srgbClr val="000000">
                 <a:alpha val="25000"/>
               </a:srgbClr>
@@ -14358,7 +14110,7 @@
           <a:bodyPr wrap="square" lIns="0" tIns="0" rIns="0" bIns="0" rtlCol="0" anchor="ctr"/>
           <a:lstStyle/>
           <a:p>
-            <a:pPr algn="ctr" indent="0" marL="0">
+            <a:pPr marL="0" indent="0" algn="ctr">
               <a:buNone/>
             </a:pPr>
             <a:r>
@@ -14397,7 +14149,7 @@
           <a:bodyPr wrap="square" lIns="0" tIns="0" rIns="0" bIns="0" rtlCol="0" anchor="ctr"/>
           <a:lstStyle/>
           <a:p>
-            <a:pPr algn="l" indent="0" marL="0">
+            <a:pPr marL="0" indent="0" algn="l">
               <a:buNone/>
             </a:pPr>
             <a:r>
@@ -14436,7 +14188,7 @@
           <a:bodyPr wrap="square" lIns="0" tIns="0" rIns="0" bIns="0" rtlCol="0" anchor="t"/>
           <a:lstStyle/>
           <a:p>
-            <a:pPr algn="l" indent="0" marL="0">
+            <a:pPr marL="0" indent="0" algn="l">
               <a:buNone/>
             </a:pPr>
             <a:r>
@@ -14478,7 +14230,7 @@
             <a:prstDash val="solid"/>
           </a:ln>
           <a:effectLst>
-            <a:outerShdw sx="100000" sy="100000" kx="0" ky="0" algn="bl" rotWithShape="0" blurRad="101600" dist="38100" dir="8100000">
+            <a:outerShdw blurRad="101600" dist="38100" dir="8100000" algn="bl" rotWithShape="0">
               <a:srgbClr val="000000">
                 <a:alpha val="25000"/>
               </a:srgbClr>
@@ -14507,7 +14259,7 @@
           <a:bodyPr wrap="square" lIns="0" tIns="0" rIns="0" bIns="0" rtlCol="0" anchor="t"/>
           <a:lstStyle/>
           <a:p>
-            <a:pPr algn="ctr" indent="0" marL="0">
+            <a:pPr marL="0" indent="0" algn="ctr">
               <a:buNone/>
             </a:pPr>
             <a:r>
@@ -14546,7 +14298,7 @@
           <a:bodyPr wrap="square" lIns="0" tIns="0" rIns="0" bIns="0" rtlCol="0" anchor="t"/>
           <a:lstStyle/>
           <a:p>
-            <a:pPr algn="r" indent="0" marL="0">
+            <a:pPr marL="0" indent="0" algn="r">
               <a:buNone/>
             </a:pPr>
             <a:r>
@@ -14580,6 +14332,7 @@
         <a:solidFill>
           <a:srgbClr val="0A0E1A"/>
         </a:solidFill>
+        <a:effectLst/>
       </p:bgPr>
     </p:bg>
     <p:spTree>
@@ -14669,7 +14422,7 @@
           <a:bodyPr wrap="square" lIns="0" tIns="0" rIns="0" bIns="0" rtlCol="0" anchor="ctr"/>
           <a:lstStyle/>
           <a:p>
-            <a:pPr algn="ctr" indent="0" marL="0">
+            <a:pPr marL="0" indent="0" algn="ctr">
               <a:buNone/>
             </a:pPr>
             <a:r>
@@ -14708,7 +14461,7 @@
           <a:bodyPr wrap="square" lIns="0" tIns="0" rIns="0" bIns="0" rtlCol="0" anchor="ctr"/>
           <a:lstStyle/>
           <a:p>
-            <a:pPr algn="l" indent="0" marL="0">
+            <a:pPr marL="0" indent="0" algn="l">
               <a:buNone/>
             </a:pPr>
             <a:r>
@@ -14747,7 +14500,7 @@
           <a:bodyPr wrap="square" lIns="0" tIns="0" rIns="0" bIns="0" rtlCol="0" anchor="t"/>
           <a:lstStyle/>
           <a:p>
-            <a:pPr algn="l" indent="0" marL="0">
+            <a:pPr marL="0" indent="0" algn="l">
               <a:buNone/>
             </a:pPr>
             <a:r>
@@ -14789,7 +14542,7 @@
             <a:prstDash val="solid"/>
           </a:ln>
           <a:effectLst>
-            <a:outerShdw sx="100000" sy="100000" kx="0" ky="0" algn="bl" rotWithShape="0" blurRad="101600" dist="38100" dir="8100000">
+            <a:outerShdw blurRad="101600" dist="38100" dir="8100000" algn="bl" rotWithShape="0">
               <a:srgbClr val="000000">
                 <a:alpha val="25000"/>
               </a:srgbClr>
@@ -14843,7 +14596,7 @@
           <a:bodyPr wrap="square" lIns="0" tIns="0" rIns="0" bIns="0" rtlCol="0" anchor="ctr"/>
           <a:lstStyle/>
           <a:p>
-            <a:pPr algn="l" indent="0" marL="0">
+            <a:pPr marL="0" indent="0" algn="l">
               <a:buNone/>
             </a:pPr>
             <a:r>
@@ -14882,7 +14635,7 @@
           <a:bodyPr wrap="square" lIns="0" tIns="0" rIns="0" bIns="0" rtlCol="0" anchor="t"/>
           <a:lstStyle/>
           <a:p>
-            <a:pPr algn="l" indent="0" marL="0">
+            <a:pPr marL="0" indent="0" algn="l">
               <a:buNone/>
             </a:pPr>
             <a:r>
@@ -14924,7 +14677,7 @@
             <a:prstDash val="solid"/>
           </a:ln>
           <a:effectLst>
-            <a:outerShdw sx="100000" sy="100000" kx="0" ky="0" algn="bl" rotWithShape="0" blurRad="101600" dist="38100" dir="8100000">
+            <a:outerShdw blurRad="101600" dist="38100" dir="8100000" algn="bl" rotWithShape="0">
               <a:srgbClr val="000000">
                 <a:alpha val="25000"/>
               </a:srgbClr>
@@ -14978,7 +14731,7 @@
           <a:bodyPr wrap="square" lIns="0" tIns="0" rIns="0" bIns="0" rtlCol="0" anchor="ctr"/>
           <a:lstStyle/>
           <a:p>
-            <a:pPr algn="l" indent="0" marL="0">
+            <a:pPr marL="0" indent="0" algn="l">
               <a:buNone/>
             </a:pPr>
             <a:r>
@@ -15017,7 +14770,7 @@
           <a:bodyPr wrap="square" lIns="0" tIns="0" rIns="0" bIns="0" rtlCol="0" anchor="t"/>
           <a:lstStyle/>
           <a:p>
-            <a:pPr algn="l" indent="0" marL="0">
+            <a:pPr marL="0" indent="0" algn="l">
               <a:buNone/>
             </a:pPr>
             <a:r>
@@ -15059,7 +14812,7 @@
             <a:prstDash val="solid"/>
           </a:ln>
           <a:effectLst>
-            <a:outerShdw sx="100000" sy="100000" kx="0" ky="0" algn="bl" rotWithShape="0" blurRad="101600" dist="38100" dir="8100000">
+            <a:outerShdw blurRad="101600" dist="38100" dir="8100000" algn="bl" rotWithShape="0">
               <a:srgbClr val="000000">
                 <a:alpha val="25000"/>
               </a:srgbClr>
@@ -15113,7 +14866,7 @@
           <a:bodyPr wrap="square" lIns="0" tIns="0" rIns="0" bIns="0" rtlCol="0" anchor="ctr"/>
           <a:lstStyle/>
           <a:p>
-            <a:pPr algn="l" indent="0" marL="0">
+            <a:pPr marL="0" indent="0" algn="l">
               <a:buNone/>
             </a:pPr>
             <a:r>
@@ -15152,7 +14905,7 @@
           <a:bodyPr wrap="square" lIns="0" tIns="0" rIns="0" bIns="0" rtlCol="0" anchor="t"/>
           <a:lstStyle/>
           <a:p>
-            <a:pPr algn="l" indent="0" marL="0">
+            <a:pPr marL="0" indent="0" algn="l">
               <a:buNone/>
             </a:pPr>
             <a:r>
@@ -15194,7 +14947,7 @@
             <a:prstDash val="solid"/>
           </a:ln>
           <a:effectLst>
-            <a:outerShdw sx="100000" sy="100000" kx="0" ky="0" algn="bl" rotWithShape="0" blurRad="101600" dist="38100" dir="8100000">
+            <a:outerShdw blurRad="101600" dist="38100" dir="8100000" algn="bl" rotWithShape="0">
               <a:srgbClr val="000000">
                 <a:alpha val="25000"/>
               </a:srgbClr>
@@ -15248,7 +15001,7 @@
           <a:bodyPr wrap="square" lIns="0" tIns="0" rIns="0" bIns="0" rtlCol="0" anchor="ctr"/>
           <a:lstStyle/>
           <a:p>
-            <a:pPr algn="l" indent="0" marL="0">
+            <a:pPr marL="0" indent="0" algn="l">
               <a:buNone/>
             </a:pPr>
             <a:r>
@@ -15287,7 +15040,7 @@
           <a:bodyPr wrap="square" lIns="0" tIns="0" rIns="0" bIns="0" rtlCol="0" anchor="t"/>
           <a:lstStyle/>
           <a:p>
-            <a:pPr algn="l" indent="0" marL="0">
+            <a:pPr marL="0" indent="0" algn="l">
               <a:buNone/>
             </a:pPr>
             <a:r>
@@ -15307,13 +15060,13 @@
       </p:sp>
       <p:sp>
         <p:nvSpPr>
-          <p:cNvPr id="23" name="Shape 21"/>
-          <p:cNvSpPr/>
-          <p:nvPr/>
-        </p:nvSpPr>
-        <p:spPr>
-          <a:xfrm>
-            <a:off x="320040" y="4187952"/>
+          <p:cNvPr id="27" name="Shape 25"/>
+          <p:cNvSpPr/>
+          <p:nvPr/>
+        </p:nvSpPr>
+        <p:spPr>
+          <a:xfrm>
+            <a:off x="4754880" y="1554480"/>
             <a:ext cx="4114800" cy="566928"/>
           </a:xfrm>
           <a:prstGeom prst="rect">
@@ -15329,7 +15082,7 @@
             <a:prstDash val="solid"/>
           </a:ln>
           <a:effectLst>
-            <a:outerShdw sx="100000" sy="100000" kx="0" ky="0" algn="bl" rotWithShape="0" blurRad="101600" dist="38100" dir="8100000">
+            <a:outerShdw blurRad="101600" dist="38100" dir="8100000" algn="bl" rotWithShape="0">
               <a:srgbClr val="000000">
                 <a:alpha val="25000"/>
               </a:srgbClr>
@@ -15339,13 +15092,13 @@
       </p:sp>
       <p:sp>
         <p:nvSpPr>
-          <p:cNvPr id="24" name="Shape 22"/>
-          <p:cNvSpPr/>
-          <p:nvPr/>
-        </p:nvSpPr>
-        <p:spPr>
-          <a:xfrm>
-            <a:off x="320040" y="4187952"/>
+          <p:cNvPr id="28" name="Shape 26"/>
+          <p:cNvSpPr/>
+          <p:nvPr/>
+        </p:nvSpPr>
+        <p:spPr>
+          <a:xfrm>
+            <a:off x="4754880" y="1554480"/>
             <a:ext cx="54864" cy="566928"/>
           </a:xfrm>
           <a:prstGeom prst="rect">
@@ -15364,13 +15117,13 @@
       </p:sp>
       <p:sp>
         <p:nvSpPr>
-          <p:cNvPr id="25" name="Text 23"/>
-          <p:cNvSpPr/>
-          <p:nvPr/>
-        </p:nvSpPr>
-        <p:spPr>
-          <a:xfrm>
-            <a:off x="484632" y="4224528"/>
+          <p:cNvPr id="29" name="Text 27"/>
+          <p:cNvSpPr/>
+          <p:nvPr/>
+        </p:nvSpPr>
+        <p:spPr>
+          <a:xfrm>
+            <a:off x="4919472" y="1591056"/>
             <a:ext cx="3840480" cy="237744"/>
           </a:xfrm>
           <a:prstGeom prst="rect">
@@ -15383,7 +15136,7 @@
           <a:bodyPr wrap="square" lIns="0" tIns="0" rIns="0" bIns="0" rtlCol="0" anchor="ctr"/>
           <a:lstStyle/>
           <a:p>
-            <a:pPr algn="l" indent="0" marL="0">
+            <a:pPr marL="0" indent="0" algn="l">
               <a:buNone/>
             </a:pPr>
             <a:r>
@@ -15395,7 +15148,7 @@
                 <a:ea typeface="Trebuchet MS" pitchFamily="34" charset="-122"/>
                 <a:cs typeface="Trebuchet MS" pitchFamily="34" charset="-120"/>
               </a:rPr>
-              <a:t>No Stock Search</a:t>
+              <a:t>No Historical Charts</a:t>
             </a:r>
             <a:endParaRPr lang="en-US" sz="1200" dirty="0"/>
           </a:p>
@@ -15403,13 +15156,13 @@
       </p:sp>
       <p:sp>
         <p:nvSpPr>
-          <p:cNvPr id="26" name="Text 24"/>
-          <p:cNvSpPr/>
-          <p:nvPr/>
-        </p:nvSpPr>
-        <p:spPr>
-          <a:xfrm>
-            <a:off x="484632" y="4480560"/>
+          <p:cNvPr id="30" name="Text 28"/>
+          <p:cNvSpPr/>
+          <p:nvPr/>
+        </p:nvSpPr>
+        <p:spPr>
+          <a:xfrm>
+            <a:off x="4919472" y="1847088"/>
             <a:ext cx="3840480" cy="256032"/>
           </a:xfrm>
           <a:prstGeom prst="rect">
@@ -15422,7 +15175,7 @@
           <a:bodyPr wrap="square" lIns="0" tIns="0" rIns="0" bIns="0" rtlCol="0" anchor="t"/>
           <a:lstStyle/>
           <a:p>
-            <a:pPr algn="l" indent="0" marL="0">
+            <a:pPr marL="0" indent="0" algn="l">
               <a:buNone/>
             </a:pPr>
             <a:r>
@@ -15434,7 +15187,7 @@
                 <a:ea typeface="Calibri" pitchFamily="34" charset="-122"/>
                 <a:cs typeface="Calibri" pitchFamily="34" charset="-120"/>
               </a:rPr>
-              <a:t>Cannot search arbitrary NSE symbols, only predefined stocks work</a:t>
+              <a:t>Only today intraday chart, no weekly, monthly or yearly view</a:t>
             </a:r>
             <a:endParaRPr lang="en-US" sz="1000" dirty="0"/>
           </a:p>
@@ -15442,13 +15195,13 @@
       </p:sp>
       <p:sp>
         <p:nvSpPr>
-          <p:cNvPr id="27" name="Shape 25"/>
-          <p:cNvSpPr/>
-          <p:nvPr/>
-        </p:nvSpPr>
-        <p:spPr>
-          <a:xfrm>
-            <a:off x="4754880" y="1554480"/>
+          <p:cNvPr id="31" name="Shape 29"/>
+          <p:cNvSpPr/>
+          <p:nvPr/>
+        </p:nvSpPr>
+        <p:spPr>
+          <a:xfrm>
+            <a:off x="4754880" y="2212848"/>
             <a:ext cx="4114800" cy="566928"/>
           </a:xfrm>
           <a:prstGeom prst="rect">
@@ -15464,7 +15217,7 @@
             <a:prstDash val="solid"/>
           </a:ln>
           <a:effectLst>
-            <a:outerShdw sx="100000" sy="100000" kx="0" ky="0" algn="bl" rotWithShape="0" blurRad="101600" dist="38100" dir="8100000">
+            <a:outerShdw blurRad="101600" dist="38100" dir="8100000" algn="bl" rotWithShape="0">
               <a:srgbClr val="000000">
                 <a:alpha val="25000"/>
               </a:srgbClr>
@@ -15474,13 +15227,13 @@
       </p:sp>
       <p:sp>
         <p:nvSpPr>
-          <p:cNvPr id="28" name="Shape 26"/>
-          <p:cNvSpPr/>
-          <p:nvPr/>
-        </p:nvSpPr>
-        <p:spPr>
-          <a:xfrm>
-            <a:off x="4754880" y="1554480"/>
+          <p:cNvPr id="32" name="Shape 30"/>
+          <p:cNvSpPr/>
+          <p:nvPr/>
+        </p:nvSpPr>
+        <p:spPr>
+          <a:xfrm>
+            <a:off x="4754880" y="2212848"/>
             <a:ext cx="54864" cy="566928"/>
           </a:xfrm>
           <a:prstGeom prst="rect">
@@ -15499,13 +15252,13 @@
       </p:sp>
       <p:sp>
         <p:nvSpPr>
-          <p:cNvPr id="29" name="Text 27"/>
-          <p:cNvSpPr/>
-          <p:nvPr/>
-        </p:nvSpPr>
-        <p:spPr>
-          <a:xfrm>
-            <a:off x="4919472" y="1591056"/>
+          <p:cNvPr id="33" name="Text 31"/>
+          <p:cNvSpPr/>
+          <p:nvPr/>
+        </p:nvSpPr>
+        <p:spPr>
+          <a:xfrm>
+            <a:off x="4919472" y="2249424"/>
             <a:ext cx="3840480" cy="237744"/>
           </a:xfrm>
           <a:prstGeom prst="rect">
@@ -15518,7 +15271,7 @@
           <a:bodyPr wrap="square" lIns="0" tIns="0" rIns="0" bIns="0" rtlCol="0" anchor="ctr"/>
           <a:lstStyle/>
           <a:p>
-            <a:pPr algn="l" indent="0" marL="0">
+            <a:pPr marL="0" indent="0" algn="l">
               <a:buNone/>
             </a:pPr>
             <a:r>
@@ -15530,7 +15283,7 @@
                 <a:ea typeface="Trebuchet MS" pitchFamily="34" charset="-122"/>
                 <a:cs typeface="Trebuchet MS" pitchFamily="34" charset="-120"/>
               </a:rPr>
-              <a:t>No Historical Charts</a:t>
+              <a:t>No F&amp;O or IPO Section</a:t>
             </a:r>
             <a:endParaRPr lang="en-US" sz="1200" dirty="0"/>
           </a:p>
@@ -15538,13 +15291,13 @@
       </p:sp>
       <p:sp>
         <p:nvSpPr>
-          <p:cNvPr id="30" name="Text 28"/>
-          <p:cNvSpPr/>
-          <p:nvPr/>
-        </p:nvSpPr>
-        <p:spPr>
-          <a:xfrm>
-            <a:off x="4919472" y="1847088"/>
+          <p:cNvPr id="34" name="Text 32"/>
+          <p:cNvSpPr/>
+          <p:nvPr/>
+        </p:nvSpPr>
+        <p:spPr>
+          <a:xfrm>
+            <a:off x="4919472" y="2505456"/>
             <a:ext cx="3840480" cy="256032"/>
           </a:xfrm>
           <a:prstGeom prst="rect">
@@ -15557,7 +15310,7 @@
           <a:bodyPr wrap="square" lIns="0" tIns="0" rIns="0" bIns="0" rtlCol="0" anchor="t"/>
           <a:lstStyle/>
           <a:p>
-            <a:pPr algn="l" indent="0" marL="0">
+            <a:pPr marL="0" indent="0" algn="l">
               <a:buNone/>
             </a:pPr>
             <a:r>
@@ -15569,7 +15322,7 @@
                 <a:ea typeface="Calibri" pitchFamily="34" charset="-122"/>
                 <a:cs typeface="Calibri" pitchFamily="34" charset="-120"/>
               </a:rPr>
-              <a:t>Only today intraday chart, no weekly, monthly or yearly view</a:t>
+              <a:t>No options chain, futures, upcoming IPOs or stock filters</a:t>
             </a:r>
             <a:endParaRPr lang="en-US" sz="1000" dirty="0"/>
           </a:p>
@@ -15577,13 +15330,13 @@
       </p:sp>
       <p:sp>
         <p:nvSpPr>
-          <p:cNvPr id="31" name="Shape 29"/>
-          <p:cNvSpPr/>
-          <p:nvPr/>
-        </p:nvSpPr>
-        <p:spPr>
-          <a:xfrm>
-            <a:off x="4754880" y="2212848"/>
+          <p:cNvPr id="35" name="Shape 33"/>
+          <p:cNvSpPr/>
+          <p:nvPr/>
+        </p:nvSpPr>
+        <p:spPr>
+          <a:xfrm>
+            <a:off x="4754880" y="2871216"/>
             <a:ext cx="4114800" cy="566928"/>
           </a:xfrm>
           <a:prstGeom prst="rect">
@@ -15599,7 +15352,7 @@
             <a:prstDash val="solid"/>
           </a:ln>
           <a:effectLst>
-            <a:outerShdw sx="100000" sy="100000" kx="0" ky="0" algn="bl" rotWithShape="0" blurRad="101600" dist="38100" dir="8100000">
+            <a:outerShdw blurRad="101600" dist="38100" dir="8100000" algn="bl" rotWithShape="0">
               <a:srgbClr val="000000">
                 <a:alpha val="25000"/>
               </a:srgbClr>
@@ -15609,13 +15362,13 @@
       </p:sp>
       <p:sp>
         <p:nvSpPr>
-          <p:cNvPr id="32" name="Shape 30"/>
-          <p:cNvSpPr/>
-          <p:nvPr/>
-        </p:nvSpPr>
-        <p:spPr>
-          <a:xfrm>
-            <a:off x="4754880" y="2212848"/>
+          <p:cNvPr id="36" name="Shape 34"/>
+          <p:cNvSpPr/>
+          <p:nvPr/>
+        </p:nvSpPr>
+        <p:spPr>
+          <a:xfrm>
+            <a:off x="4754880" y="2871216"/>
             <a:ext cx="54864" cy="566928"/>
           </a:xfrm>
           <a:prstGeom prst="rect">
@@ -15634,13 +15387,13 @@
       </p:sp>
       <p:sp>
         <p:nvSpPr>
-          <p:cNvPr id="33" name="Text 31"/>
-          <p:cNvSpPr/>
-          <p:nvPr/>
-        </p:nvSpPr>
-        <p:spPr>
-          <a:xfrm>
-            <a:off x="4919472" y="2249424"/>
+          <p:cNvPr id="37" name="Text 35"/>
+          <p:cNvSpPr/>
+          <p:nvPr/>
+        </p:nvSpPr>
+        <p:spPr>
+          <a:xfrm>
+            <a:off x="4919472" y="2907792"/>
             <a:ext cx="3840480" cy="237744"/>
           </a:xfrm>
           <a:prstGeom prst="rect">
@@ -15653,7 +15406,7 @@
           <a:bodyPr wrap="square" lIns="0" tIns="0" rIns="0" bIns="0" rtlCol="0" anchor="ctr"/>
           <a:lstStyle/>
           <a:p>
-            <a:pPr algn="l" indent="0" marL="0">
+            <a:pPr marL="0" indent="0" algn="l">
               <a:buNone/>
             </a:pPr>
             <a:r>
@@ -15665,7 +15418,7 @@
                 <a:ea typeface="Trebuchet MS" pitchFamily="34" charset="-122"/>
                 <a:cs typeface="Trebuchet MS" pitchFamily="34" charset="-120"/>
               </a:rPr>
-              <a:t>No F&amp;O or IPO Section</a:t>
+              <a:t>Calculator Results Lost</a:t>
             </a:r>
             <a:endParaRPr lang="en-US" sz="1200" dirty="0"/>
           </a:p>
@@ -15673,13 +15426,13 @@
       </p:sp>
       <p:sp>
         <p:nvSpPr>
-          <p:cNvPr id="34" name="Text 32"/>
-          <p:cNvSpPr/>
-          <p:nvPr/>
-        </p:nvSpPr>
-        <p:spPr>
-          <a:xfrm>
-            <a:off x="4919472" y="2505456"/>
+          <p:cNvPr id="38" name="Text 36"/>
+          <p:cNvSpPr/>
+          <p:nvPr/>
+        </p:nvSpPr>
+        <p:spPr>
+          <a:xfrm>
+            <a:off x="4919472" y="3163824"/>
             <a:ext cx="3840480" cy="256032"/>
           </a:xfrm>
           <a:prstGeom prst="rect">
@@ -15692,7 +15445,7 @@
           <a:bodyPr wrap="square" lIns="0" tIns="0" rIns="0" bIns="0" rtlCol="0" anchor="t"/>
           <a:lstStyle/>
           <a:p>
-            <a:pPr algn="l" indent="0" marL="0">
+            <a:pPr marL="0" indent="0" algn="l">
               <a:buNone/>
             </a:pPr>
             <a:r>
@@ -15704,7 +15457,7 @@
                 <a:ea typeface="Calibri" pitchFamily="34" charset="-122"/>
                 <a:cs typeface="Calibri" pitchFamily="34" charset="-120"/>
               </a:rPr>
-              <a:t>No options chain, futures, upcoming IPOs or stock filters</a:t>
+              <a:t>All inputs are cleared when the page is refreshed</a:t>
             </a:r>
             <a:endParaRPr lang="en-US" sz="1000" dirty="0"/>
           </a:p>
@@ -15712,13 +15465,13 @@
       </p:sp>
       <p:sp>
         <p:nvSpPr>
-          <p:cNvPr id="35" name="Shape 33"/>
-          <p:cNvSpPr/>
-          <p:nvPr/>
-        </p:nvSpPr>
-        <p:spPr>
-          <a:xfrm>
-            <a:off x="4754880" y="2871216"/>
+          <p:cNvPr id="39" name="Shape 37"/>
+          <p:cNvSpPr/>
+          <p:nvPr/>
+        </p:nvSpPr>
+        <p:spPr>
+          <a:xfrm>
+            <a:off x="4754880" y="3529584"/>
             <a:ext cx="4114800" cy="566928"/>
           </a:xfrm>
           <a:prstGeom prst="rect">
@@ -15734,7 +15487,7 @@
             <a:prstDash val="solid"/>
           </a:ln>
           <a:effectLst>
-            <a:outerShdw sx="100000" sy="100000" kx="0" ky="0" algn="bl" rotWithShape="0" blurRad="101600" dist="38100" dir="8100000">
+            <a:outerShdw blurRad="101600" dist="38100" dir="8100000" algn="bl" rotWithShape="0">
               <a:srgbClr val="000000">
                 <a:alpha val="25000"/>
               </a:srgbClr>
@@ -15744,13 +15497,13 @@
       </p:sp>
       <p:sp>
         <p:nvSpPr>
-          <p:cNvPr id="36" name="Shape 34"/>
-          <p:cNvSpPr/>
-          <p:nvPr/>
-        </p:nvSpPr>
-        <p:spPr>
-          <a:xfrm>
-            <a:off x="4754880" y="2871216"/>
+          <p:cNvPr id="40" name="Shape 38"/>
+          <p:cNvSpPr/>
+          <p:nvPr/>
+        </p:nvSpPr>
+        <p:spPr>
+          <a:xfrm>
+            <a:off x="4754880" y="3529584"/>
             <a:ext cx="54864" cy="566928"/>
           </a:xfrm>
           <a:prstGeom prst="rect">
@@ -15769,13 +15522,13 @@
       </p:sp>
       <p:sp>
         <p:nvSpPr>
-          <p:cNvPr id="37" name="Text 35"/>
-          <p:cNvSpPr/>
-          <p:nvPr/>
-        </p:nvSpPr>
-        <p:spPr>
-          <a:xfrm>
-            <a:off x="4919472" y="2907792"/>
+          <p:cNvPr id="41" name="Text 39"/>
+          <p:cNvSpPr/>
+          <p:nvPr/>
+        </p:nvSpPr>
+        <p:spPr>
+          <a:xfrm>
+            <a:off x="4919472" y="3566160"/>
             <a:ext cx="3840480" cy="237744"/>
           </a:xfrm>
           <a:prstGeom prst="rect">
@@ -15788,7 +15541,7 @@
           <a:bodyPr wrap="square" lIns="0" tIns="0" rIns="0" bIns="0" rtlCol="0" anchor="ctr"/>
           <a:lstStyle/>
           <a:p>
-            <a:pPr algn="l" indent="0" marL="0">
+            <a:pPr marL="0" indent="0" algn="l">
               <a:buNone/>
             </a:pPr>
             <a:r>
@@ -15800,7 +15553,7 @@
                 <a:ea typeface="Trebuchet MS" pitchFamily="34" charset="-122"/>
                 <a:cs typeface="Trebuchet MS" pitchFamily="34" charset="-120"/>
               </a:rPr>
-              <a:t>Calculator Results Lost</a:t>
+              <a:t>Cache Resets on Restart</a:t>
             </a:r>
             <a:endParaRPr lang="en-US" sz="1200" dirty="0"/>
           </a:p>
@@ -15808,13 +15561,13 @@
       </p:sp>
       <p:sp>
         <p:nvSpPr>
-          <p:cNvPr id="38" name="Text 36"/>
-          <p:cNvSpPr/>
-          <p:nvPr/>
-        </p:nvSpPr>
-        <p:spPr>
-          <a:xfrm>
-            <a:off x="4919472" y="3163824"/>
+          <p:cNvPr id="42" name="Text 40"/>
+          <p:cNvSpPr/>
+          <p:nvPr/>
+        </p:nvSpPr>
+        <p:spPr>
+          <a:xfrm>
+            <a:off x="4919472" y="3822192"/>
             <a:ext cx="3840480" cy="256032"/>
           </a:xfrm>
           <a:prstGeom prst="rect">
@@ -15827,7 +15580,7 @@
           <a:bodyPr wrap="square" lIns="0" tIns="0" rIns="0" bIns="0" rtlCol="0" anchor="t"/>
           <a:lstStyle/>
           <a:p>
-            <a:pPr algn="l" indent="0" marL="0">
+            <a:pPr marL="0" indent="0" algn="l">
               <a:buNone/>
             </a:pPr>
             <a:r>
@@ -15839,7 +15592,7 @@
                 <a:ea typeface="Calibri" pitchFamily="34" charset="-122"/>
                 <a:cs typeface="Calibri" pitchFamily="34" charset="-120"/>
               </a:rPr>
-              <a:t>All inputs are cleared when the page is refreshed</a:t>
+              <a:t>In-memory cache is lost on every server restart or redeploy</a:t>
             </a:r>
             <a:endParaRPr lang="en-US" sz="1000" dirty="0"/>
           </a:p>
@@ -15847,13 +15600,13 @@
       </p:sp>
       <p:sp>
         <p:nvSpPr>
-          <p:cNvPr id="39" name="Shape 37"/>
-          <p:cNvSpPr/>
-          <p:nvPr/>
-        </p:nvSpPr>
-        <p:spPr>
-          <a:xfrm>
-            <a:off x="4754880" y="3529584"/>
+          <p:cNvPr id="43" name="Shape 41"/>
+          <p:cNvSpPr/>
+          <p:nvPr/>
+        </p:nvSpPr>
+        <p:spPr>
+          <a:xfrm>
+            <a:off x="4754880" y="4187952"/>
             <a:ext cx="4114800" cy="566928"/>
           </a:xfrm>
           <a:prstGeom prst="rect">
@@ -15869,7 +15622,7 @@
             <a:prstDash val="solid"/>
           </a:ln>
           <a:effectLst>
-            <a:outerShdw sx="100000" sy="100000" kx="0" ky="0" algn="bl" rotWithShape="0" blurRad="101600" dist="38100" dir="8100000">
+            <a:outerShdw blurRad="101600" dist="38100" dir="8100000" algn="bl" rotWithShape="0">
               <a:srgbClr val="000000">
                 <a:alpha val="25000"/>
               </a:srgbClr>
@@ -15879,13 +15632,13 @@
       </p:sp>
       <p:sp>
         <p:nvSpPr>
-          <p:cNvPr id="40" name="Shape 38"/>
-          <p:cNvSpPr/>
-          <p:nvPr/>
-        </p:nvSpPr>
-        <p:spPr>
-          <a:xfrm>
-            <a:off x="4754880" y="3529584"/>
+          <p:cNvPr id="44" name="Shape 42"/>
+          <p:cNvSpPr/>
+          <p:nvPr/>
+        </p:nvSpPr>
+        <p:spPr>
+          <a:xfrm>
+            <a:off x="4754880" y="4187952"/>
             <a:ext cx="54864" cy="566928"/>
           </a:xfrm>
           <a:prstGeom prst="rect">
@@ -15904,13 +15657,13 @@
       </p:sp>
       <p:sp>
         <p:nvSpPr>
-          <p:cNvPr id="41" name="Text 39"/>
-          <p:cNvSpPr/>
-          <p:nvPr/>
-        </p:nvSpPr>
-        <p:spPr>
-          <a:xfrm>
-            <a:off x="4919472" y="3566160"/>
+          <p:cNvPr id="45" name="Text 43"/>
+          <p:cNvSpPr/>
+          <p:nvPr/>
+        </p:nvSpPr>
+        <p:spPr>
+          <a:xfrm>
+            <a:off x="4919472" y="4224528"/>
             <a:ext cx="3840480" cy="237744"/>
           </a:xfrm>
           <a:prstGeom prst="rect">
@@ -15923,7 +15676,7 @@
           <a:bodyPr wrap="square" lIns="0" tIns="0" rIns="0" bIns="0" rtlCol="0" anchor="ctr"/>
           <a:lstStyle/>
           <a:p>
-            <a:pPr algn="l" indent="0" marL="0">
+            <a:pPr marL="0" indent="0" algn="l">
               <a:buNone/>
             </a:pPr>
             <a:r>
@@ -15935,7 +15688,7 @@
                 <a:ea typeface="Trebuchet MS" pitchFamily="34" charset="-122"/>
                 <a:cs typeface="Trebuchet MS" pitchFamily="34" charset="-120"/>
               </a:rPr>
-              <a:t>Cache Resets on Restart</a:t>
+              <a:t>Cold Start Delay</a:t>
             </a:r>
             <a:endParaRPr lang="en-US" sz="1200" dirty="0"/>
           </a:p>
@@ -15943,13 +15696,13 @@
       </p:sp>
       <p:sp>
         <p:nvSpPr>
-          <p:cNvPr id="42" name="Text 40"/>
-          <p:cNvSpPr/>
-          <p:nvPr/>
-        </p:nvSpPr>
-        <p:spPr>
-          <a:xfrm>
-            <a:off x="4919472" y="3822192"/>
+          <p:cNvPr id="46" name="Text 44"/>
+          <p:cNvSpPr/>
+          <p:nvPr/>
+        </p:nvSpPr>
+        <p:spPr>
+          <a:xfrm>
+            <a:off x="4919472" y="4480560"/>
             <a:ext cx="3840480" cy="256032"/>
           </a:xfrm>
           <a:prstGeom prst="rect">
@@ -15962,7 +15715,7 @@
           <a:bodyPr wrap="square" lIns="0" tIns="0" rIns="0" bIns="0" rtlCol="0" anchor="t"/>
           <a:lstStyle/>
           <a:p>
-            <a:pPr algn="l" indent="0" marL="0">
+            <a:pPr marL="0" indent="0" algn="l">
               <a:buNone/>
             </a:pPr>
             <a:r>
@@ -15974,141 +15727,6 @@
                 <a:ea typeface="Calibri" pitchFamily="34" charset="-122"/>
                 <a:cs typeface="Calibri" pitchFamily="34" charset="-120"/>
               </a:rPr>
-              <a:t>In-memory cache is lost on every server restart or redeploy</a:t>
-            </a:r>
-            <a:endParaRPr lang="en-US" sz="1000" dirty="0"/>
-          </a:p>
-        </p:txBody>
-      </p:sp>
-      <p:sp>
-        <p:nvSpPr>
-          <p:cNvPr id="43" name="Shape 41"/>
-          <p:cNvSpPr/>
-          <p:nvPr/>
-        </p:nvSpPr>
-        <p:spPr>
-          <a:xfrm>
-            <a:off x="4754880" y="4187952"/>
-            <a:ext cx="4114800" cy="566928"/>
-          </a:xfrm>
-          <a:prstGeom prst="rect">
-            <a:avLst/>
-          </a:prstGeom>
-          <a:solidFill>
-            <a:srgbClr val="0D1626"/>
-          </a:solidFill>
-          <a:ln w="12700">
-            <a:solidFill>
-              <a:srgbClr val="1F2937"/>
-            </a:solidFill>
-            <a:prstDash val="solid"/>
-          </a:ln>
-          <a:effectLst>
-            <a:outerShdw sx="100000" sy="100000" kx="0" ky="0" algn="bl" rotWithShape="0" blurRad="101600" dist="38100" dir="8100000">
-              <a:srgbClr val="000000">
-                <a:alpha val="25000"/>
-              </a:srgbClr>
-            </a:outerShdw>
-          </a:effectLst>
-        </p:spPr>
-      </p:sp>
-      <p:sp>
-        <p:nvSpPr>
-          <p:cNvPr id="44" name="Shape 42"/>
-          <p:cNvSpPr/>
-          <p:nvPr/>
-        </p:nvSpPr>
-        <p:spPr>
-          <a:xfrm>
-            <a:off x="4754880" y="4187952"/>
-            <a:ext cx="54864" cy="566928"/>
-          </a:xfrm>
-          <a:prstGeom prst="rect">
-            <a:avLst/>
-          </a:prstGeom>
-          <a:solidFill>
-            <a:srgbClr val="FF4444"/>
-          </a:solidFill>
-          <a:ln w="12700">
-            <a:solidFill>
-              <a:srgbClr val="333333"/>
-            </a:solidFill>
-            <a:prstDash val="solid"/>
-          </a:ln>
-        </p:spPr>
-      </p:sp>
-      <p:sp>
-        <p:nvSpPr>
-          <p:cNvPr id="45" name="Text 43"/>
-          <p:cNvSpPr/>
-          <p:nvPr/>
-        </p:nvSpPr>
-        <p:spPr>
-          <a:xfrm>
-            <a:off x="4919472" y="4224528"/>
-            <a:ext cx="3840480" cy="237744"/>
-          </a:xfrm>
-          <a:prstGeom prst="rect">
-            <a:avLst/>
-          </a:prstGeom>
-          <a:noFill/>
-          <a:ln/>
-        </p:spPr>
-        <p:txBody>
-          <a:bodyPr wrap="square" lIns="0" tIns="0" rIns="0" bIns="0" rtlCol="0" anchor="ctr"/>
-          <a:lstStyle/>
-          <a:p>
-            <a:pPr algn="l" indent="0" marL="0">
-              <a:buNone/>
-            </a:pPr>
-            <a:r>
-              <a:rPr lang="en-US" sz="1200" b="1" dirty="0">
-                <a:solidFill>
-                  <a:srgbClr val="FFFFFF"/>
-                </a:solidFill>
-                <a:latin typeface="Trebuchet MS" pitchFamily="34" charset="0"/>
-                <a:ea typeface="Trebuchet MS" pitchFamily="34" charset="-122"/>
-                <a:cs typeface="Trebuchet MS" pitchFamily="34" charset="-120"/>
-              </a:rPr>
-              <a:t>Cold Start Delay</a:t>
-            </a:r>
-            <a:endParaRPr lang="en-US" sz="1200" dirty="0"/>
-          </a:p>
-        </p:txBody>
-      </p:sp>
-      <p:sp>
-        <p:nvSpPr>
-          <p:cNvPr id="46" name="Text 44"/>
-          <p:cNvSpPr/>
-          <p:nvPr/>
-        </p:nvSpPr>
-        <p:spPr>
-          <a:xfrm>
-            <a:off x="4919472" y="4480560"/>
-            <a:ext cx="3840480" cy="256032"/>
-          </a:xfrm>
-          <a:prstGeom prst="rect">
-            <a:avLst/>
-          </a:prstGeom>
-          <a:noFill/>
-          <a:ln/>
-        </p:spPr>
-        <p:txBody>
-          <a:bodyPr wrap="square" lIns="0" tIns="0" rIns="0" bIns="0" rtlCol="0" anchor="t"/>
-          <a:lstStyle/>
-          <a:p>
-            <a:pPr algn="l" indent="0" marL="0">
-              <a:buNone/>
-            </a:pPr>
-            <a:r>
-              <a:rPr lang="en-US" sz="1000" dirty="0">
-                <a:solidFill>
-                  <a:srgbClr val="9CA3AF"/>
-                </a:solidFill>
-                <a:latin typeface="Calibri" pitchFamily="34" charset="0"/>
-                <a:ea typeface="Calibri" pitchFamily="34" charset="-122"/>
-                <a:cs typeface="Calibri" pitchFamily="34" charset="-120"/>
-              </a:rPr>
               <a:t>Render free tier sleeps after 15 min causing 30-50s wake-up delay</a:t>
             </a:r>
             <a:endParaRPr lang="en-US" sz="1000" dirty="0"/>
@@ -16136,7 +15754,7 @@
           <a:bodyPr wrap="square" lIns="0" tIns="0" rIns="0" bIns="0" rtlCol="0" anchor="t"/>
           <a:lstStyle/>
           <a:p>
-            <a:pPr algn="r" indent="0" marL="0">
+            <a:pPr marL="0" indent="0" algn="r">
               <a:buNone/>
             </a:pPr>
             <a:r>
@@ -16455,4 +16073,299 @@
     </a:ext>
   </a:extLst>
 </a:theme>
+</file>
+
+<file path=ppt/theme/theme2.xml><?xml version="1.0" encoding="utf-8"?>
+<a:theme xmlns:a="http://schemas.openxmlformats.org/drawingml/2006/main" name="Office Theme">
+  <a:themeElements>
+    <a:clrScheme name="Office">
+      <a:dk1>
+        <a:sysClr val="windowText" lastClr="000000"/>
+      </a:dk1>
+      <a:lt1>
+        <a:sysClr val="window" lastClr="FFFFFF"/>
+      </a:lt1>
+      <a:dk2>
+        <a:srgbClr val="44546A"/>
+      </a:dk2>
+      <a:lt2>
+        <a:srgbClr val="E7E6E6"/>
+      </a:lt2>
+      <a:accent1>
+        <a:srgbClr val="4472C4"/>
+      </a:accent1>
+      <a:accent2>
+        <a:srgbClr val="ED7D31"/>
+      </a:accent2>
+      <a:accent3>
+        <a:srgbClr val="A5A5A5"/>
+      </a:accent3>
+      <a:accent4>
+        <a:srgbClr val="FFC000"/>
+      </a:accent4>
+      <a:accent5>
+        <a:srgbClr val="5B9BD5"/>
+      </a:accent5>
+      <a:accent6>
+        <a:srgbClr val="70AD47"/>
+      </a:accent6>
+      <a:hlink>
+        <a:srgbClr val="0563C1"/>
+      </a:hlink>
+      <a:folHlink>
+        <a:srgbClr val="954F72"/>
+      </a:folHlink>
+    </a:clrScheme>
+    <a:fontScheme name="Office">
+      <a:majorFont>
+        <a:latin typeface="Calibri Light" panose="020F0302020204030204"/>
+        <a:ea typeface=""/>
+        <a:cs typeface=""/>
+        <a:font script="Jpan" typeface="游ゴシック Light"/>
+        <a:font script="Hang" typeface="맑은 고딕"/>
+        <a:font script="Hans" typeface="等线 Light"/>
+        <a:font script="Hant" typeface="新細明體"/>
+        <a:font script="Arab" typeface="Times New Roman"/>
+        <a:font script="Hebr" typeface="Times New Roman"/>
+        <a:font script="Thai" typeface="Angsana New"/>
+        <a:font script="Ethi" typeface="Nyala"/>
+        <a:font script="Beng" typeface="Vrinda"/>
+        <a:font script="Gujr" typeface="Shruti"/>
+        <a:font script="Khmr" typeface="MoolBoran"/>
+        <a:font script="Knda" typeface="Tunga"/>
+        <a:font script="Guru" typeface="Raavi"/>
+        <a:font script="Cans" typeface="Euphemia"/>
+        <a:font script="Cher" typeface="Plantagenet Cherokee"/>
+        <a:font script="Yiii" typeface="Microsoft Yi Baiti"/>
+        <a:font script="Tibt" typeface="Microsoft Himalaya"/>
+        <a:font script="Thaa" typeface="MV Boli"/>
+        <a:font script="Deva" typeface="Mangal"/>
+        <a:font script="Telu" typeface="Gautami"/>
+        <a:font script="Taml" typeface="Latha"/>
+        <a:font script="Syrc" typeface="Estrangelo Edessa"/>
+        <a:font script="Orya" typeface="Kalinga"/>
+        <a:font script="Mlym" typeface="Kartika"/>
+        <a:font script="Laoo" typeface="DokChampa"/>
+        <a:font script="Sinh" typeface="Iskoola Pota"/>
+        <a:font script="Mong" typeface="Mongolian Baiti"/>
+        <a:font script="Viet" typeface="Times New Roman"/>
+        <a:font script="Uigh" typeface="Microsoft Uighur"/>
+        <a:font script="Geor" typeface="Sylfaen"/>
+        <a:font script="Armn" typeface="Arial"/>
+        <a:font script="Bugi" typeface="Leelawadee UI"/>
+        <a:font script="Bopo" typeface="Microsoft JhengHei"/>
+        <a:font script="Java" typeface="Javanese Text"/>
+        <a:font script="Lisu" typeface="Segoe UI"/>
+        <a:font script="Mymr" typeface="Myanmar Text"/>
+        <a:font script="Nkoo" typeface="Ebrima"/>
+        <a:font script="Olck" typeface="Nirmala UI"/>
+        <a:font script="Osma" typeface="Ebrima"/>
+        <a:font script="Phag" typeface="Phagspa"/>
+        <a:font script="Syrn" typeface="Estrangelo Edessa"/>
+        <a:font script="Syrj" typeface="Estrangelo Edessa"/>
+        <a:font script="Syre" typeface="Estrangelo Edessa"/>
+        <a:font script="Sora" typeface="Nirmala UI"/>
+        <a:font script="Tale" typeface="Microsoft Tai Le"/>
+        <a:font script="Talu" typeface="Microsoft New Tai Lue"/>
+        <a:font script="Tfng" typeface="Ebrima"/>
+      </a:majorFont>
+      <a:minorFont>
+        <a:latin typeface="Calibri" panose="020F0502020204030204"/>
+        <a:ea typeface=""/>
+        <a:cs typeface=""/>
+        <a:font script="Jpan" typeface="游ゴシック"/>
+        <a:font script="Hang" typeface="맑은 고딕"/>
+        <a:font script="Hans" typeface="等线"/>
+        <a:font script="Hant" typeface="新細明體"/>
+        <a:font script="Arab" typeface="Arial"/>
+        <a:font script="Hebr" typeface="Arial"/>
+        <a:font script="Thai" typeface="Cordia New"/>
+        <a:font script="Ethi" typeface="Nyala"/>
+        <a:font script="Beng" typeface="Vrinda"/>
+        <a:font script="Gujr" typeface="Shruti"/>
+        <a:font script="Khmr" typeface="DaunPenh"/>
+        <a:font script="Knda" typeface="Tunga"/>
+        <a:font script="Guru" typeface="Raavi"/>
+        <a:font script="Cans" typeface="Euphemia"/>
+        <a:font script="Cher" typeface="Plantagenet Cherokee"/>
+        <a:font script="Yiii" typeface="Microsoft Yi Baiti"/>
+        <a:font script="Tibt" typeface="Microsoft Himalaya"/>
+        <a:font script="Thaa" typeface="MV Boli"/>
+        <a:font script="Deva" typeface="Mangal"/>
+        <a:font script="Telu" typeface="Gautami"/>
+        <a:font script="Taml" typeface="Latha"/>
+        <a:font script="Syrc" typeface="Estrangelo Edessa"/>
+        <a:font script="Orya" typeface="Kalinga"/>
+        <a:font script="Mlym" typeface="Kartika"/>
+        <a:font script="Laoo" typeface="DokChampa"/>
+        <a:font script="Sinh" typeface="Iskoola Pota"/>
+        <a:font script="Mong" typeface="Mongolian Baiti"/>
+        <a:font script="Viet" typeface="Arial"/>
+        <a:font script="Uigh" typeface="Microsoft Uighur"/>
+        <a:font script="Geor" typeface="Sylfaen"/>
+        <a:font script="Armn" typeface="Arial"/>
+        <a:font script="Bugi" typeface="Leelawadee UI"/>
+        <a:font script="Bopo" typeface="Microsoft JhengHei"/>
+        <a:font script="Java" typeface="Javanese Text"/>
+        <a:font script="Lisu" typeface="Segoe UI"/>
+        <a:font script="Mymr" typeface="Myanmar Text"/>
+        <a:font script="Nkoo" typeface="Ebrima"/>
+        <a:font script="Olck" typeface="Nirmala UI"/>
+        <a:font script="Osma" typeface="Ebrima"/>
+        <a:font script="Phag" typeface="Phagspa"/>
+        <a:font script="Syrn" typeface="Estrangelo Edessa"/>
+        <a:font script="Syrj" typeface="Estrangelo Edessa"/>
+        <a:font script="Syre" typeface="Estrangelo Edessa"/>
+        <a:font script="Sora" typeface="Nirmala UI"/>
+        <a:font script="Tale" typeface="Microsoft Tai Le"/>
+        <a:font script="Talu" typeface="Microsoft New Tai Lue"/>
+        <a:font script="Tfng" typeface="Ebrima"/>
+      </a:minorFont>
+    </a:fontScheme>
+    <a:fmtScheme name="Office">
+      <a:fillStyleLst>
+        <a:solidFill>
+          <a:schemeClr val="phClr"/>
+        </a:solidFill>
+        <a:gradFill rotWithShape="1">
+          <a:gsLst>
+            <a:gs pos="0">
+              <a:schemeClr val="phClr">
+                <a:lumMod val="110000"/>
+                <a:satMod val="105000"/>
+                <a:tint val="67000"/>
+              </a:schemeClr>
+            </a:gs>
+            <a:gs pos="50000">
+              <a:schemeClr val="phClr">
+                <a:lumMod val="105000"/>
+                <a:satMod val="103000"/>
+                <a:tint val="73000"/>
+              </a:schemeClr>
+            </a:gs>
+            <a:gs pos="100000">
+              <a:schemeClr val="phClr">
+                <a:lumMod val="105000"/>
+                <a:satMod val="109000"/>
+                <a:tint val="81000"/>
+              </a:schemeClr>
+            </a:gs>
+          </a:gsLst>
+          <a:lin ang="5400000" scaled="0"/>
+        </a:gradFill>
+        <a:gradFill rotWithShape="1">
+          <a:gsLst>
+            <a:gs pos="0">
+              <a:schemeClr val="phClr">
+                <a:satMod val="103000"/>
+                <a:lumMod val="102000"/>
+                <a:tint val="94000"/>
+              </a:schemeClr>
+            </a:gs>
+            <a:gs pos="50000">
+              <a:schemeClr val="phClr">
+                <a:satMod val="110000"/>
+                <a:lumMod val="100000"/>
+                <a:shade val="100000"/>
+              </a:schemeClr>
+            </a:gs>
+            <a:gs pos="100000">
+              <a:schemeClr val="phClr">
+                <a:lumMod val="99000"/>
+                <a:satMod val="120000"/>
+                <a:shade val="78000"/>
+              </a:schemeClr>
+            </a:gs>
+          </a:gsLst>
+          <a:lin ang="5400000" scaled="0"/>
+        </a:gradFill>
+      </a:fillStyleLst>
+      <a:lnStyleLst>
+        <a:ln w="6350" cap="flat" cmpd="sng" algn="ctr">
+          <a:solidFill>
+            <a:schemeClr val="phClr"/>
+          </a:solidFill>
+          <a:prstDash val="solid"/>
+          <a:miter lim="800000"/>
+        </a:ln>
+        <a:ln w="12700" cap="flat" cmpd="sng" algn="ctr">
+          <a:solidFill>
+            <a:schemeClr val="phClr"/>
+          </a:solidFill>
+          <a:prstDash val="solid"/>
+          <a:miter lim="800000"/>
+        </a:ln>
+        <a:ln w="19050" cap="flat" cmpd="sng" algn="ctr">
+          <a:solidFill>
+            <a:schemeClr val="phClr"/>
+          </a:solidFill>
+          <a:prstDash val="solid"/>
+          <a:miter lim="800000"/>
+        </a:ln>
+      </a:lnStyleLst>
+      <a:effectStyleLst>
+        <a:effectStyle>
+          <a:effectLst/>
+        </a:effectStyle>
+        <a:effectStyle>
+          <a:effectLst/>
+        </a:effectStyle>
+        <a:effectStyle>
+          <a:effectLst>
+            <a:outerShdw blurRad="57150" dist="19050" dir="5400000" algn="ctr" rotWithShape="0">
+              <a:srgbClr val="000000">
+                <a:alpha val="63000"/>
+              </a:srgbClr>
+            </a:outerShdw>
+          </a:effectLst>
+        </a:effectStyle>
+      </a:effectStyleLst>
+      <a:bgFillStyleLst>
+        <a:solidFill>
+          <a:schemeClr val="phClr"/>
+        </a:solidFill>
+        <a:solidFill>
+          <a:schemeClr val="phClr">
+            <a:tint val="95000"/>
+            <a:satMod val="170000"/>
+          </a:schemeClr>
+        </a:solidFill>
+        <a:gradFill rotWithShape="1">
+          <a:gsLst>
+            <a:gs pos="0">
+              <a:schemeClr val="phClr">
+                <a:tint val="93000"/>
+                <a:satMod val="150000"/>
+                <a:shade val="98000"/>
+                <a:lumMod val="102000"/>
+              </a:schemeClr>
+            </a:gs>
+            <a:gs pos="50000">
+              <a:schemeClr val="phClr">
+                <a:tint val="98000"/>
+                <a:satMod val="130000"/>
+                <a:shade val="90000"/>
+                <a:lumMod val="103000"/>
+              </a:schemeClr>
+            </a:gs>
+            <a:gs pos="100000">
+              <a:schemeClr val="phClr">
+                <a:shade val="63000"/>
+                <a:satMod val="120000"/>
+              </a:schemeClr>
+            </a:gs>
+          </a:gsLst>
+          <a:lin ang="5400000" scaled="0"/>
+        </a:gradFill>
+      </a:bgFillStyleLst>
+    </a:fmtScheme>
+  </a:themeElements>
+  <a:objectDefaults/>
+  <a:extraClrSchemeLst/>
+  <a:extLst>
+    <a:ext uri="{05A4C25C-085E-4340-85A3-A5531E510DB2}">
+      <thm15:themeFamily xmlns:thm15="http://schemas.microsoft.com/office/thememl/2012/main" name="Office Theme" id="{62F939B6-93AF-4DB8-9C6B-D6C7DFDC589F}" vid="{4A3C46E8-61CC-4603-A589-7422A47A8E4A}"/>
+    </a:ext>
+  </a:extLst>
+</a:theme>
 </file>